--- a/it_Security_Agent_Week2_Status.pptx
+++ b/it_Security_Agent_Week2_Status.pptx
@@ -13,6 +13,7 @@
     <p:sldId id="261" r:id="rId12"/>
     <p:sldId id="262" r:id="rId13"/>
     <p:sldId id="263" r:id="rId14"/>
+    <p:sldId id="264" r:id="rId15"/>
   </p:sldIdLst>
   <p:sldSz cx="12192000" cy="6858000" type="screen4x3"/>
   <p:notesSz cx="6858000" cy="9144000"/>
@@ -4229,7 +4230,7 @@
                 </a:solidFill>
                 <a:latin typeface="Calibri"/>
               </a:rPr>
-              <a:t>WEEK 2 · GOAL 1</a:t>
+              <a:t>ARCHITECTURE</a:t>
             </a:r>
           </a:p>
         </p:txBody>
@@ -4264,7 +4265,7 @@
                 </a:solidFill>
                 <a:latin typeface="Calibri"/>
               </a:rPr>
-              <a:t>Baseline Model: A Transparent Confidence Score</a:t>
+              <a:t>Scalable Input Layer — Built for Every Input Type</a:t>
             </a:r>
           </a:p>
         </p:txBody>
@@ -4278,7 +4279,7 @@
         <p:spPr>
           <a:xfrm>
             <a:off x="502920" y="1737360"/>
-            <a:ext cx="10149840" cy="640080"/>
+            <a:ext cx="10149840" cy="685800"/>
           </a:xfrm>
           <a:prstGeom prst="rect">
             <a:avLst/>
@@ -4299,7 +4300,7 @@
                 </a:solidFill>
                 <a:latin typeface="Calibri"/>
               </a:rPr>
-              <a:t>A matcher fires yes/no. A model gives a score you can rank, threshold and evaluate. We add a glass-box confidence in [0,1] from four inspectable signals:</a:t>
+              <a:t>The brief calls for pictures of software OR SBOMs. All input types funnel through one module and emit one Component contract (name, version, vendor, source, confidence) — the matcher never knows where a component came from.</a:t>
             </a:r>
           </a:p>
         </p:txBody>
@@ -4312,8 +4313,8 @@
         </p:nvSpPr>
         <p:spPr>
           <a:xfrm>
-            <a:off x="502920" y="2514600"/>
-            <a:ext cx="2487168" cy="1554480"/>
+            <a:off x="502920" y="2606040"/>
+            <a:ext cx="2487168" cy="914400"/>
           </a:xfrm>
           <a:prstGeom prst="rect">
             <a:avLst/>
@@ -4356,14 +4357,14 @@
         </p:nvSpPr>
         <p:spPr>
           <a:xfrm>
-            <a:off x="502920" y="2514600"/>
-            <a:ext cx="2487168" cy="457200"/>
+            <a:off x="502920" y="2606040"/>
+            <a:ext cx="109728" cy="914400"/>
           </a:xfrm>
           <a:prstGeom prst="rect">
             <a:avLst/>
           </a:prstGeom>
           <a:solidFill>
-            <a:srgbClr val="7A1F3D"/>
+            <a:srgbClr val="2E7D32"/>
           </a:solidFill>
           <a:ln>
             <a:noFill/>
@@ -4400,8 +4401,8 @@
         </p:nvSpPr>
         <p:spPr>
           <a:xfrm>
-            <a:off x="502920" y="2560320"/>
-            <a:ext cx="2487168" cy="365760"/>
+            <a:off x="731520" y="2715768"/>
+            <a:ext cx="2212848" cy="365760"/>
           </a:xfrm>
           <a:prstGeom prst="rect">
             <a:avLst/>
@@ -4414,15 +4415,15 @@
           </a:bodyPr>
           <a:lstStyle/>
           <a:p>
-            <a:pPr algn="ctr"/>
-            <a:r>
-              <a:rPr sz="1300" b="1" i="0">
-                <a:solidFill>
-                  <a:srgbClr val="FFFFFF"/>
-                </a:solidFill>
-                <a:latin typeface="Calibri"/>
-              </a:rPr>
-              <a:t>Match path</a:t>
+            <a:pPr algn="l"/>
+            <a:r>
+              <a:rPr sz="1400" b="1" i="0">
+                <a:solidFill>
+                  <a:srgbClr val="2B2B2B"/>
+                </a:solidFill>
+                <a:latin typeface="Calibri"/>
+              </a:rPr>
+              <a:t>CycloneDX SBOM</a:t>
             </a:r>
           </a:p>
         </p:txBody>
@@ -4435,8 +4436,8 @@
         </p:nvSpPr>
         <p:spPr>
           <a:xfrm>
-            <a:off x="502920" y="3063240"/>
-            <a:ext cx="2487168" cy="731520"/>
+            <a:off x="731520" y="3081528"/>
+            <a:ext cx="2212848" cy="320040"/>
           </a:xfrm>
           <a:prstGeom prst="rect">
             <a:avLst/>
@@ -4449,65 +4450,29 @@
           </a:bodyPr>
           <a:lstStyle/>
           <a:p>
-            <a:pPr algn="ctr"/>
+            <a:pPr algn="l"/>
             <a:r>
               <a:rPr sz="1100" b="0" i="0">
                 <a:solidFill>
-                  <a:srgbClr val="2B2B2B"/>
-                </a:solidFill>
-                <a:latin typeface="Calibri"/>
-              </a:rPr>
-              <a:t>CPE+range stricter
-than affected[] fallback</a:t>
-            </a:r>
-          </a:p>
-        </p:txBody>
-      </p:sp>
-      <p:sp>
-        <p:nvSpPr>
-          <p:cNvPr id="13" name="TextBox 12"/>
-          <p:cNvSpPr txBox="1"/>
-          <p:nvPr/>
-        </p:nvSpPr>
-        <p:spPr>
-          <a:xfrm>
-            <a:off x="502920" y="3703320"/>
-            <a:ext cx="2487168" cy="320040"/>
-          </a:xfrm>
-          <a:prstGeom prst="rect">
-            <a:avLst/>
-          </a:prstGeom>
-          <a:noFill/>
-        </p:spPr>
-        <p:txBody>
-          <a:bodyPr wrap="square" anchor="t" lIns="50800" rIns="50800" tIns="25400" bIns="25400">
-            <a:spAutoFit/>
-          </a:bodyPr>
-          <a:lstStyle/>
-          <a:p>
-            <a:pPr algn="ctr"/>
-            <a:r>
-              <a:rPr sz="1200" b="1" i="0">
-                <a:solidFill>
-                  <a:srgbClr val="A83A5B"/>
-                </a:solidFill>
-                <a:latin typeface="Calibri"/>
-              </a:rPr>
-              <a:t>weight 0.40</a:t>
-            </a:r>
-          </a:p>
-        </p:txBody>
-      </p:sp>
-      <p:sp>
-        <p:nvSpPr>
-          <p:cNvPr id="14" name="Rectangle 13"/>
+                  <a:srgbClr val="2E7D32"/>
+                </a:solidFill>
+                <a:latin typeface="Calibri"/>
+              </a:rPr>
+              <a:t>extraction confidence 1.00</a:t>
+            </a:r>
+          </a:p>
+        </p:txBody>
+      </p:sp>
+      <p:sp>
+        <p:nvSpPr>
+          <p:cNvPr id="13" name="Rectangle 12"/>
           <p:cNvSpPr/>
           <p:nvPr/>
         </p:nvSpPr>
         <p:spPr>
           <a:xfrm>
-            <a:off x="3035808" y="2514600"/>
-            <a:ext cx="2487168" cy="1554480"/>
+            <a:off x="3035808" y="2606040"/>
+            <a:ext cx="2487168" cy="914400"/>
           </a:xfrm>
           <a:prstGeom prst="rect">
             <a:avLst/>
@@ -4544,20 +4509,20 @@
       </p:sp>
       <p:sp>
         <p:nvSpPr>
-          <p:cNvPr id="15" name="Rectangle 14"/>
+          <p:cNvPr id="14" name="Rectangle 13"/>
           <p:cNvSpPr/>
           <p:nvPr/>
         </p:nvSpPr>
         <p:spPr>
           <a:xfrm>
-            <a:off x="3035808" y="2514600"/>
-            <a:ext cx="2487168" cy="457200"/>
+            <a:off x="3035808" y="2606040"/>
+            <a:ext cx="109728" cy="914400"/>
           </a:xfrm>
           <a:prstGeom prst="rect">
             <a:avLst/>
           </a:prstGeom>
           <a:solidFill>
-            <a:srgbClr val="7A1F3D"/>
+            <a:srgbClr val="2E7D32"/>
           </a:solidFill>
           <a:ln>
             <a:noFill/>
@@ -4588,14 +4553,49 @@
       </p:sp>
       <p:sp>
         <p:nvSpPr>
+          <p:cNvPr id="15" name="TextBox 14"/>
+          <p:cNvSpPr txBox="1"/>
+          <p:nvPr/>
+        </p:nvSpPr>
+        <p:spPr>
+          <a:xfrm>
+            <a:off x="3264408" y="2715768"/>
+            <a:ext cx="2212848" cy="365760"/>
+          </a:xfrm>
+          <a:prstGeom prst="rect">
+            <a:avLst/>
+          </a:prstGeom>
+          <a:noFill/>
+        </p:spPr>
+        <p:txBody>
+          <a:bodyPr wrap="square" anchor="t" lIns="50800" rIns="50800" tIns="25400" bIns="25400">
+            <a:spAutoFit/>
+          </a:bodyPr>
+          <a:lstStyle/>
+          <a:p>
+            <a:pPr algn="l"/>
+            <a:r>
+              <a:rPr sz="1400" b="1" i="0">
+                <a:solidFill>
+                  <a:srgbClr val="2B2B2B"/>
+                </a:solidFill>
+                <a:latin typeface="Calibri"/>
+              </a:rPr>
+              <a:t>SPDX SBOM</a:t>
+            </a:r>
+          </a:p>
+        </p:txBody>
+      </p:sp>
+      <p:sp>
+        <p:nvSpPr>
           <p:cNvPr id="16" name="TextBox 15"/>
           <p:cNvSpPr txBox="1"/>
           <p:nvPr/>
         </p:nvSpPr>
         <p:spPr>
           <a:xfrm>
-            <a:off x="3035808" y="2560320"/>
-            <a:ext cx="2487168" cy="365760"/>
+            <a:off x="3264408" y="3081528"/>
+            <a:ext cx="2212848" cy="320040"/>
           </a:xfrm>
           <a:prstGeom prst="rect">
             <a:avLst/>
@@ -4608,100 +4608,29 @@
           </a:bodyPr>
           <a:lstStyle/>
           <a:p>
-            <a:pPr algn="ctr"/>
-            <a:r>
-              <a:rPr sz="1300" b="1" i="0">
-                <a:solidFill>
-                  <a:srgbClr val="FFFFFF"/>
-                </a:solidFill>
-                <a:latin typeface="Calibri"/>
-              </a:rPr>
-              <a:t>Version specificity</a:t>
-            </a:r>
-          </a:p>
-        </p:txBody>
-      </p:sp>
-      <p:sp>
-        <p:nvSpPr>
-          <p:cNvPr id="17" name="TextBox 16"/>
-          <p:cNvSpPr txBox="1"/>
-          <p:nvPr/>
-        </p:nvSpPr>
-        <p:spPr>
-          <a:xfrm>
-            <a:off x="3035808" y="3063240"/>
-            <a:ext cx="2487168" cy="731520"/>
-          </a:xfrm>
-          <a:prstGeom prst="rect">
-            <a:avLst/>
-          </a:prstGeom>
-          <a:noFill/>
-        </p:spPr>
-        <p:txBody>
-          <a:bodyPr wrap="square" anchor="t" lIns="50800" rIns="50800" tIns="25400" bIns="25400">
-            <a:spAutoFit/>
-          </a:bodyPr>
-          <a:lstStyle/>
-          <a:p>
-            <a:pPr algn="ctr"/>
+            <a:pPr algn="l"/>
             <a:r>
               <a:rPr sz="1100" b="0" i="0">
                 <a:solidFill>
-                  <a:srgbClr val="2B2B2B"/>
-                </a:solidFill>
-                <a:latin typeface="Calibri"/>
-              </a:rPr>
-              <a:t>Exact pin &gt; bounded
-range &gt; wildcard</a:t>
-            </a:r>
-          </a:p>
-        </p:txBody>
-      </p:sp>
-      <p:sp>
-        <p:nvSpPr>
-          <p:cNvPr id="18" name="TextBox 17"/>
-          <p:cNvSpPr txBox="1"/>
-          <p:nvPr/>
-        </p:nvSpPr>
-        <p:spPr>
-          <a:xfrm>
-            <a:off x="3035808" y="3703320"/>
-            <a:ext cx="2487168" cy="320040"/>
-          </a:xfrm>
-          <a:prstGeom prst="rect">
-            <a:avLst/>
-          </a:prstGeom>
-          <a:noFill/>
-        </p:spPr>
-        <p:txBody>
-          <a:bodyPr wrap="square" anchor="t" lIns="50800" rIns="50800" tIns="25400" bIns="25400">
-            <a:spAutoFit/>
-          </a:bodyPr>
-          <a:lstStyle/>
-          <a:p>
-            <a:pPr algn="ctr"/>
-            <a:r>
-              <a:rPr sz="1200" b="1" i="0">
-                <a:solidFill>
-                  <a:srgbClr val="A83A5B"/>
-                </a:solidFill>
-                <a:latin typeface="Calibri"/>
-              </a:rPr>
-              <a:t>weight 0.25</a:t>
-            </a:r>
-          </a:p>
-        </p:txBody>
-      </p:sp>
-      <p:sp>
-        <p:nvSpPr>
-          <p:cNvPr id="19" name="Rectangle 18"/>
+                  <a:srgbClr val="2E7D32"/>
+                </a:solidFill>
+                <a:latin typeface="Calibri"/>
+              </a:rPr>
+              <a:t>extraction confidence 1.00</a:t>
+            </a:r>
+          </a:p>
+        </p:txBody>
+      </p:sp>
+      <p:sp>
+        <p:nvSpPr>
+          <p:cNvPr id="17" name="Rectangle 16"/>
           <p:cNvSpPr/>
           <p:nvPr/>
         </p:nvSpPr>
         <p:spPr>
           <a:xfrm>
-            <a:off x="5568696" y="2514600"/>
-            <a:ext cx="2487168" cy="1554480"/>
+            <a:off x="5568696" y="2606040"/>
+            <a:ext cx="2487168" cy="914400"/>
           </a:xfrm>
           <a:prstGeom prst="rect">
             <a:avLst/>
@@ -4738,20 +4667,20 @@
       </p:sp>
       <p:sp>
         <p:nvSpPr>
-          <p:cNvPr id="20" name="Rectangle 19"/>
+          <p:cNvPr id="18" name="Rectangle 17"/>
           <p:cNvSpPr/>
           <p:nvPr/>
         </p:nvSpPr>
         <p:spPr>
           <a:xfrm>
-            <a:off x="5568696" y="2514600"/>
-            <a:ext cx="2487168" cy="457200"/>
+            <a:off x="5568696" y="2606040"/>
+            <a:ext cx="109728" cy="914400"/>
           </a:xfrm>
           <a:prstGeom prst="rect">
             <a:avLst/>
           </a:prstGeom>
           <a:solidFill>
-            <a:srgbClr val="7A1F3D"/>
+            <a:srgbClr val="2E7D32"/>
           </a:solidFill>
           <a:ln>
             <a:noFill/>
@@ -4782,14 +4711,14 @@
       </p:sp>
       <p:sp>
         <p:nvSpPr>
-          <p:cNvPr id="21" name="TextBox 20"/>
-          <p:cNvSpPr txBox="1"/>
-          <p:nvPr/>
-        </p:nvSpPr>
-        <p:spPr>
-          <a:xfrm>
-            <a:off x="5568696" y="2560320"/>
-            <a:ext cx="2487168" cy="365760"/>
+          <p:cNvPr id="19" name="TextBox 18"/>
+          <p:cNvSpPr txBox="1"/>
+          <p:nvPr/>
+        </p:nvSpPr>
+        <p:spPr>
+          <a:xfrm>
+            <a:off x="5797296" y="2715768"/>
+            <a:ext cx="2212848" cy="365760"/>
           </a:xfrm>
           <a:prstGeom prst="rect">
             <a:avLst/>
@@ -4802,29 +4731,29 @@
           </a:bodyPr>
           <a:lstStyle/>
           <a:p>
-            <a:pPr algn="ctr"/>
-            <a:r>
-              <a:rPr sz="1300" b="1" i="0">
-                <a:solidFill>
-                  <a:srgbClr val="FFFFFF"/>
-                </a:solidFill>
-                <a:latin typeface="Calibri"/>
-              </a:rPr>
-              <a:t>Input source</a:t>
-            </a:r>
-          </a:p>
-        </p:txBody>
-      </p:sp>
-      <p:sp>
-        <p:nvSpPr>
-          <p:cNvPr id="22" name="TextBox 21"/>
-          <p:cNvSpPr txBox="1"/>
-          <p:nvPr/>
-        </p:nvSpPr>
-        <p:spPr>
-          <a:xfrm>
-            <a:off x="5568696" y="3063240"/>
-            <a:ext cx="2487168" cy="731520"/>
+            <a:pPr algn="l"/>
+            <a:r>
+              <a:rPr sz="1400" b="1" i="0">
+                <a:solidFill>
+                  <a:srgbClr val="2B2B2B"/>
+                </a:solidFill>
+                <a:latin typeface="Calibri"/>
+              </a:rPr>
+              <a:t>Simple JSON</a:t>
+            </a:r>
+          </a:p>
+        </p:txBody>
+      </p:sp>
+      <p:sp>
+        <p:nvSpPr>
+          <p:cNvPr id="20" name="TextBox 19"/>
+          <p:cNvSpPr txBox="1"/>
+          <p:nvPr/>
+        </p:nvSpPr>
+        <p:spPr>
+          <a:xfrm>
+            <a:off x="5797296" y="3081528"/>
+            <a:ext cx="2212848" cy="320040"/>
           </a:xfrm>
           <a:prstGeom prst="rect">
             <a:avLst/>
@@ -4837,65 +4766,29 @@
           </a:bodyPr>
           <a:lstStyle/>
           <a:p>
-            <a:pPr algn="ctr"/>
+            <a:pPr algn="l"/>
             <a:r>
               <a:rPr sz="1100" b="0" i="0">
                 <a:solidFill>
-                  <a:srgbClr val="2B2B2B"/>
-                </a:solidFill>
-                <a:latin typeface="Calibri"/>
-              </a:rPr>
-              <a:t>SBOM parse beats
-(future) OCR</a:t>
-            </a:r>
-          </a:p>
-        </p:txBody>
-      </p:sp>
-      <p:sp>
-        <p:nvSpPr>
-          <p:cNvPr id="23" name="TextBox 22"/>
-          <p:cNvSpPr txBox="1"/>
-          <p:nvPr/>
-        </p:nvSpPr>
-        <p:spPr>
-          <a:xfrm>
-            <a:off x="5568696" y="3703320"/>
-            <a:ext cx="2487168" cy="320040"/>
-          </a:xfrm>
-          <a:prstGeom prst="rect">
-            <a:avLst/>
-          </a:prstGeom>
-          <a:noFill/>
-        </p:spPr>
-        <p:txBody>
-          <a:bodyPr wrap="square" anchor="t" lIns="50800" rIns="50800" tIns="25400" bIns="25400">
-            <a:spAutoFit/>
-          </a:bodyPr>
-          <a:lstStyle/>
-          <a:p>
-            <a:pPr algn="ctr"/>
-            <a:r>
-              <a:rPr sz="1200" b="1" i="0">
-                <a:solidFill>
-                  <a:srgbClr val="A83A5B"/>
-                </a:solidFill>
-                <a:latin typeface="Calibri"/>
-              </a:rPr>
-              <a:t>weight 0.20</a:t>
-            </a:r>
-          </a:p>
-        </p:txBody>
-      </p:sp>
-      <p:sp>
-        <p:nvSpPr>
-          <p:cNvPr id="24" name="Rectangle 23"/>
+                  <a:srgbClr val="2E7D32"/>
+                </a:solidFill>
+                <a:latin typeface="Calibri"/>
+              </a:rPr>
+              <a:t>extraction confidence 1.00</a:t>
+            </a:r>
+          </a:p>
+        </p:txBody>
+      </p:sp>
+      <p:sp>
+        <p:nvSpPr>
+          <p:cNvPr id="21" name="Rectangle 20"/>
           <p:cNvSpPr/>
           <p:nvPr/>
         </p:nvSpPr>
         <p:spPr>
           <a:xfrm>
-            <a:off x="8101584" y="2514600"/>
-            <a:ext cx="2487168" cy="1554480"/>
+            <a:off x="8101584" y="2606040"/>
+            <a:ext cx="2487168" cy="914400"/>
           </a:xfrm>
           <a:prstGeom prst="rect">
             <a:avLst/>
@@ -4932,20 +4825,20 @@
       </p:sp>
       <p:sp>
         <p:nvSpPr>
-          <p:cNvPr id="25" name="Rectangle 24"/>
+          <p:cNvPr id="22" name="Rectangle 21"/>
           <p:cNvSpPr/>
           <p:nvPr/>
         </p:nvSpPr>
         <p:spPr>
           <a:xfrm>
-            <a:off x="8101584" y="2514600"/>
-            <a:ext cx="2487168" cy="457200"/>
+            <a:off x="8101584" y="2606040"/>
+            <a:ext cx="109728" cy="914400"/>
           </a:xfrm>
           <a:prstGeom prst="rect">
             <a:avLst/>
           </a:prstGeom>
           <a:solidFill>
-            <a:srgbClr val="7A1F3D"/>
+            <a:srgbClr val="2E7D32"/>
           </a:solidFill>
           <a:ln>
             <a:noFill/>
@@ -4976,14 +4869,14 @@
       </p:sp>
       <p:sp>
         <p:nvSpPr>
-          <p:cNvPr id="26" name="TextBox 25"/>
-          <p:cNvSpPr txBox="1"/>
-          <p:nvPr/>
-        </p:nvSpPr>
-        <p:spPr>
-          <a:xfrm>
-            <a:off x="8101584" y="2560320"/>
-            <a:ext cx="2487168" cy="365760"/>
+          <p:cNvPr id="23" name="TextBox 22"/>
+          <p:cNvSpPr txBox="1"/>
+          <p:nvPr/>
+        </p:nvSpPr>
+        <p:spPr>
+          <a:xfrm>
+            <a:off x="8330184" y="2715768"/>
+            <a:ext cx="2212848" cy="365760"/>
           </a:xfrm>
           <a:prstGeom prst="rect">
             <a:avLst/>
@@ -4996,29 +4889,29 @@
           </a:bodyPr>
           <a:lstStyle/>
           <a:p>
-            <a:pPr algn="ctr"/>
-            <a:r>
-              <a:rPr sz="1300" b="1" i="0">
-                <a:solidFill>
-                  <a:srgbClr val="FFFFFF"/>
-                </a:solidFill>
-                <a:latin typeface="Calibri"/>
-              </a:rPr>
-              <a:t>Vendor known</a:t>
-            </a:r>
-          </a:p>
-        </p:txBody>
-      </p:sp>
-      <p:sp>
-        <p:nvSpPr>
-          <p:cNvPr id="27" name="TextBox 26"/>
-          <p:cNvSpPr txBox="1"/>
-          <p:nvPr/>
-        </p:nvSpPr>
-        <p:spPr>
-          <a:xfrm>
-            <a:off x="8101584" y="3063240"/>
-            <a:ext cx="2487168" cy="731520"/>
+            <a:pPr algn="l"/>
+            <a:r>
+              <a:rPr sz="1400" b="1" i="0">
+                <a:solidFill>
+                  <a:srgbClr val="2B2B2B"/>
+                </a:solidFill>
+                <a:latin typeface="Calibri"/>
+              </a:rPr>
+              <a:t>requirements.txt</a:t>
+            </a:r>
+          </a:p>
+        </p:txBody>
+      </p:sp>
+      <p:sp>
+        <p:nvSpPr>
+          <p:cNvPr id="24" name="TextBox 23"/>
+          <p:cNvSpPr txBox="1"/>
+          <p:nvPr/>
+        </p:nvSpPr>
+        <p:spPr>
+          <a:xfrm>
+            <a:off x="8330184" y="3081528"/>
+            <a:ext cx="2212848" cy="320040"/>
           </a:xfrm>
           <a:prstGeom prst="rect">
             <a:avLst/>
@@ -5031,71 +4924,35 @@
           </a:bodyPr>
           <a:lstStyle/>
           <a:p>
-            <a:pPr algn="ctr"/>
+            <a:pPr algn="l"/>
             <a:r>
               <a:rPr sz="1100" b="0" i="0">
                 <a:solidFill>
-                  <a:srgbClr val="2B2B2B"/>
-                </a:solidFill>
-                <a:latin typeface="Calibri"/>
-              </a:rPr>
-              <a:t>Named vendor cuts
-cross-product hits</a:t>
-            </a:r>
-          </a:p>
-        </p:txBody>
-      </p:sp>
-      <p:sp>
-        <p:nvSpPr>
-          <p:cNvPr id="28" name="TextBox 27"/>
-          <p:cNvSpPr txBox="1"/>
-          <p:nvPr/>
-        </p:nvSpPr>
-        <p:spPr>
-          <a:xfrm>
-            <a:off x="8101584" y="3703320"/>
-            <a:ext cx="2487168" cy="320040"/>
-          </a:xfrm>
-          <a:prstGeom prst="rect">
-            <a:avLst/>
-          </a:prstGeom>
-          <a:noFill/>
-        </p:spPr>
-        <p:txBody>
-          <a:bodyPr wrap="square" anchor="t" lIns="50800" rIns="50800" tIns="25400" bIns="25400">
-            <a:spAutoFit/>
-          </a:bodyPr>
-          <a:lstStyle/>
-          <a:p>
-            <a:pPr algn="ctr"/>
-            <a:r>
-              <a:rPr sz="1200" b="1" i="0">
-                <a:solidFill>
-                  <a:srgbClr val="A83A5B"/>
-                </a:solidFill>
-                <a:latin typeface="Calibri"/>
-              </a:rPr>
-              <a:t>weight 0.15</a:t>
-            </a:r>
-          </a:p>
-        </p:txBody>
-      </p:sp>
-      <p:sp>
-        <p:nvSpPr>
-          <p:cNvPr id="29" name="Rectangle 28"/>
+                  <a:srgbClr val="2E7D32"/>
+                </a:solidFill>
+                <a:latin typeface="Calibri"/>
+              </a:rPr>
+              <a:t>extraction confidence 0.90</a:t>
+            </a:r>
+          </a:p>
+        </p:txBody>
+      </p:sp>
+      <p:sp>
+        <p:nvSpPr>
+          <p:cNvPr id="25" name="Rectangle 24"/>
           <p:cNvSpPr/>
           <p:nvPr/>
         </p:nvSpPr>
         <p:spPr>
           <a:xfrm>
-            <a:off x="502920" y="4343400"/>
-            <a:ext cx="10149840" cy="1417320"/>
+            <a:off x="502920" y="3657600"/>
+            <a:ext cx="2487168" cy="914400"/>
           </a:xfrm>
           <a:prstGeom prst="rect">
             <a:avLst/>
           </a:prstGeom>
           <a:solidFill>
-            <a:srgbClr val="5C1A33"/>
+            <a:srgbClr val="F2F2F2"/>
           </a:solidFill>
           <a:ln>
             <a:noFill/>
@@ -5126,14 +4983,58 @@
       </p:sp>
       <p:sp>
         <p:nvSpPr>
-          <p:cNvPr id="30" name="TextBox 29"/>
-          <p:cNvSpPr txBox="1"/>
-          <p:nvPr/>
-        </p:nvSpPr>
-        <p:spPr>
-          <a:xfrm>
-            <a:off x="685800" y="4480560"/>
-            <a:ext cx="9601200" cy="365760"/>
+          <p:cNvPr id="26" name="Rectangle 25"/>
+          <p:cNvSpPr/>
+          <p:nvPr/>
+        </p:nvSpPr>
+        <p:spPr>
+          <a:xfrm>
+            <a:off x="502920" y="3657600"/>
+            <a:ext cx="109728" cy="914400"/>
+          </a:xfrm>
+          <a:prstGeom prst="rect">
+            <a:avLst/>
+          </a:prstGeom>
+          <a:solidFill>
+            <a:srgbClr val="2E7D32"/>
+          </a:solidFill>
+          <a:ln>
+            <a:noFill/>
+          </a:ln>
+          <a:effectLst/>
+        </p:spPr>
+        <p:style>
+          <a:lnRef idx="1">
+            <a:schemeClr val="accent1"/>
+          </a:lnRef>
+          <a:fillRef idx="3">
+            <a:schemeClr val="accent1"/>
+          </a:fillRef>
+          <a:effectRef idx="2">
+            <a:schemeClr val="accent1"/>
+          </a:effectRef>
+          <a:fontRef idx="minor">
+            <a:schemeClr val="lt1"/>
+          </a:fontRef>
+        </p:style>
+        <p:txBody>
+          <a:bodyPr rtlCol="0" anchor="ctr"/>
+          <a:lstStyle/>
+          <a:p>
+            <a:pPr algn="ctr"/>
+          </a:p>
+        </p:txBody>
+      </p:sp>
+      <p:sp>
+        <p:nvSpPr>
+          <p:cNvPr id="27" name="TextBox 26"/>
+          <p:cNvSpPr txBox="1"/>
+          <p:nvPr/>
+        </p:nvSpPr>
+        <p:spPr>
+          <a:xfrm>
+            <a:off x="731520" y="3767328"/>
+            <a:ext cx="2212848" cy="365760"/>
           </a:xfrm>
           <a:prstGeom prst="rect">
             <a:avLst/>
@@ -5148,14 +5049,137 @@
           <a:p>
             <a:pPr algn="l"/>
             <a:r>
-              <a:rPr sz="1500" b="1" i="0">
-                <a:solidFill>
-                  <a:srgbClr val="FFFFFF"/>
-                </a:solidFill>
-                <a:latin typeface="Calibri"/>
-              </a:rPr>
-              <a:t>Score → human-in-the-loop routing band</a:t>
-            </a:r>
+              <a:rPr sz="1400" b="1" i="0">
+                <a:solidFill>
+                  <a:srgbClr val="2B2B2B"/>
+                </a:solidFill>
+                <a:latin typeface="Calibri"/>
+              </a:rPr>
+              <a:t>package.json</a:t>
+            </a:r>
+          </a:p>
+        </p:txBody>
+      </p:sp>
+      <p:sp>
+        <p:nvSpPr>
+          <p:cNvPr id="28" name="TextBox 27"/>
+          <p:cNvSpPr txBox="1"/>
+          <p:nvPr/>
+        </p:nvSpPr>
+        <p:spPr>
+          <a:xfrm>
+            <a:off x="731520" y="4133088"/>
+            <a:ext cx="2212848" cy="320040"/>
+          </a:xfrm>
+          <a:prstGeom prst="rect">
+            <a:avLst/>
+          </a:prstGeom>
+          <a:noFill/>
+        </p:spPr>
+        <p:txBody>
+          <a:bodyPr wrap="square" anchor="t" lIns="50800" rIns="50800" tIns="25400" bIns="25400">
+            <a:spAutoFit/>
+          </a:bodyPr>
+          <a:lstStyle/>
+          <a:p>
+            <a:pPr algn="l"/>
+            <a:r>
+              <a:rPr sz="1100" b="0" i="0">
+                <a:solidFill>
+                  <a:srgbClr val="2E7D32"/>
+                </a:solidFill>
+                <a:latin typeface="Calibri"/>
+              </a:rPr>
+              <a:t>extraction confidence 0.85</a:t>
+            </a:r>
+          </a:p>
+        </p:txBody>
+      </p:sp>
+      <p:sp>
+        <p:nvSpPr>
+          <p:cNvPr id="29" name="Rectangle 28"/>
+          <p:cNvSpPr/>
+          <p:nvPr/>
+        </p:nvSpPr>
+        <p:spPr>
+          <a:xfrm>
+            <a:off x="3035808" y="3657600"/>
+            <a:ext cx="2487168" cy="914400"/>
+          </a:xfrm>
+          <a:prstGeom prst="rect">
+            <a:avLst/>
+          </a:prstGeom>
+          <a:solidFill>
+            <a:srgbClr val="F2F2F2"/>
+          </a:solidFill>
+          <a:ln>
+            <a:noFill/>
+          </a:ln>
+          <a:effectLst/>
+        </p:spPr>
+        <p:style>
+          <a:lnRef idx="1">
+            <a:schemeClr val="accent1"/>
+          </a:lnRef>
+          <a:fillRef idx="3">
+            <a:schemeClr val="accent1"/>
+          </a:fillRef>
+          <a:effectRef idx="2">
+            <a:schemeClr val="accent1"/>
+          </a:effectRef>
+          <a:fontRef idx="minor">
+            <a:schemeClr val="lt1"/>
+          </a:fontRef>
+        </p:style>
+        <p:txBody>
+          <a:bodyPr rtlCol="0" anchor="ctr"/>
+          <a:lstStyle/>
+          <a:p>
+            <a:pPr algn="ctr"/>
+          </a:p>
+        </p:txBody>
+      </p:sp>
+      <p:sp>
+        <p:nvSpPr>
+          <p:cNvPr id="30" name="Rectangle 29"/>
+          <p:cNvSpPr/>
+          <p:nvPr/>
+        </p:nvSpPr>
+        <p:spPr>
+          <a:xfrm>
+            <a:off x="3035808" y="3657600"/>
+            <a:ext cx="109728" cy="914400"/>
+          </a:xfrm>
+          <a:prstGeom prst="rect">
+            <a:avLst/>
+          </a:prstGeom>
+          <a:solidFill>
+            <a:srgbClr val="9EADB5"/>
+          </a:solidFill>
+          <a:ln>
+            <a:noFill/>
+          </a:ln>
+          <a:effectLst/>
+        </p:spPr>
+        <p:style>
+          <a:lnRef idx="1">
+            <a:schemeClr val="accent1"/>
+          </a:lnRef>
+          <a:fillRef idx="3">
+            <a:schemeClr val="accent1"/>
+          </a:fillRef>
+          <a:effectRef idx="2">
+            <a:schemeClr val="accent1"/>
+          </a:effectRef>
+          <a:fontRef idx="minor">
+            <a:schemeClr val="lt1"/>
+          </a:fontRef>
+        </p:style>
+        <p:txBody>
+          <a:bodyPr rtlCol="0" anchor="ctr"/>
+          <a:lstStyle/>
+          <a:p>
+            <a:pPr algn="ctr"/>
           </a:p>
         </p:txBody>
       </p:sp>
@@ -5167,8 +5191,8 @@
         </p:nvSpPr>
         <p:spPr>
           <a:xfrm>
-            <a:off x="685800" y="4937760"/>
-            <a:ext cx="3200400" cy="365760"/>
+            <a:off x="3264408" y="3767328"/>
+            <a:ext cx="2212848" cy="365760"/>
           </a:xfrm>
           <a:prstGeom prst="rect">
             <a:avLst/>
@@ -5183,13 +5207,13 @@
           <a:p>
             <a:pPr algn="l"/>
             <a:r>
-              <a:rPr sz="1600" b="1" i="0">
-                <a:solidFill>
-                  <a:srgbClr val="2E7D32"/>
-                </a:solidFill>
-                <a:latin typeface="Calibri"/>
-              </a:rPr>
-              <a:t>AUTO</a:t>
+              <a:rPr sz="1400" b="1" i="0">
+                <a:solidFill>
+                  <a:srgbClr val="2B2B2B"/>
+                </a:solidFill>
+                <a:latin typeface="Calibri"/>
+              </a:rPr>
+              <a:t>Screenshot (OCR)</a:t>
             </a:r>
           </a:p>
         </p:txBody>
@@ -5202,8 +5226,8 @@
         </p:nvSpPr>
         <p:spPr>
           <a:xfrm>
-            <a:off x="685800" y="5303520"/>
-            <a:ext cx="3200400" cy="365760"/>
+            <a:off x="3264408" y="4133088"/>
+            <a:ext cx="2212848" cy="320040"/>
           </a:xfrm>
           <a:prstGeom prst="rect">
             <a:avLst/>
@@ -5218,27 +5242,115 @@
           <a:p>
             <a:pPr algn="l"/>
             <a:r>
-              <a:rPr sz="1200" b="0" i="0">
-                <a:solidFill>
-                  <a:srgbClr val="FFFFFF"/>
-                </a:solidFill>
-                <a:latin typeface="Calibri"/>
-              </a:rPr>
-              <a:t>conf ≥ 0.75 · auto-report</a:t>
-            </a:r>
-          </a:p>
-        </p:txBody>
-      </p:sp>
-      <p:sp>
-        <p:nvSpPr>
-          <p:cNvPr id="33" name="TextBox 32"/>
-          <p:cNvSpPr txBox="1"/>
-          <p:nvPr/>
-        </p:nvSpPr>
-        <p:spPr>
-          <a:xfrm>
-            <a:off x="3977640" y="4937760"/>
-            <a:ext cx="3200400" cy="365760"/>
+              <a:rPr sz="1100" b="0" i="0">
+                <a:solidFill>
+                  <a:srgbClr val="9EADB5"/>
+                </a:solidFill>
+                <a:latin typeface="Calibri"/>
+              </a:rPr>
+              <a:t>extraction confidence 0.50</a:t>
+            </a:r>
+          </a:p>
+        </p:txBody>
+      </p:sp>
+      <p:sp>
+        <p:nvSpPr>
+          <p:cNvPr id="33" name="Rectangle 32"/>
+          <p:cNvSpPr/>
+          <p:nvPr/>
+        </p:nvSpPr>
+        <p:spPr>
+          <a:xfrm>
+            <a:off x="5568696" y="3657600"/>
+            <a:ext cx="2487168" cy="914400"/>
+          </a:xfrm>
+          <a:prstGeom prst="rect">
+            <a:avLst/>
+          </a:prstGeom>
+          <a:solidFill>
+            <a:srgbClr val="F2F2F2"/>
+          </a:solidFill>
+          <a:ln>
+            <a:noFill/>
+          </a:ln>
+          <a:effectLst/>
+        </p:spPr>
+        <p:style>
+          <a:lnRef idx="1">
+            <a:schemeClr val="accent1"/>
+          </a:lnRef>
+          <a:fillRef idx="3">
+            <a:schemeClr val="accent1"/>
+          </a:fillRef>
+          <a:effectRef idx="2">
+            <a:schemeClr val="accent1"/>
+          </a:effectRef>
+          <a:fontRef idx="minor">
+            <a:schemeClr val="lt1"/>
+          </a:fontRef>
+        </p:style>
+        <p:txBody>
+          <a:bodyPr rtlCol="0" anchor="ctr"/>
+          <a:lstStyle/>
+          <a:p>
+            <a:pPr algn="ctr"/>
+          </a:p>
+        </p:txBody>
+      </p:sp>
+      <p:sp>
+        <p:nvSpPr>
+          <p:cNvPr id="34" name="Rectangle 33"/>
+          <p:cNvSpPr/>
+          <p:nvPr/>
+        </p:nvSpPr>
+        <p:spPr>
+          <a:xfrm>
+            <a:off x="5568696" y="3657600"/>
+            <a:ext cx="109728" cy="914400"/>
+          </a:xfrm>
+          <a:prstGeom prst="rect">
+            <a:avLst/>
+          </a:prstGeom>
+          <a:solidFill>
+            <a:srgbClr val="A83A5B"/>
+          </a:solidFill>
+          <a:ln>
+            <a:noFill/>
+          </a:ln>
+          <a:effectLst/>
+        </p:spPr>
+        <p:style>
+          <a:lnRef idx="1">
+            <a:schemeClr val="accent1"/>
+          </a:lnRef>
+          <a:fillRef idx="3">
+            <a:schemeClr val="accent1"/>
+          </a:fillRef>
+          <a:effectRef idx="2">
+            <a:schemeClr val="accent1"/>
+          </a:effectRef>
+          <a:fontRef idx="minor">
+            <a:schemeClr val="lt1"/>
+          </a:fontRef>
+        </p:style>
+        <p:txBody>
+          <a:bodyPr rtlCol="0" anchor="ctr"/>
+          <a:lstStyle/>
+          <a:p>
+            <a:pPr algn="ctr"/>
+          </a:p>
+        </p:txBody>
+      </p:sp>
+      <p:sp>
+        <p:nvSpPr>
+          <p:cNvPr id="35" name="TextBox 34"/>
+          <p:cNvSpPr txBox="1"/>
+          <p:nvPr/>
+        </p:nvSpPr>
+        <p:spPr>
+          <a:xfrm>
+            <a:off x="5797296" y="3767328"/>
+            <a:ext cx="2212848" cy="365760"/>
           </a:xfrm>
           <a:prstGeom prst="rect">
             <a:avLst/>
@@ -5253,27 +5365,27 @@
           <a:p>
             <a:pPr algn="l"/>
             <a:r>
-              <a:rPr sz="1600" b="1" i="0">
-                <a:solidFill>
-                  <a:srgbClr val="B5657F"/>
-                </a:solidFill>
-                <a:latin typeface="Calibri"/>
-              </a:rPr>
-              <a:t>SUGGEST</a:t>
-            </a:r>
-          </a:p>
-        </p:txBody>
-      </p:sp>
-      <p:sp>
-        <p:nvSpPr>
-          <p:cNvPr id="34" name="TextBox 33"/>
-          <p:cNvSpPr txBox="1"/>
-          <p:nvPr/>
-        </p:nvSpPr>
-        <p:spPr>
-          <a:xfrm>
-            <a:off x="3977640" y="5303520"/>
-            <a:ext cx="3200400" cy="365760"/>
+              <a:rPr sz="1400" b="1" i="0">
+                <a:solidFill>
+                  <a:srgbClr val="2B2B2B"/>
+                </a:solidFill>
+                <a:latin typeface="Calibri"/>
+              </a:rPr>
+              <a:t>Plain text</a:t>
+            </a:r>
+          </a:p>
+        </p:txBody>
+      </p:sp>
+      <p:sp>
+        <p:nvSpPr>
+          <p:cNvPr id="36" name="TextBox 35"/>
+          <p:cNvSpPr txBox="1"/>
+          <p:nvPr/>
+        </p:nvSpPr>
+        <p:spPr>
+          <a:xfrm>
+            <a:off x="5797296" y="4133088"/>
+            <a:ext cx="2212848" cy="320040"/>
           </a:xfrm>
           <a:prstGeom prst="rect">
             <a:avLst/>
@@ -5288,27 +5400,115 @@
           <a:p>
             <a:pPr algn="l"/>
             <a:r>
-              <a:rPr sz="1200" b="0" i="0">
-                <a:solidFill>
-                  <a:srgbClr val="FFFFFF"/>
-                </a:solidFill>
-                <a:latin typeface="Calibri"/>
-              </a:rPr>
-              <a:t>0.50–0.75 · human confirms</a:t>
-            </a:r>
-          </a:p>
-        </p:txBody>
-      </p:sp>
-      <p:sp>
-        <p:nvSpPr>
-          <p:cNvPr id="35" name="TextBox 34"/>
-          <p:cNvSpPr txBox="1"/>
-          <p:nvPr/>
-        </p:nvSpPr>
-        <p:spPr>
-          <a:xfrm>
-            <a:off x="7269480" y="4937760"/>
-            <a:ext cx="3200400" cy="365760"/>
+              <a:rPr sz="1100" b="0" i="0">
+                <a:solidFill>
+                  <a:srgbClr val="A83A5B"/>
+                </a:solidFill>
+                <a:latin typeface="Calibri"/>
+              </a:rPr>
+              <a:t>extraction confidence 0.70</a:t>
+            </a:r>
+          </a:p>
+        </p:txBody>
+      </p:sp>
+      <p:sp>
+        <p:nvSpPr>
+          <p:cNvPr id="37" name="Rectangle 36"/>
+          <p:cNvSpPr/>
+          <p:nvPr/>
+        </p:nvSpPr>
+        <p:spPr>
+          <a:xfrm>
+            <a:off x="8101584" y="3657600"/>
+            <a:ext cx="2487168" cy="914400"/>
+          </a:xfrm>
+          <a:prstGeom prst="rect">
+            <a:avLst/>
+          </a:prstGeom>
+          <a:solidFill>
+            <a:srgbClr val="F2F2F2"/>
+          </a:solidFill>
+          <a:ln>
+            <a:noFill/>
+          </a:ln>
+          <a:effectLst/>
+        </p:spPr>
+        <p:style>
+          <a:lnRef idx="1">
+            <a:schemeClr val="accent1"/>
+          </a:lnRef>
+          <a:fillRef idx="3">
+            <a:schemeClr val="accent1"/>
+          </a:fillRef>
+          <a:effectRef idx="2">
+            <a:schemeClr val="accent1"/>
+          </a:effectRef>
+          <a:fontRef idx="minor">
+            <a:schemeClr val="lt1"/>
+          </a:fontRef>
+        </p:style>
+        <p:txBody>
+          <a:bodyPr rtlCol="0" anchor="ctr"/>
+          <a:lstStyle/>
+          <a:p>
+            <a:pPr algn="ctr"/>
+          </a:p>
+        </p:txBody>
+      </p:sp>
+      <p:sp>
+        <p:nvSpPr>
+          <p:cNvPr id="38" name="Rectangle 37"/>
+          <p:cNvSpPr/>
+          <p:nvPr/>
+        </p:nvSpPr>
+        <p:spPr>
+          <a:xfrm>
+            <a:off x="8101584" y="3657600"/>
+            <a:ext cx="109728" cy="914400"/>
+          </a:xfrm>
+          <a:prstGeom prst="rect">
+            <a:avLst/>
+          </a:prstGeom>
+          <a:solidFill>
+            <a:srgbClr val="A83A5B"/>
+          </a:solidFill>
+          <a:ln>
+            <a:noFill/>
+          </a:ln>
+          <a:effectLst/>
+        </p:spPr>
+        <p:style>
+          <a:lnRef idx="1">
+            <a:schemeClr val="accent1"/>
+          </a:lnRef>
+          <a:fillRef idx="3">
+            <a:schemeClr val="accent1"/>
+          </a:fillRef>
+          <a:effectRef idx="2">
+            <a:schemeClr val="accent1"/>
+          </a:effectRef>
+          <a:fontRef idx="minor">
+            <a:schemeClr val="lt1"/>
+          </a:fontRef>
+        </p:style>
+        <p:txBody>
+          <a:bodyPr rtlCol="0" anchor="ctr"/>
+          <a:lstStyle/>
+          <a:p>
+            <a:pPr algn="ctr"/>
+          </a:p>
+        </p:txBody>
+      </p:sp>
+      <p:sp>
+        <p:nvSpPr>
+          <p:cNvPr id="39" name="TextBox 38"/>
+          <p:cNvSpPr txBox="1"/>
+          <p:nvPr/>
+        </p:nvSpPr>
+        <p:spPr>
+          <a:xfrm>
+            <a:off x="8330184" y="3767328"/>
+            <a:ext cx="2212848" cy="365760"/>
           </a:xfrm>
           <a:prstGeom prst="rect">
             <a:avLst/>
@@ -5323,27 +5523,27 @@
           <a:p>
             <a:pPr algn="l"/>
             <a:r>
-              <a:rPr sz="1600" b="1" i="0">
-                <a:solidFill>
-                  <a:srgbClr val="9EADB5"/>
-                </a:solidFill>
-                <a:latin typeface="Calibri"/>
-              </a:rPr>
-              <a:t>FLAG</a:t>
-            </a:r>
-          </a:p>
-        </p:txBody>
-      </p:sp>
-      <p:sp>
-        <p:nvSpPr>
-          <p:cNvPr id="36" name="TextBox 35"/>
-          <p:cNvSpPr txBox="1"/>
-          <p:nvPr/>
-        </p:nvSpPr>
-        <p:spPr>
-          <a:xfrm>
-            <a:off x="7269480" y="5303520"/>
-            <a:ext cx="3200400" cy="365760"/>
+              <a:rPr sz="1400" b="1" i="0">
+                <a:solidFill>
+                  <a:srgbClr val="2B2B2B"/>
+                </a:solidFill>
+                <a:latin typeface="Calibri"/>
+              </a:rPr>
+              <a:t>Manual entry</a:t>
+            </a:r>
+          </a:p>
+        </p:txBody>
+      </p:sp>
+      <p:sp>
+        <p:nvSpPr>
+          <p:cNvPr id="40" name="TextBox 39"/>
+          <p:cNvSpPr txBox="1"/>
+          <p:nvPr/>
+        </p:nvSpPr>
+        <p:spPr>
+          <a:xfrm>
+            <a:off x="8330184" y="4133088"/>
+            <a:ext cx="2212848" cy="320040"/>
           </a:xfrm>
           <a:prstGeom prst="rect">
             <a:avLst/>
@@ -5358,20 +5558,55 @@
           <a:p>
             <a:pPr algn="l"/>
             <a:r>
-              <a:rPr sz="1200" b="0" i="0">
-                <a:solidFill>
-                  <a:srgbClr val="FFFFFF"/>
-                </a:solidFill>
-                <a:latin typeface="Calibri"/>
-              </a:rPr>
-              <a:t>&lt; 0.50 · human must review</a:t>
-            </a:r>
-          </a:p>
-        </p:txBody>
-      </p:sp>
-      <p:sp>
-        <p:nvSpPr>
-          <p:cNvPr id="37" name="TextBox 36"/>
+              <a:rPr sz="1100" b="0" i="0">
+                <a:solidFill>
+                  <a:srgbClr val="A83A5B"/>
+                </a:solidFill>
+                <a:latin typeface="Calibri"/>
+              </a:rPr>
+              <a:t>extraction confidence 0.80</a:t>
+            </a:r>
+          </a:p>
+        </p:txBody>
+      </p:sp>
+      <p:sp>
+        <p:nvSpPr>
+          <p:cNvPr id="41" name="TextBox 40"/>
+          <p:cNvSpPr txBox="1"/>
+          <p:nvPr/>
+        </p:nvSpPr>
+        <p:spPr>
+          <a:xfrm>
+            <a:off x="502920" y="5806440"/>
+            <a:ext cx="10149840" cy="457200"/>
+          </a:xfrm>
+          <a:prstGeom prst="rect">
+            <a:avLst/>
+          </a:prstGeom>
+          <a:noFill/>
+        </p:spPr>
+        <p:txBody>
+          <a:bodyPr wrap="square" anchor="t" lIns="50800" rIns="50800" tIns="25400" bIns="25400">
+            <a:spAutoFit/>
+          </a:bodyPr>
+          <a:lstStyle/>
+          <a:p>
+            <a:pPr algn="l"/>
+            <a:r>
+              <a:rPr sz="1200" b="1" i="0">
+                <a:solidFill>
+                  <a:srgbClr val="5C1A33"/>
+                </a:solidFill>
+                <a:latin typeface="Calibri"/>
+              </a:rPr>
+              <a:t>Provenance + confidence travel with every component → OCR-sourced matches are automatically routed to human review, never silently auto-actioned.</a:t>
+            </a:r>
+          </a:p>
+        </p:txBody>
+      </p:sp>
+      <p:sp>
+        <p:nvSpPr>
+          <p:cNvPr id="42" name="TextBox 41"/>
           <p:cNvSpPr txBox="1"/>
           <p:nvPr/>
         </p:nvSpPr>
@@ -5406,7 +5641,7 @@
       </p:sp>
       <p:sp>
         <p:nvSpPr>
-          <p:cNvPr id="38" name="TextBox 37"/>
+          <p:cNvPr id="43" name="TextBox 42"/>
           <p:cNvSpPr txBox="1"/>
           <p:nvPr/>
         </p:nvSpPr>
@@ -5663,7 +5898,7 @@
                 </a:solidFill>
                 <a:latin typeface="Calibri"/>
               </a:rPr>
-              <a:t>WEEK 2 · GOAL 4</a:t>
+              <a:t>WEEK 2 · GOAL 1</a:t>
             </a:r>
           </a:p>
         </p:txBody>
@@ -5698,7 +5933,7 @@
                 </a:solidFill>
                 <a:latin typeface="Calibri"/>
               </a:rPr>
-              <a:t>Threat Intel: Severity ≠ Priority (KEV + EPSS)</a:t>
+              <a:t>Baseline Model: A Transparent Confidence Score</a:t>
             </a:r>
           </a:p>
         </p:txBody>
@@ -5733,7 +5968,7 @@
                 </a:solidFill>
                 <a:latin typeface="Calibri"/>
               </a:rPr>
-              <a:t>CVSS says how bad a flaw is in theory. KEV + EPSS say whether it is actually being exploited. The agent now prioritizes by real-world risk.</a:t>
+              <a:t>A matcher fires yes/no. A model gives a score you can rank, threshold and evaluate. We add a glass-box confidence in [0,1] from four inspectable signals:</a:t>
             </a:r>
           </a:p>
         </p:txBody>
@@ -5746,8 +5981,52 @@
         </p:nvSpPr>
         <p:spPr>
           <a:xfrm>
-            <a:off x="502920" y="2560320"/>
-            <a:ext cx="10149840" cy="502920"/>
+            <a:off x="502920" y="2514600"/>
+            <a:ext cx="2487168" cy="1554480"/>
+          </a:xfrm>
+          <a:prstGeom prst="rect">
+            <a:avLst/>
+          </a:prstGeom>
+          <a:solidFill>
+            <a:srgbClr val="F2F2F2"/>
+          </a:solidFill>
+          <a:ln>
+            <a:noFill/>
+          </a:ln>
+          <a:effectLst/>
+        </p:spPr>
+        <p:style>
+          <a:lnRef idx="1">
+            <a:schemeClr val="accent1"/>
+          </a:lnRef>
+          <a:fillRef idx="3">
+            <a:schemeClr val="accent1"/>
+          </a:fillRef>
+          <a:effectRef idx="2">
+            <a:schemeClr val="accent1"/>
+          </a:effectRef>
+          <a:fontRef idx="minor">
+            <a:schemeClr val="lt1"/>
+          </a:fontRef>
+        </p:style>
+        <p:txBody>
+          <a:bodyPr rtlCol="0" anchor="ctr"/>
+          <a:lstStyle/>
+          <a:p>
+            <a:pPr algn="ctr"/>
+          </a:p>
+        </p:txBody>
+      </p:sp>
+      <p:sp>
+        <p:nvSpPr>
+          <p:cNvPr id="10" name="Rectangle 9"/>
+          <p:cNvSpPr/>
+          <p:nvPr/>
+        </p:nvSpPr>
+        <p:spPr>
+          <a:xfrm>
+            <a:off x="502920" y="2514600"/>
+            <a:ext cx="2487168" cy="457200"/>
           </a:xfrm>
           <a:prstGeom prst="rect">
             <a:avLst/>
@@ -5784,14 +6063,14 @@
       </p:sp>
       <p:sp>
         <p:nvSpPr>
-          <p:cNvPr id="10" name="TextBox 9"/>
-          <p:cNvSpPr txBox="1"/>
-          <p:nvPr/>
-        </p:nvSpPr>
-        <p:spPr>
-          <a:xfrm>
-            <a:off x="640080" y="2606040"/>
-            <a:ext cx="1828800" cy="365760"/>
+          <p:cNvPr id="11" name="TextBox 10"/>
+          <p:cNvSpPr txBox="1"/>
+          <p:nvPr/>
+        </p:nvSpPr>
+        <p:spPr>
+          <a:xfrm>
+            <a:off x="502920" y="2560320"/>
+            <a:ext cx="2487168" cy="365760"/>
           </a:xfrm>
           <a:prstGeom prst="rect">
             <a:avLst/>
@@ -5804,7 +6083,7 @@
           </a:bodyPr>
           <a:lstStyle/>
           <a:p>
-            <a:pPr algn="l"/>
+            <a:pPr algn="ctr"/>
             <a:r>
               <a:rPr sz="1300" b="1" i="0">
                 <a:solidFill>
@@ -5812,21 +6091,21 @@
                 </a:solidFill>
                 <a:latin typeface="Calibri"/>
               </a:rPr>
-              <a:t>CVE</a:t>
-            </a:r>
-          </a:p>
-        </p:txBody>
-      </p:sp>
-      <p:sp>
-        <p:nvSpPr>
-          <p:cNvPr id="11" name="TextBox 10"/>
-          <p:cNvSpPr txBox="1"/>
-          <p:nvPr/>
-        </p:nvSpPr>
-        <p:spPr>
-          <a:xfrm>
-            <a:off x="3566160" y="2606040"/>
-            <a:ext cx="1828800" cy="365760"/>
+              <a:t>Match path</a:t>
+            </a:r>
+          </a:p>
+        </p:txBody>
+      </p:sp>
+      <p:sp>
+        <p:nvSpPr>
+          <p:cNvPr id="12" name="TextBox 11"/>
+          <p:cNvSpPr txBox="1"/>
+          <p:nvPr/>
+        </p:nvSpPr>
+        <p:spPr>
+          <a:xfrm>
+            <a:off x="502920" y="3063240"/>
+            <a:ext cx="2487168" cy="731520"/>
           </a:xfrm>
           <a:prstGeom prst="rect">
             <a:avLst/>
@@ -5839,29 +6118,30 @@
           </a:bodyPr>
           <a:lstStyle/>
           <a:p>
-            <a:pPr algn="l"/>
-            <a:r>
-              <a:rPr sz="1300" b="1" i="0">
-                <a:solidFill>
-                  <a:srgbClr val="FFFFFF"/>
-                </a:solidFill>
-                <a:latin typeface="Calibri"/>
-              </a:rPr>
-              <a:t>CVSS</a:t>
-            </a:r>
-          </a:p>
-        </p:txBody>
-      </p:sp>
-      <p:sp>
-        <p:nvSpPr>
-          <p:cNvPr id="12" name="TextBox 11"/>
-          <p:cNvSpPr txBox="1"/>
-          <p:nvPr/>
-        </p:nvSpPr>
-        <p:spPr>
-          <a:xfrm>
-            <a:off x="4937760" y="2606040"/>
-            <a:ext cx="1828800" cy="365760"/>
+            <a:pPr algn="ctr"/>
+            <a:r>
+              <a:rPr sz="1100" b="0" i="0">
+                <a:solidFill>
+                  <a:srgbClr val="2B2B2B"/>
+                </a:solidFill>
+                <a:latin typeface="Calibri"/>
+              </a:rPr>
+              <a:t>CPE+range stricter
+than affected[] fallback</a:t>
+            </a:r>
+          </a:p>
+        </p:txBody>
+      </p:sp>
+      <p:sp>
+        <p:nvSpPr>
+          <p:cNvPr id="13" name="TextBox 12"/>
+          <p:cNvSpPr txBox="1"/>
+          <p:nvPr/>
+        </p:nvSpPr>
+        <p:spPr>
+          <a:xfrm>
+            <a:off x="502920" y="3703320"/>
+            <a:ext cx="2487168" cy="320040"/>
           </a:xfrm>
           <a:prstGeom prst="rect">
             <a:avLst/>
@@ -5874,99 +6154,29 @@
           </a:bodyPr>
           <a:lstStyle/>
           <a:p>
-            <a:pPr algn="l"/>
-            <a:r>
-              <a:rPr sz="1300" b="1" i="0">
-                <a:solidFill>
-                  <a:srgbClr val="FFFFFF"/>
-                </a:solidFill>
-                <a:latin typeface="Calibri"/>
-              </a:rPr>
-              <a:t>On KEV?</a:t>
-            </a:r>
-          </a:p>
-        </p:txBody>
-      </p:sp>
-      <p:sp>
-        <p:nvSpPr>
-          <p:cNvPr id="13" name="TextBox 12"/>
-          <p:cNvSpPr txBox="1"/>
-          <p:nvPr/>
-        </p:nvSpPr>
-        <p:spPr>
-          <a:xfrm>
-            <a:off x="6583680" y="2606040"/>
-            <a:ext cx="1828800" cy="365760"/>
-          </a:xfrm>
-          <a:prstGeom prst="rect">
-            <a:avLst/>
-          </a:prstGeom>
-          <a:noFill/>
-        </p:spPr>
-        <p:txBody>
-          <a:bodyPr wrap="square" anchor="t" lIns="50800" rIns="50800" tIns="25400" bIns="25400">
-            <a:spAutoFit/>
-          </a:bodyPr>
-          <a:lstStyle/>
-          <a:p>
-            <a:pPr algn="l"/>
-            <a:r>
-              <a:rPr sz="1300" b="1" i="0">
-                <a:solidFill>
-                  <a:srgbClr val="FFFFFF"/>
-                </a:solidFill>
-                <a:latin typeface="Calibri"/>
-              </a:rPr>
-              <a:t>EPSS</a:t>
-            </a:r>
-          </a:p>
-        </p:txBody>
-      </p:sp>
-      <p:sp>
-        <p:nvSpPr>
-          <p:cNvPr id="14" name="TextBox 13"/>
-          <p:cNvSpPr txBox="1"/>
-          <p:nvPr/>
-        </p:nvSpPr>
-        <p:spPr>
-          <a:xfrm>
-            <a:off x="8412480" y="2606040"/>
-            <a:ext cx="1828800" cy="365760"/>
-          </a:xfrm>
-          <a:prstGeom prst="rect">
-            <a:avLst/>
-          </a:prstGeom>
-          <a:noFill/>
-        </p:spPr>
-        <p:txBody>
-          <a:bodyPr wrap="square" anchor="t" lIns="50800" rIns="50800" tIns="25400" bIns="25400">
-            <a:spAutoFit/>
-          </a:bodyPr>
-          <a:lstStyle/>
-          <a:p>
-            <a:pPr algn="l"/>
-            <a:r>
-              <a:rPr sz="1300" b="1" i="0">
-                <a:solidFill>
-                  <a:srgbClr val="FFFFFF"/>
-                </a:solidFill>
-                <a:latin typeface="Calibri"/>
-              </a:rPr>
-              <a:t>Priority</a:t>
-            </a:r>
-          </a:p>
-        </p:txBody>
-      </p:sp>
-      <p:sp>
-        <p:nvSpPr>
-          <p:cNvPr id="15" name="Rectangle 14"/>
+            <a:pPr algn="ctr"/>
+            <a:r>
+              <a:rPr sz="1200" b="1" i="0">
+                <a:solidFill>
+                  <a:srgbClr val="A83A5B"/>
+                </a:solidFill>
+                <a:latin typeface="Calibri"/>
+              </a:rPr>
+              <a:t>weight 0.40</a:t>
+            </a:r>
+          </a:p>
+        </p:txBody>
+      </p:sp>
+      <p:sp>
+        <p:nvSpPr>
+          <p:cNvPr id="14" name="Rectangle 13"/>
           <p:cNvSpPr/>
           <p:nvPr/>
         </p:nvSpPr>
         <p:spPr>
           <a:xfrm>
-            <a:off x="502920" y="3154680"/>
-            <a:ext cx="10149840" cy="502920"/>
+            <a:off x="3035808" y="2514600"/>
+            <a:ext cx="2487168" cy="1554480"/>
           </a:xfrm>
           <a:prstGeom prst="rect">
             <a:avLst/>
@@ -6003,195 +6213,20 @@
       </p:sp>
       <p:sp>
         <p:nvSpPr>
-          <p:cNvPr id="16" name="TextBox 15"/>
-          <p:cNvSpPr txBox="1"/>
-          <p:nvPr/>
-        </p:nvSpPr>
-        <p:spPr>
-          <a:xfrm>
-            <a:off x="640080" y="3218688"/>
-            <a:ext cx="2926080" cy="365760"/>
-          </a:xfrm>
-          <a:prstGeom prst="rect">
-            <a:avLst/>
-          </a:prstGeom>
-          <a:noFill/>
-        </p:spPr>
-        <p:txBody>
-          <a:bodyPr wrap="square" anchor="t" lIns="50800" rIns="50800" tIns="25400" bIns="25400">
-            <a:spAutoFit/>
-          </a:bodyPr>
-          <a:lstStyle/>
-          <a:p>
-            <a:pPr algn="l"/>
-            <a:r>
-              <a:rPr sz="1200" b="0" i="0">
-                <a:solidFill>
-                  <a:srgbClr val="2B2B2B"/>
-                </a:solidFill>
-                <a:latin typeface="Calibri"/>
-              </a:rPr>
-              <a:t>CVE-2021-44228 (Log4Shell)</a:t>
-            </a:r>
-          </a:p>
-        </p:txBody>
-      </p:sp>
-      <p:sp>
-        <p:nvSpPr>
-          <p:cNvPr id="17" name="TextBox 16"/>
-          <p:cNvSpPr txBox="1"/>
-          <p:nvPr/>
-        </p:nvSpPr>
-        <p:spPr>
-          <a:xfrm>
-            <a:off x="3566160" y="3218688"/>
-            <a:ext cx="1371600" cy="365760"/>
-          </a:xfrm>
-          <a:prstGeom prst="rect">
-            <a:avLst/>
-          </a:prstGeom>
-          <a:noFill/>
-        </p:spPr>
-        <p:txBody>
-          <a:bodyPr wrap="square" anchor="t" lIns="50800" rIns="50800" tIns="25400" bIns="25400">
-            <a:spAutoFit/>
-          </a:bodyPr>
-          <a:lstStyle/>
-          <a:p>
-            <a:pPr algn="l"/>
-            <a:r>
-              <a:rPr sz="1200" b="0" i="0">
-                <a:solidFill>
-                  <a:srgbClr val="2B2B2B"/>
-                </a:solidFill>
-                <a:latin typeface="Calibri"/>
-              </a:rPr>
-              <a:t>10.0 CRITICAL</a:t>
-            </a:r>
-          </a:p>
-        </p:txBody>
-      </p:sp>
-      <p:sp>
-        <p:nvSpPr>
-          <p:cNvPr id="18" name="TextBox 17"/>
-          <p:cNvSpPr txBox="1"/>
-          <p:nvPr/>
-        </p:nvSpPr>
-        <p:spPr>
-          <a:xfrm>
-            <a:off x="4937760" y="3218688"/>
-            <a:ext cx="1371600" cy="365760"/>
-          </a:xfrm>
-          <a:prstGeom prst="rect">
-            <a:avLst/>
-          </a:prstGeom>
-          <a:noFill/>
-        </p:spPr>
-        <p:txBody>
-          <a:bodyPr wrap="square" anchor="t" lIns="50800" rIns="50800" tIns="25400" bIns="25400">
-            <a:spAutoFit/>
-          </a:bodyPr>
-          <a:lstStyle/>
-          <a:p>
-            <a:pPr algn="l"/>
-            <a:r>
-              <a:rPr sz="1200" b="1" i="0">
-                <a:solidFill>
-                  <a:srgbClr val="2E7D32"/>
-                </a:solidFill>
-                <a:latin typeface="Calibri"/>
-              </a:rPr>
-              <a:t>YES</a:t>
-            </a:r>
-          </a:p>
-        </p:txBody>
-      </p:sp>
-      <p:sp>
-        <p:nvSpPr>
-          <p:cNvPr id="19" name="TextBox 18"/>
-          <p:cNvSpPr txBox="1"/>
-          <p:nvPr/>
-        </p:nvSpPr>
-        <p:spPr>
-          <a:xfrm>
-            <a:off x="6583680" y="3218688"/>
-            <a:ext cx="1645920" cy="365760"/>
-          </a:xfrm>
-          <a:prstGeom prst="rect">
-            <a:avLst/>
-          </a:prstGeom>
-          <a:noFill/>
-        </p:spPr>
-        <p:txBody>
-          <a:bodyPr wrap="square" anchor="t" lIns="50800" rIns="50800" tIns="25400" bIns="25400">
-            <a:spAutoFit/>
-          </a:bodyPr>
-          <a:lstStyle/>
-          <a:p>
-            <a:pPr algn="l"/>
-            <a:r>
-              <a:rPr sz="1200" b="0" i="0">
-                <a:solidFill>
-                  <a:srgbClr val="2B2B2B"/>
-                </a:solidFill>
-                <a:latin typeface="Calibri"/>
-              </a:rPr>
-              <a:t>0.94 (94th pct)</a:t>
-            </a:r>
-          </a:p>
-        </p:txBody>
-      </p:sp>
-      <p:sp>
-        <p:nvSpPr>
-          <p:cNvPr id="20" name="TextBox 19"/>
-          <p:cNvSpPr txBox="1"/>
-          <p:nvPr/>
-        </p:nvSpPr>
-        <p:spPr>
-          <a:xfrm>
-            <a:off x="8412480" y="3218688"/>
-            <a:ext cx="1371600" cy="365760"/>
-          </a:xfrm>
-          <a:prstGeom prst="rect">
-            <a:avLst/>
-          </a:prstGeom>
-          <a:noFill/>
-        </p:spPr>
-        <p:txBody>
-          <a:bodyPr wrap="square" anchor="t" lIns="50800" rIns="50800" tIns="25400" bIns="25400">
-            <a:spAutoFit/>
-          </a:bodyPr>
-          <a:lstStyle/>
-          <a:p>
-            <a:pPr algn="l"/>
-            <a:r>
-              <a:rPr sz="1300" b="1" i="0">
-                <a:solidFill>
-                  <a:srgbClr val="2E7D32"/>
-                </a:solidFill>
-                <a:latin typeface="Calibri"/>
-              </a:rPr>
-              <a:t>0.98</a:t>
-            </a:r>
-          </a:p>
-        </p:txBody>
-      </p:sp>
-      <p:sp>
-        <p:nvSpPr>
-          <p:cNvPr id="21" name="Rectangle 20"/>
+          <p:cNvPr id="15" name="Rectangle 14"/>
           <p:cNvSpPr/>
           <p:nvPr/>
         </p:nvSpPr>
         <p:spPr>
           <a:xfrm>
-            <a:off x="502920" y="3703320"/>
-            <a:ext cx="10149840" cy="502920"/>
+            <a:off x="3035808" y="2514600"/>
+            <a:ext cx="2487168" cy="457200"/>
           </a:xfrm>
           <a:prstGeom prst="rect">
             <a:avLst/>
           </a:prstGeom>
           <a:solidFill>
-            <a:srgbClr val="FFFFFF"/>
+            <a:srgbClr val="7A1F3D"/>
           </a:solidFill>
           <a:ln>
             <a:noFill/>
@@ -6222,14 +6257,243 @@
       </p:sp>
       <p:sp>
         <p:nvSpPr>
+          <p:cNvPr id="16" name="TextBox 15"/>
+          <p:cNvSpPr txBox="1"/>
+          <p:nvPr/>
+        </p:nvSpPr>
+        <p:spPr>
+          <a:xfrm>
+            <a:off x="3035808" y="2560320"/>
+            <a:ext cx="2487168" cy="365760"/>
+          </a:xfrm>
+          <a:prstGeom prst="rect">
+            <a:avLst/>
+          </a:prstGeom>
+          <a:noFill/>
+        </p:spPr>
+        <p:txBody>
+          <a:bodyPr wrap="square" anchor="t" lIns="50800" rIns="50800" tIns="25400" bIns="25400">
+            <a:spAutoFit/>
+          </a:bodyPr>
+          <a:lstStyle/>
+          <a:p>
+            <a:pPr algn="ctr"/>
+            <a:r>
+              <a:rPr sz="1300" b="1" i="0">
+                <a:solidFill>
+                  <a:srgbClr val="FFFFFF"/>
+                </a:solidFill>
+                <a:latin typeface="Calibri"/>
+              </a:rPr>
+              <a:t>Version specificity</a:t>
+            </a:r>
+          </a:p>
+        </p:txBody>
+      </p:sp>
+      <p:sp>
+        <p:nvSpPr>
+          <p:cNvPr id="17" name="TextBox 16"/>
+          <p:cNvSpPr txBox="1"/>
+          <p:nvPr/>
+        </p:nvSpPr>
+        <p:spPr>
+          <a:xfrm>
+            <a:off x="3035808" y="3063240"/>
+            <a:ext cx="2487168" cy="731520"/>
+          </a:xfrm>
+          <a:prstGeom prst="rect">
+            <a:avLst/>
+          </a:prstGeom>
+          <a:noFill/>
+        </p:spPr>
+        <p:txBody>
+          <a:bodyPr wrap="square" anchor="t" lIns="50800" rIns="50800" tIns="25400" bIns="25400">
+            <a:spAutoFit/>
+          </a:bodyPr>
+          <a:lstStyle/>
+          <a:p>
+            <a:pPr algn="ctr"/>
+            <a:r>
+              <a:rPr sz="1100" b="0" i="0">
+                <a:solidFill>
+                  <a:srgbClr val="2B2B2B"/>
+                </a:solidFill>
+                <a:latin typeface="Calibri"/>
+              </a:rPr>
+              <a:t>Exact pin &gt; bounded
+range &gt; wildcard</a:t>
+            </a:r>
+          </a:p>
+        </p:txBody>
+      </p:sp>
+      <p:sp>
+        <p:nvSpPr>
+          <p:cNvPr id="18" name="TextBox 17"/>
+          <p:cNvSpPr txBox="1"/>
+          <p:nvPr/>
+        </p:nvSpPr>
+        <p:spPr>
+          <a:xfrm>
+            <a:off x="3035808" y="3703320"/>
+            <a:ext cx="2487168" cy="320040"/>
+          </a:xfrm>
+          <a:prstGeom prst="rect">
+            <a:avLst/>
+          </a:prstGeom>
+          <a:noFill/>
+        </p:spPr>
+        <p:txBody>
+          <a:bodyPr wrap="square" anchor="t" lIns="50800" rIns="50800" tIns="25400" bIns="25400">
+            <a:spAutoFit/>
+          </a:bodyPr>
+          <a:lstStyle/>
+          <a:p>
+            <a:pPr algn="ctr"/>
+            <a:r>
+              <a:rPr sz="1200" b="1" i="0">
+                <a:solidFill>
+                  <a:srgbClr val="A83A5B"/>
+                </a:solidFill>
+                <a:latin typeface="Calibri"/>
+              </a:rPr>
+              <a:t>weight 0.25</a:t>
+            </a:r>
+          </a:p>
+        </p:txBody>
+      </p:sp>
+      <p:sp>
+        <p:nvSpPr>
+          <p:cNvPr id="19" name="Rectangle 18"/>
+          <p:cNvSpPr/>
+          <p:nvPr/>
+        </p:nvSpPr>
+        <p:spPr>
+          <a:xfrm>
+            <a:off x="5568696" y="2514600"/>
+            <a:ext cx="2487168" cy="1554480"/>
+          </a:xfrm>
+          <a:prstGeom prst="rect">
+            <a:avLst/>
+          </a:prstGeom>
+          <a:solidFill>
+            <a:srgbClr val="F2F2F2"/>
+          </a:solidFill>
+          <a:ln>
+            <a:noFill/>
+          </a:ln>
+          <a:effectLst/>
+        </p:spPr>
+        <p:style>
+          <a:lnRef idx="1">
+            <a:schemeClr val="accent1"/>
+          </a:lnRef>
+          <a:fillRef idx="3">
+            <a:schemeClr val="accent1"/>
+          </a:fillRef>
+          <a:effectRef idx="2">
+            <a:schemeClr val="accent1"/>
+          </a:effectRef>
+          <a:fontRef idx="minor">
+            <a:schemeClr val="lt1"/>
+          </a:fontRef>
+        </p:style>
+        <p:txBody>
+          <a:bodyPr rtlCol="0" anchor="ctr"/>
+          <a:lstStyle/>
+          <a:p>
+            <a:pPr algn="ctr"/>
+          </a:p>
+        </p:txBody>
+      </p:sp>
+      <p:sp>
+        <p:nvSpPr>
+          <p:cNvPr id="20" name="Rectangle 19"/>
+          <p:cNvSpPr/>
+          <p:nvPr/>
+        </p:nvSpPr>
+        <p:spPr>
+          <a:xfrm>
+            <a:off x="5568696" y="2514600"/>
+            <a:ext cx="2487168" cy="457200"/>
+          </a:xfrm>
+          <a:prstGeom prst="rect">
+            <a:avLst/>
+          </a:prstGeom>
+          <a:solidFill>
+            <a:srgbClr val="7A1F3D"/>
+          </a:solidFill>
+          <a:ln>
+            <a:noFill/>
+          </a:ln>
+          <a:effectLst/>
+        </p:spPr>
+        <p:style>
+          <a:lnRef idx="1">
+            <a:schemeClr val="accent1"/>
+          </a:lnRef>
+          <a:fillRef idx="3">
+            <a:schemeClr val="accent1"/>
+          </a:fillRef>
+          <a:effectRef idx="2">
+            <a:schemeClr val="accent1"/>
+          </a:effectRef>
+          <a:fontRef idx="minor">
+            <a:schemeClr val="lt1"/>
+          </a:fontRef>
+        </p:style>
+        <p:txBody>
+          <a:bodyPr rtlCol="0" anchor="ctr"/>
+          <a:lstStyle/>
+          <a:p>
+            <a:pPr algn="ctr"/>
+          </a:p>
+        </p:txBody>
+      </p:sp>
+      <p:sp>
+        <p:nvSpPr>
+          <p:cNvPr id="21" name="TextBox 20"/>
+          <p:cNvSpPr txBox="1"/>
+          <p:nvPr/>
+        </p:nvSpPr>
+        <p:spPr>
+          <a:xfrm>
+            <a:off x="5568696" y="2560320"/>
+            <a:ext cx="2487168" cy="365760"/>
+          </a:xfrm>
+          <a:prstGeom prst="rect">
+            <a:avLst/>
+          </a:prstGeom>
+          <a:noFill/>
+        </p:spPr>
+        <p:txBody>
+          <a:bodyPr wrap="square" anchor="t" lIns="50800" rIns="50800" tIns="25400" bIns="25400">
+            <a:spAutoFit/>
+          </a:bodyPr>
+          <a:lstStyle/>
+          <a:p>
+            <a:pPr algn="ctr"/>
+            <a:r>
+              <a:rPr sz="1300" b="1" i="0">
+                <a:solidFill>
+                  <a:srgbClr val="FFFFFF"/>
+                </a:solidFill>
+                <a:latin typeface="Calibri"/>
+              </a:rPr>
+              <a:t>Input source</a:t>
+            </a:r>
+          </a:p>
+        </p:txBody>
+      </p:sp>
+      <p:sp>
+        <p:nvSpPr>
           <p:cNvPr id="22" name="TextBox 21"/>
           <p:cNvSpPr txBox="1"/>
           <p:nvPr/>
         </p:nvSpPr>
         <p:spPr>
           <a:xfrm>
-            <a:off x="640080" y="3767328"/>
-            <a:ext cx="2926080" cy="365760"/>
+            <a:off x="5568696" y="3063240"/>
+            <a:ext cx="2487168" cy="731520"/>
           </a:xfrm>
           <a:prstGeom prst="rect">
             <a:avLst/>
@@ -6242,15 +6506,16 @@
           </a:bodyPr>
           <a:lstStyle/>
           <a:p>
-            <a:pPr algn="l"/>
-            <a:r>
-              <a:rPr sz="1200" b="0" i="0">
+            <a:pPr algn="ctr"/>
+            <a:r>
+              <a:rPr sz="1100" b="0" i="0">
                 <a:solidFill>
                   <a:srgbClr val="2B2B2B"/>
                 </a:solidFill>
                 <a:latin typeface="Calibri"/>
               </a:rPr>
-              <a:t>CVE-2022-0778</a:t>
+              <a:t>SBOM parse beats
+(future) OCR</a:t>
             </a:r>
           </a:p>
         </p:txBody>
@@ -6263,8 +6528,8 @@
         </p:nvSpPr>
         <p:spPr>
           <a:xfrm>
-            <a:off x="3566160" y="3767328"/>
-            <a:ext cx="1371600" cy="365760"/>
+            <a:off x="5568696" y="3703320"/>
+            <a:ext cx="2487168" cy="320040"/>
           </a:xfrm>
           <a:prstGeom prst="rect">
             <a:avLst/>
@@ -6277,29 +6542,188 @@
           </a:bodyPr>
           <a:lstStyle/>
           <a:p>
-            <a:pPr algn="l"/>
-            <a:r>
-              <a:rPr sz="1200" b="0" i="0">
+            <a:pPr algn="ctr"/>
+            <a:r>
+              <a:rPr sz="1200" b="1" i="0">
+                <a:solidFill>
+                  <a:srgbClr val="A83A5B"/>
+                </a:solidFill>
+                <a:latin typeface="Calibri"/>
+              </a:rPr>
+              <a:t>weight 0.20</a:t>
+            </a:r>
+          </a:p>
+        </p:txBody>
+      </p:sp>
+      <p:sp>
+        <p:nvSpPr>
+          <p:cNvPr id="24" name="Rectangle 23"/>
+          <p:cNvSpPr/>
+          <p:nvPr/>
+        </p:nvSpPr>
+        <p:spPr>
+          <a:xfrm>
+            <a:off x="8101584" y="2514600"/>
+            <a:ext cx="2487168" cy="1554480"/>
+          </a:xfrm>
+          <a:prstGeom prst="rect">
+            <a:avLst/>
+          </a:prstGeom>
+          <a:solidFill>
+            <a:srgbClr val="F2F2F2"/>
+          </a:solidFill>
+          <a:ln>
+            <a:noFill/>
+          </a:ln>
+          <a:effectLst/>
+        </p:spPr>
+        <p:style>
+          <a:lnRef idx="1">
+            <a:schemeClr val="accent1"/>
+          </a:lnRef>
+          <a:fillRef idx="3">
+            <a:schemeClr val="accent1"/>
+          </a:fillRef>
+          <a:effectRef idx="2">
+            <a:schemeClr val="accent1"/>
+          </a:effectRef>
+          <a:fontRef idx="minor">
+            <a:schemeClr val="lt1"/>
+          </a:fontRef>
+        </p:style>
+        <p:txBody>
+          <a:bodyPr rtlCol="0" anchor="ctr"/>
+          <a:lstStyle/>
+          <a:p>
+            <a:pPr algn="ctr"/>
+          </a:p>
+        </p:txBody>
+      </p:sp>
+      <p:sp>
+        <p:nvSpPr>
+          <p:cNvPr id="25" name="Rectangle 24"/>
+          <p:cNvSpPr/>
+          <p:nvPr/>
+        </p:nvSpPr>
+        <p:spPr>
+          <a:xfrm>
+            <a:off x="8101584" y="2514600"/>
+            <a:ext cx="2487168" cy="457200"/>
+          </a:xfrm>
+          <a:prstGeom prst="rect">
+            <a:avLst/>
+          </a:prstGeom>
+          <a:solidFill>
+            <a:srgbClr val="7A1F3D"/>
+          </a:solidFill>
+          <a:ln>
+            <a:noFill/>
+          </a:ln>
+          <a:effectLst/>
+        </p:spPr>
+        <p:style>
+          <a:lnRef idx="1">
+            <a:schemeClr val="accent1"/>
+          </a:lnRef>
+          <a:fillRef idx="3">
+            <a:schemeClr val="accent1"/>
+          </a:fillRef>
+          <a:effectRef idx="2">
+            <a:schemeClr val="accent1"/>
+          </a:effectRef>
+          <a:fontRef idx="minor">
+            <a:schemeClr val="lt1"/>
+          </a:fontRef>
+        </p:style>
+        <p:txBody>
+          <a:bodyPr rtlCol="0" anchor="ctr"/>
+          <a:lstStyle/>
+          <a:p>
+            <a:pPr algn="ctr"/>
+          </a:p>
+        </p:txBody>
+      </p:sp>
+      <p:sp>
+        <p:nvSpPr>
+          <p:cNvPr id="26" name="TextBox 25"/>
+          <p:cNvSpPr txBox="1"/>
+          <p:nvPr/>
+        </p:nvSpPr>
+        <p:spPr>
+          <a:xfrm>
+            <a:off x="8101584" y="2560320"/>
+            <a:ext cx="2487168" cy="365760"/>
+          </a:xfrm>
+          <a:prstGeom prst="rect">
+            <a:avLst/>
+          </a:prstGeom>
+          <a:noFill/>
+        </p:spPr>
+        <p:txBody>
+          <a:bodyPr wrap="square" anchor="t" lIns="50800" rIns="50800" tIns="25400" bIns="25400">
+            <a:spAutoFit/>
+          </a:bodyPr>
+          <a:lstStyle/>
+          <a:p>
+            <a:pPr algn="ctr"/>
+            <a:r>
+              <a:rPr sz="1300" b="1" i="0">
+                <a:solidFill>
+                  <a:srgbClr val="FFFFFF"/>
+                </a:solidFill>
+                <a:latin typeface="Calibri"/>
+              </a:rPr>
+              <a:t>Vendor known</a:t>
+            </a:r>
+          </a:p>
+        </p:txBody>
+      </p:sp>
+      <p:sp>
+        <p:nvSpPr>
+          <p:cNvPr id="27" name="TextBox 26"/>
+          <p:cNvSpPr txBox="1"/>
+          <p:nvPr/>
+        </p:nvSpPr>
+        <p:spPr>
+          <a:xfrm>
+            <a:off x="8101584" y="3063240"/>
+            <a:ext cx="2487168" cy="731520"/>
+          </a:xfrm>
+          <a:prstGeom prst="rect">
+            <a:avLst/>
+          </a:prstGeom>
+          <a:noFill/>
+        </p:spPr>
+        <p:txBody>
+          <a:bodyPr wrap="square" anchor="t" lIns="50800" rIns="50800" tIns="25400" bIns="25400">
+            <a:spAutoFit/>
+          </a:bodyPr>
+          <a:lstStyle/>
+          <a:p>
+            <a:pPr algn="ctr"/>
+            <a:r>
+              <a:rPr sz="1100" b="0" i="0">
                 <a:solidFill>
                   <a:srgbClr val="2B2B2B"/>
                 </a:solidFill>
                 <a:latin typeface="Calibri"/>
               </a:rPr>
-              <a:t>7.5 HIGH</a:t>
-            </a:r>
-          </a:p>
-        </p:txBody>
-      </p:sp>
-      <p:sp>
-        <p:nvSpPr>
-          <p:cNvPr id="24" name="TextBox 23"/>
-          <p:cNvSpPr txBox="1"/>
-          <p:nvPr/>
-        </p:nvSpPr>
-        <p:spPr>
-          <a:xfrm>
-            <a:off x="4937760" y="3767328"/>
-            <a:ext cx="1371600" cy="365760"/>
+              <a:t>Named vendor cuts
+cross-product hits</a:t>
+            </a:r>
+          </a:p>
+        </p:txBody>
+      </p:sp>
+      <p:sp>
+        <p:nvSpPr>
+          <p:cNvPr id="28" name="TextBox 27"/>
+          <p:cNvSpPr txBox="1"/>
+          <p:nvPr/>
+        </p:nvSpPr>
+        <p:spPr>
+          <a:xfrm>
+            <a:off x="8101584" y="3703320"/>
+            <a:ext cx="2487168" cy="320040"/>
           </a:xfrm>
           <a:prstGeom prst="rect">
             <a:avLst/>
@@ -6312,99 +6736,29 @@
           </a:bodyPr>
           <a:lstStyle/>
           <a:p>
-            <a:pPr algn="l"/>
+            <a:pPr algn="ctr"/>
             <a:r>
               <a:rPr sz="1200" b="1" i="0">
                 <a:solidFill>
-                  <a:srgbClr val="2E7D32"/>
-                </a:solidFill>
-                <a:latin typeface="Calibri"/>
-              </a:rPr>
-              <a:t>YES</a:t>
-            </a:r>
-          </a:p>
-        </p:txBody>
-      </p:sp>
-      <p:sp>
-        <p:nvSpPr>
-          <p:cNvPr id="25" name="TextBox 24"/>
-          <p:cNvSpPr txBox="1"/>
-          <p:nvPr/>
-        </p:nvSpPr>
-        <p:spPr>
-          <a:xfrm>
-            <a:off x="6583680" y="3767328"/>
-            <a:ext cx="1645920" cy="365760"/>
-          </a:xfrm>
-          <a:prstGeom prst="rect">
-            <a:avLst/>
-          </a:prstGeom>
-          <a:noFill/>
-        </p:spPr>
-        <p:txBody>
-          <a:bodyPr wrap="square" anchor="t" lIns="50800" rIns="50800" tIns="25400" bIns="25400">
-            <a:spAutoFit/>
-          </a:bodyPr>
-          <a:lstStyle/>
-          <a:p>
-            <a:pPr algn="l"/>
-            <a:r>
-              <a:rPr sz="1200" b="0" i="0">
-                <a:solidFill>
-                  <a:srgbClr val="2B2B2B"/>
-                </a:solidFill>
-                <a:latin typeface="Calibri"/>
-              </a:rPr>
-              <a:t>0.31</a:t>
-            </a:r>
-          </a:p>
-        </p:txBody>
-      </p:sp>
-      <p:sp>
-        <p:nvSpPr>
-          <p:cNvPr id="26" name="TextBox 25"/>
-          <p:cNvSpPr txBox="1"/>
-          <p:nvPr/>
-        </p:nvSpPr>
-        <p:spPr>
-          <a:xfrm>
-            <a:off x="8412480" y="3767328"/>
-            <a:ext cx="1371600" cy="365760"/>
-          </a:xfrm>
-          <a:prstGeom prst="rect">
-            <a:avLst/>
-          </a:prstGeom>
-          <a:noFill/>
-        </p:spPr>
-        <p:txBody>
-          <a:bodyPr wrap="square" anchor="t" lIns="50800" rIns="50800" tIns="25400" bIns="25400">
-            <a:spAutoFit/>
-          </a:bodyPr>
-          <a:lstStyle/>
-          <a:p>
-            <a:pPr algn="l"/>
-            <a:r>
-              <a:rPr sz="1300" b="1" i="0">
-                <a:solidFill>
                   <a:srgbClr val="A83A5B"/>
                 </a:solidFill>
                 <a:latin typeface="Calibri"/>
               </a:rPr>
-              <a:t>0.57</a:t>
-            </a:r>
-          </a:p>
-        </p:txBody>
-      </p:sp>
-      <p:sp>
-        <p:nvSpPr>
-          <p:cNvPr id="27" name="Rectangle 26"/>
+              <a:t>weight 0.15</a:t>
+            </a:r>
+          </a:p>
+        </p:txBody>
+      </p:sp>
+      <p:sp>
+        <p:nvSpPr>
+          <p:cNvPr id="29" name="Rectangle 28"/>
           <p:cNvSpPr/>
           <p:nvPr/>
         </p:nvSpPr>
         <p:spPr>
           <a:xfrm>
-            <a:off x="502920" y="4754880"/>
-            <a:ext cx="10149840" cy="1005840"/>
+            <a:off x="502920" y="4343400"/>
+            <a:ext cx="10149840" cy="1417320"/>
           </a:xfrm>
           <a:prstGeom prst="rect">
             <a:avLst/>
@@ -6441,42 +6795,252 @@
       </p:sp>
       <p:sp>
         <p:nvSpPr>
-          <p:cNvPr id="28" name="TextBox 27"/>
-          <p:cNvSpPr txBox="1"/>
-          <p:nvPr/>
-        </p:nvSpPr>
-        <p:spPr>
-          <a:xfrm>
-            <a:off x="731520" y="4892040"/>
-            <a:ext cx="9692640" cy="731520"/>
-          </a:xfrm>
-          <a:prstGeom prst="rect">
-            <a:avLst/>
-          </a:prstGeom>
-          <a:noFill/>
-        </p:spPr>
-        <p:txBody>
-          <a:bodyPr wrap="square" anchor="ctr" lIns="50800" rIns="50800" tIns="25400" bIns="25400">
+          <p:cNvPr id="30" name="TextBox 29"/>
+          <p:cNvSpPr txBox="1"/>
+          <p:nvPr/>
+        </p:nvSpPr>
+        <p:spPr>
+          <a:xfrm>
+            <a:off x="685800" y="4480560"/>
+            <a:ext cx="9601200" cy="365760"/>
+          </a:xfrm>
+          <a:prstGeom prst="rect">
+            <a:avLst/>
+          </a:prstGeom>
+          <a:noFill/>
+        </p:spPr>
+        <p:txBody>
+          <a:bodyPr wrap="square" anchor="t" lIns="50800" rIns="50800" tIns="25400" bIns="25400">
             <a:spAutoFit/>
           </a:bodyPr>
           <a:lstStyle/>
           <a:p>
             <a:pPr algn="l"/>
             <a:r>
-              <a:rPr sz="1400" b="0" i="0">
+              <a:rPr sz="1500" b="1" i="0">
                 <a:solidFill>
                   <a:srgbClr val="FFFFFF"/>
                 </a:solidFill>
                 <a:latin typeface="Calibri"/>
               </a:rPr>
-              <a:t>Both are severe on CVSS — but the KEV-listed, EPSS-94th flaw is the one you patch tonight. A severity-only agent treats them as equal and burns responder time (alert fatigue → missed real threats).</a:t>
-            </a:r>
-          </a:p>
-        </p:txBody>
-      </p:sp>
-      <p:sp>
-        <p:nvSpPr>
-          <p:cNvPr id="29" name="TextBox 28"/>
+              <a:t>Score → human-in-the-loop routing band</a:t>
+            </a:r>
+          </a:p>
+        </p:txBody>
+      </p:sp>
+      <p:sp>
+        <p:nvSpPr>
+          <p:cNvPr id="31" name="TextBox 30"/>
+          <p:cNvSpPr txBox="1"/>
+          <p:nvPr/>
+        </p:nvSpPr>
+        <p:spPr>
+          <a:xfrm>
+            <a:off x="685800" y="4937760"/>
+            <a:ext cx="3200400" cy="365760"/>
+          </a:xfrm>
+          <a:prstGeom prst="rect">
+            <a:avLst/>
+          </a:prstGeom>
+          <a:noFill/>
+        </p:spPr>
+        <p:txBody>
+          <a:bodyPr wrap="square" anchor="t" lIns="50800" rIns="50800" tIns="25400" bIns="25400">
+            <a:spAutoFit/>
+          </a:bodyPr>
+          <a:lstStyle/>
+          <a:p>
+            <a:pPr algn="l"/>
+            <a:r>
+              <a:rPr sz="1600" b="1" i="0">
+                <a:solidFill>
+                  <a:srgbClr val="2E7D32"/>
+                </a:solidFill>
+                <a:latin typeface="Calibri"/>
+              </a:rPr>
+              <a:t>AUTO</a:t>
+            </a:r>
+          </a:p>
+        </p:txBody>
+      </p:sp>
+      <p:sp>
+        <p:nvSpPr>
+          <p:cNvPr id="32" name="TextBox 31"/>
+          <p:cNvSpPr txBox="1"/>
+          <p:nvPr/>
+        </p:nvSpPr>
+        <p:spPr>
+          <a:xfrm>
+            <a:off x="685800" y="5303520"/>
+            <a:ext cx="3200400" cy="365760"/>
+          </a:xfrm>
+          <a:prstGeom prst="rect">
+            <a:avLst/>
+          </a:prstGeom>
+          <a:noFill/>
+        </p:spPr>
+        <p:txBody>
+          <a:bodyPr wrap="square" anchor="t" lIns="50800" rIns="50800" tIns="25400" bIns="25400">
+            <a:spAutoFit/>
+          </a:bodyPr>
+          <a:lstStyle/>
+          <a:p>
+            <a:pPr algn="l"/>
+            <a:r>
+              <a:rPr sz="1200" b="0" i="0">
+                <a:solidFill>
+                  <a:srgbClr val="FFFFFF"/>
+                </a:solidFill>
+                <a:latin typeface="Calibri"/>
+              </a:rPr>
+              <a:t>conf ≥ 0.75 · auto-report</a:t>
+            </a:r>
+          </a:p>
+        </p:txBody>
+      </p:sp>
+      <p:sp>
+        <p:nvSpPr>
+          <p:cNvPr id="33" name="TextBox 32"/>
+          <p:cNvSpPr txBox="1"/>
+          <p:nvPr/>
+        </p:nvSpPr>
+        <p:spPr>
+          <a:xfrm>
+            <a:off x="3977640" y="4937760"/>
+            <a:ext cx="3200400" cy="365760"/>
+          </a:xfrm>
+          <a:prstGeom prst="rect">
+            <a:avLst/>
+          </a:prstGeom>
+          <a:noFill/>
+        </p:spPr>
+        <p:txBody>
+          <a:bodyPr wrap="square" anchor="t" lIns="50800" rIns="50800" tIns="25400" bIns="25400">
+            <a:spAutoFit/>
+          </a:bodyPr>
+          <a:lstStyle/>
+          <a:p>
+            <a:pPr algn="l"/>
+            <a:r>
+              <a:rPr sz="1600" b="1" i="0">
+                <a:solidFill>
+                  <a:srgbClr val="B5657F"/>
+                </a:solidFill>
+                <a:latin typeface="Calibri"/>
+              </a:rPr>
+              <a:t>SUGGEST</a:t>
+            </a:r>
+          </a:p>
+        </p:txBody>
+      </p:sp>
+      <p:sp>
+        <p:nvSpPr>
+          <p:cNvPr id="34" name="TextBox 33"/>
+          <p:cNvSpPr txBox="1"/>
+          <p:nvPr/>
+        </p:nvSpPr>
+        <p:spPr>
+          <a:xfrm>
+            <a:off x="3977640" y="5303520"/>
+            <a:ext cx="3200400" cy="365760"/>
+          </a:xfrm>
+          <a:prstGeom prst="rect">
+            <a:avLst/>
+          </a:prstGeom>
+          <a:noFill/>
+        </p:spPr>
+        <p:txBody>
+          <a:bodyPr wrap="square" anchor="t" lIns="50800" rIns="50800" tIns="25400" bIns="25400">
+            <a:spAutoFit/>
+          </a:bodyPr>
+          <a:lstStyle/>
+          <a:p>
+            <a:pPr algn="l"/>
+            <a:r>
+              <a:rPr sz="1200" b="0" i="0">
+                <a:solidFill>
+                  <a:srgbClr val="FFFFFF"/>
+                </a:solidFill>
+                <a:latin typeface="Calibri"/>
+              </a:rPr>
+              <a:t>0.50–0.75 · human confirms</a:t>
+            </a:r>
+          </a:p>
+        </p:txBody>
+      </p:sp>
+      <p:sp>
+        <p:nvSpPr>
+          <p:cNvPr id="35" name="TextBox 34"/>
+          <p:cNvSpPr txBox="1"/>
+          <p:nvPr/>
+        </p:nvSpPr>
+        <p:spPr>
+          <a:xfrm>
+            <a:off x="7269480" y="4937760"/>
+            <a:ext cx="3200400" cy="365760"/>
+          </a:xfrm>
+          <a:prstGeom prst="rect">
+            <a:avLst/>
+          </a:prstGeom>
+          <a:noFill/>
+        </p:spPr>
+        <p:txBody>
+          <a:bodyPr wrap="square" anchor="t" lIns="50800" rIns="50800" tIns="25400" bIns="25400">
+            <a:spAutoFit/>
+          </a:bodyPr>
+          <a:lstStyle/>
+          <a:p>
+            <a:pPr algn="l"/>
+            <a:r>
+              <a:rPr sz="1600" b="1" i="0">
+                <a:solidFill>
+                  <a:srgbClr val="9EADB5"/>
+                </a:solidFill>
+                <a:latin typeface="Calibri"/>
+              </a:rPr>
+              <a:t>FLAG</a:t>
+            </a:r>
+          </a:p>
+        </p:txBody>
+      </p:sp>
+      <p:sp>
+        <p:nvSpPr>
+          <p:cNvPr id="36" name="TextBox 35"/>
+          <p:cNvSpPr txBox="1"/>
+          <p:nvPr/>
+        </p:nvSpPr>
+        <p:spPr>
+          <a:xfrm>
+            <a:off x="7269480" y="5303520"/>
+            <a:ext cx="3200400" cy="365760"/>
+          </a:xfrm>
+          <a:prstGeom prst="rect">
+            <a:avLst/>
+          </a:prstGeom>
+          <a:noFill/>
+        </p:spPr>
+        <p:txBody>
+          <a:bodyPr wrap="square" anchor="t" lIns="50800" rIns="50800" tIns="25400" bIns="25400">
+            <a:spAutoFit/>
+          </a:bodyPr>
+          <a:lstStyle/>
+          <a:p>
+            <a:pPr algn="l"/>
+            <a:r>
+              <a:rPr sz="1200" b="0" i="0">
+                <a:solidFill>
+                  <a:srgbClr val="FFFFFF"/>
+                </a:solidFill>
+                <a:latin typeface="Calibri"/>
+              </a:rPr>
+              <a:t>&lt; 0.50 · human must review</a:t>
+            </a:r>
+          </a:p>
+        </p:txBody>
+      </p:sp>
+      <p:sp>
+        <p:nvSpPr>
+          <p:cNvPr id="37" name="TextBox 36"/>
           <p:cNvSpPr txBox="1"/>
           <p:nvPr/>
         </p:nvSpPr>
@@ -6511,7 +7075,7 @@
       </p:sp>
       <p:sp>
         <p:nvSpPr>
-          <p:cNvPr id="30" name="TextBox 29"/>
+          <p:cNvPr id="38" name="TextBox 37"/>
           <p:cNvSpPr txBox="1"/>
           <p:nvPr/>
         </p:nvSpPr>
@@ -6539,7 +7103,7 @@
                 </a:solidFill>
                 <a:latin typeface="Calibri"/>
               </a:rPr>
-              <a:t>4</a:t>
+              <a:t>3</a:t>
             </a:r>
           </a:p>
         </p:txBody>
@@ -6768,7 +7332,7 @@
                 </a:solidFill>
                 <a:latin typeface="Calibri"/>
               </a:rPr>
-              <a:t>WEEK 2 · GOAL 2</a:t>
+              <a:t>WEEK 2 · GOAL 4</a:t>
             </a:r>
           </a:p>
         </p:txBody>
@@ -6803,7 +7367,7 @@
                 </a:solidFill>
                 <a:latin typeface="Calibri"/>
               </a:rPr>
-              <a:t>Fairness Audit: Does Detection Depend on the Vendor?</a:t>
+              <a:t>Threat Intel: Severity ≠ Priority (KEV + EPSS)</a:t>
             </a:r>
           </a:p>
         </p:txBody>
@@ -6816,8 +7380,8 @@
         </p:nvSpPr>
         <p:spPr>
           <a:xfrm>
-            <a:off x="502920" y="1691640"/>
-            <a:ext cx="10149840" cy="777240"/>
+            <a:off x="502920" y="1737360"/>
+            <a:ext cx="10149840" cy="640080"/>
           </a:xfrm>
           <a:prstGeom prst="rect">
             <a:avLst/>
@@ -6838,20 +7402,388 @@
                 </a:solidFill>
                 <a:latin typeface="Calibri"/>
               </a:rPr>
-              <a:t>Fairness metric = per-vendor recall (share of a vendor's CVEs the matcher can resolve). For a security tool, unfairness = a systematic false-negative blind spot for under-served vendors.</a:t>
-            </a:r>
-          </a:p>
-        </p:txBody>
-      </p:sp>
-      <p:sp>
-        <p:nvSpPr>
-          <p:cNvPr id="9" name="TextBox 8"/>
-          <p:cNvSpPr txBox="1"/>
-          <p:nvPr/>
-        </p:nvSpPr>
-        <p:spPr>
-          <a:xfrm>
-            <a:off x="640080" y="2651760"/>
+              <a:t>CVSS says how bad a flaw is in theory. KEV + EPSS say whether it is actually being exploited. The agent now prioritizes by real-world risk.</a:t>
+            </a:r>
+          </a:p>
+        </p:txBody>
+      </p:sp>
+      <p:sp>
+        <p:nvSpPr>
+          <p:cNvPr id="9" name="Rectangle 8"/>
+          <p:cNvSpPr/>
+          <p:nvPr/>
+        </p:nvSpPr>
+        <p:spPr>
+          <a:xfrm>
+            <a:off x="502920" y="2560320"/>
+            <a:ext cx="10149840" cy="502920"/>
+          </a:xfrm>
+          <a:prstGeom prst="rect">
+            <a:avLst/>
+          </a:prstGeom>
+          <a:solidFill>
+            <a:srgbClr val="7A1F3D"/>
+          </a:solidFill>
+          <a:ln>
+            <a:noFill/>
+          </a:ln>
+          <a:effectLst/>
+        </p:spPr>
+        <p:style>
+          <a:lnRef idx="1">
+            <a:schemeClr val="accent1"/>
+          </a:lnRef>
+          <a:fillRef idx="3">
+            <a:schemeClr val="accent1"/>
+          </a:fillRef>
+          <a:effectRef idx="2">
+            <a:schemeClr val="accent1"/>
+          </a:effectRef>
+          <a:fontRef idx="minor">
+            <a:schemeClr val="lt1"/>
+          </a:fontRef>
+        </p:style>
+        <p:txBody>
+          <a:bodyPr rtlCol="0" anchor="ctr"/>
+          <a:lstStyle/>
+          <a:p>
+            <a:pPr algn="ctr"/>
+          </a:p>
+        </p:txBody>
+      </p:sp>
+      <p:sp>
+        <p:nvSpPr>
+          <p:cNvPr id="10" name="TextBox 9"/>
+          <p:cNvSpPr txBox="1"/>
+          <p:nvPr/>
+        </p:nvSpPr>
+        <p:spPr>
+          <a:xfrm>
+            <a:off x="640080" y="2606040"/>
+            <a:ext cx="1828800" cy="365760"/>
+          </a:xfrm>
+          <a:prstGeom prst="rect">
+            <a:avLst/>
+          </a:prstGeom>
+          <a:noFill/>
+        </p:spPr>
+        <p:txBody>
+          <a:bodyPr wrap="square" anchor="t" lIns="50800" rIns="50800" tIns="25400" bIns="25400">
+            <a:spAutoFit/>
+          </a:bodyPr>
+          <a:lstStyle/>
+          <a:p>
+            <a:pPr algn="l"/>
+            <a:r>
+              <a:rPr sz="1300" b="1" i="0">
+                <a:solidFill>
+                  <a:srgbClr val="FFFFFF"/>
+                </a:solidFill>
+                <a:latin typeface="Calibri"/>
+              </a:rPr>
+              <a:t>CVE</a:t>
+            </a:r>
+          </a:p>
+        </p:txBody>
+      </p:sp>
+      <p:sp>
+        <p:nvSpPr>
+          <p:cNvPr id="11" name="TextBox 10"/>
+          <p:cNvSpPr txBox="1"/>
+          <p:nvPr/>
+        </p:nvSpPr>
+        <p:spPr>
+          <a:xfrm>
+            <a:off x="3566160" y="2606040"/>
+            <a:ext cx="1828800" cy="365760"/>
+          </a:xfrm>
+          <a:prstGeom prst="rect">
+            <a:avLst/>
+          </a:prstGeom>
+          <a:noFill/>
+        </p:spPr>
+        <p:txBody>
+          <a:bodyPr wrap="square" anchor="t" lIns="50800" rIns="50800" tIns="25400" bIns="25400">
+            <a:spAutoFit/>
+          </a:bodyPr>
+          <a:lstStyle/>
+          <a:p>
+            <a:pPr algn="l"/>
+            <a:r>
+              <a:rPr sz="1300" b="1" i="0">
+                <a:solidFill>
+                  <a:srgbClr val="FFFFFF"/>
+                </a:solidFill>
+                <a:latin typeface="Calibri"/>
+              </a:rPr>
+              <a:t>CVSS</a:t>
+            </a:r>
+          </a:p>
+        </p:txBody>
+      </p:sp>
+      <p:sp>
+        <p:nvSpPr>
+          <p:cNvPr id="12" name="TextBox 11"/>
+          <p:cNvSpPr txBox="1"/>
+          <p:nvPr/>
+        </p:nvSpPr>
+        <p:spPr>
+          <a:xfrm>
+            <a:off x="4937760" y="2606040"/>
+            <a:ext cx="1828800" cy="365760"/>
+          </a:xfrm>
+          <a:prstGeom prst="rect">
+            <a:avLst/>
+          </a:prstGeom>
+          <a:noFill/>
+        </p:spPr>
+        <p:txBody>
+          <a:bodyPr wrap="square" anchor="t" lIns="50800" rIns="50800" tIns="25400" bIns="25400">
+            <a:spAutoFit/>
+          </a:bodyPr>
+          <a:lstStyle/>
+          <a:p>
+            <a:pPr algn="l"/>
+            <a:r>
+              <a:rPr sz="1300" b="1" i="0">
+                <a:solidFill>
+                  <a:srgbClr val="FFFFFF"/>
+                </a:solidFill>
+                <a:latin typeface="Calibri"/>
+              </a:rPr>
+              <a:t>On KEV?</a:t>
+            </a:r>
+          </a:p>
+        </p:txBody>
+      </p:sp>
+      <p:sp>
+        <p:nvSpPr>
+          <p:cNvPr id="13" name="TextBox 12"/>
+          <p:cNvSpPr txBox="1"/>
+          <p:nvPr/>
+        </p:nvSpPr>
+        <p:spPr>
+          <a:xfrm>
+            <a:off x="6583680" y="2606040"/>
+            <a:ext cx="1828800" cy="365760"/>
+          </a:xfrm>
+          <a:prstGeom prst="rect">
+            <a:avLst/>
+          </a:prstGeom>
+          <a:noFill/>
+        </p:spPr>
+        <p:txBody>
+          <a:bodyPr wrap="square" anchor="t" lIns="50800" rIns="50800" tIns="25400" bIns="25400">
+            <a:spAutoFit/>
+          </a:bodyPr>
+          <a:lstStyle/>
+          <a:p>
+            <a:pPr algn="l"/>
+            <a:r>
+              <a:rPr sz="1300" b="1" i="0">
+                <a:solidFill>
+                  <a:srgbClr val="FFFFFF"/>
+                </a:solidFill>
+                <a:latin typeface="Calibri"/>
+              </a:rPr>
+              <a:t>EPSS</a:t>
+            </a:r>
+          </a:p>
+        </p:txBody>
+      </p:sp>
+      <p:sp>
+        <p:nvSpPr>
+          <p:cNvPr id="14" name="TextBox 13"/>
+          <p:cNvSpPr txBox="1"/>
+          <p:nvPr/>
+        </p:nvSpPr>
+        <p:spPr>
+          <a:xfrm>
+            <a:off x="8412480" y="2606040"/>
+            <a:ext cx="1828800" cy="365760"/>
+          </a:xfrm>
+          <a:prstGeom prst="rect">
+            <a:avLst/>
+          </a:prstGeom>
+          <a:noFill/>
+        </p:spPr>
+        <p:txBody>
+          <a:bodyPr wrap="square" anchor="t" lIns="50800" rIns="50800" tIns="25400" bIns="25400">
+            <a:spAutoFit/>
+          </a:bodyPr>
+          <a:lstStyle/>
+          <a:p>
+            <a:pPr algn="l"/>
+            <a:r>
+              <a:rPr sz="1300" b="1" i="0">
+                <a:solidFill>
+                  <a:srgbClr val="FFFFFF"/>
+                </a:solidFill>
+                <a:latin typeface="Calibri"/>
+              </a:rPr>
+              <a:t>Priority</a:t>
+            </a:r>
+          </a:p>
+        </p:txBody>
+      </p:sp>
+      <p:sp>
+        <p:nvSpPr>
+          <p:cNvPr id="15" name="Rectangle 14"/>
+          <p:cNvSpPr/>
+          <p:nvPr/>
+        </p:nvSpPr>
+        <p:spPr>
+          <a:xfrm>
+            <a:off x="502920" y="3154680"/>
+            <a:ext cx="10149840" cy="502920"/>
+          </a:xfrm>
+          <a:prstGeom prst="rect">
+            <a:avLst/>
+          </a:prstGeom>
+          <a:solidFill>
+            <a:srgbClr val="F2F2F2"/>
+          </a:solidFill>
+          <a:ln>
+            <a:noFill/>
+          </a:ln>
+          <a:effectLst/>
+        </p:spPr>
+        <p:style>
+          <a:lnRef idx="1">
+            <a:schemeClr val="accent1"/>
+          </a:lnRef>
+          <a:fillRef idx="3">
+            <a:schemeClr val="accent1"/>
+          </a:fillRef>
+          <a:effectRef idx="2">
+            <a:schemeClr val="accent1"/>
+          </a:effectRef>
+          <a:fontRef idx="minor">
+            <a:schemeClr val="lt1"/>
+          </a:fontRef>
+        </p:style>
+        <p:txBody>
+          <a:bodyPr rtlCol="0" anchor="ctr"/>
+          <a:lstStyle/>
+          <a:p>
+            <a:pPr algn="ctr"/>
+          </a:p>
+        </p:txBody>
+      </p:sp>
+      <p:sp>
+        <p:nvSpPr>
+          <p:cNvPr id="16" name="TextBox 15"/>
+          <p:cNvSpPr txBox="1"/>
+          <p:nvPr/>
+        </p:nvSpPr>
+        <p:spPr>
+          <a:xfrm>
+            <a:off x="640080" y="3218688"/>
+            <a:ext cx="2926080" cy="365760"/>
+          </a:xfrm>
+          <a:prstGeom prst="rect">
+            <a:avLst/>
+          </a:prstGeom>
+          <a:noFill/>
+        </p:spPr>
+        <p:txBody>
+          <a:bodyPr wrap="square" anchor="t" lIns="50800" rIns="50800" tIns="25400" bIns="25400">
+            <a:spAutoFit/>
+          </a:bodyPr>
+          <a:lstStyle/>
+          <a:p>
+            <a:pPr algn="l"/>
+            <a:r>
+              <a:rPr sz="1200" b="0" i="0">
+                <a:solidFill>
+                  <a:srgbClr val="2B2B2B"/>
+                </a:solidFill>
+                <a:latin typeface="Calibri"/>
+              </a:rPr>
+              <a:t>CVE-2021-44228 (Log4Shell)</a:t>
+            </a:r>
+          </a:p>
+        </p:txBody>
+      </p:sp>
+      <p:sp>
+        <p:nvSpPr>
+          <p:cNvPr id="17" name="TextBox 16"/>
+          <p:cNvSpPr txBox="1"/>
+          <p:nvPr/>
+        </p:nvSpPr>
+        <p:spPr>
+          <a:xfrm>
+            <a:off x="3566160" y="3218688"/>
+            <a:ext cx="1371600" cy="365760"/>
+          </a:xfrm>
+          <a:prstGeom prst="rect">
+            <a:avLst/>
+          </a:prstGeom>
+          <a:noFill/>
+        </p:spPr>
+        <p:txBody>
+          <a:bodyPr wrap="square" anchor="t" lIns="50800" rIns="50800" tIns="25400" bIns="25400">
+            <a:spAutoFit/>
+          </a:bodyPr>
+          <a:lstStyle/>
+          <a:p>
+            <a:pPr algn="l"/>
+            <a:r>
+              <a:rPr sz="1200" b="0" i="0">
+                <a:solidFill>
+                  <a:srgbClr val="2B2B2B"/>
+                </a:solidFill>
+                <a:latin typeface="Calibri"/>
+              </a:rPr>
+              <a:t>10.0 CRITICAL</a:t>
+            </a:r>
+          </a:p>
+        </p:txBody>
+      </p:sp>
+      <p:sp>
+        <p:nvSpPr>
+          <p:cNvPr id="18" name="TextBox 17"/>
+          <p:cNvSpPr txBox="1"/>
+          <p:nvPr/>
+        </p:nvSpPr>
+        <p:spPr>
+          <a:xfrm>
+            <a:off x="4937760" y="3218688"/>
+            <a:ext cx="1371600" cy="365760"/>
+          </a:xfrm>
+          <a:prstGeom prst="rect">
+            <a:avLst/>
+          </a:prstGeom>
+          <a:noFill/>
+        </p:spPr>
+        <p:txBody>
+          <a:bodyPr wrap="square" anchor="t" lIns="50800" rIns="50800" tIns="25400" bIns="25400">
+            <a:spAutoFit/>
+          </a:bodyPr>
+          <a:lstStyle/>
+          <a:p>
+            <a:pPr algn="l"/>
+            <a:r>
+              <a:rPr sz="1200" b="1" i="0">
+                <a:solidFill>
+                  <a:srgbClr val="2E7D32"/>
+                </a:solidFill>
+                <a:latin typeface="Calibri"/>
+              </a:rPr>
+              <a:t>YES</a:t>
+            </a:r>
+          </a:p>
+        </p:txBody>
+      </p:sp>
+      <p:sp>
+        <p:nvSpPr>
+          <p:cNvPr id="19" name="TextBox 18"/>
+          <p:cNvSpPr txBox="1"/>
+          <p:nvPr/>
+        </p:nvSpPr>
+        <p:spPr>
+          <a:xfrm>
+            <a:off x="6583680" y="3218688"/>
             <a:ext cx="1645920" cy="365760"/>
           </a:xfrm>
           <a:prstGeom prst="rect">
@@ -6860,34 +7792,288 @@
           <a:noFill/>
         </p:spPr>
         <p:txBody>
-          <a:bodyPr wrap="square" anchor="ctr" lIns="50800" rIns="50800" tIns="25400" bIns="25400">
+          <a:bodyPr wrap="square" anchor="t" lIns="50800" rIns="50800" tIns="25400" bIns="25400">
             <a:spAutoFit/>
           </a:bodyPr>
           <a:lstStyle/>
           <a:p>
             <a:pPr algn="l"/>
             <a:r>
+              <a:rPr sz="1200" b="0" i="0">
+                <a:solidFill>
+                  <a:srgbClr val="2B2B2B"/>
+                </a:solidFill>
+                <a:latin typeface="Calibri"/>
+              </a:rPr>
+              <a:t>0.94 (94th pct)</a:t>
+            </a:r>
+          </a:p>
+        </p:txBody>
+      </p:sp>
+      <p:sp>
+        <p:nvSpPr>
+          <p:cNvPr id="20" name="TextBox 19"/>
+          <p:cNvSpPr txBox="1"/>
+          <p:nvPr/>
+        </p:nvSpPr>
+        <p:spPr>
+          <a:xfrm>
+            <a:off x="8412480" y="3218688"/>
+            <a:ext cx="1371600" cy="365760"/>
+          </a:xfrm>
+          <a:prstGeom prst="rect">
+            <a:avLst/>
+          </a:prstGeom>
+          <a:noFill/>
+        </p:spPr>
+        <p:txBody>
+          <a:bodyPr wrap="square" anchor="t" lIns="50800" rIns="50800" tIns="25400" bIns="25400">
+            <a:spAutoFit/>
+          </a:bodyPr>
+          <a:lstStyle/>
+          <a:p>
+            <a:pPr algn="l"/>
+            <a:r>
+              <a:rPr sz="1300" b="1" i="0">
+                <a:solidFill>
+                  <a:srgbClr val="2E7D32"/>
+                </a:solidFill>
+                <a:latin typeface="Calibri"/>
+              </a:rPr>
+              <a:t>0.98</a:t>
+            </a:r>
+          </a:p>
+        </p:txBody>
+      </p:sp>
+      <p:sp>
+        <p:nvSpPr>
+          <p:cNvPr id="21" name="Rectangle 20"/>
+          <p:cNvSpPr/>
+          <p:nvPr/>
+        </p:nvSpPr>
+        <p:spPr>
+          <a:xfrm>
+            <a:off x="502920" y="3703320"/>
+            <a:ext cx="10149840" cy="502920"/>
+          </a:xfrm>
+          <a:prstGeom prst="rect">
+            <a:avLst/>
+          </a:prstGeom>
+          <a:solidFill>
+            <a:srgbClr val="FFFFFF"/>
+          </a:solidFill>
+          <a:ln>
+            <a:noFill/>
+          </a:ln>
+          <a:effectLst/>
+        </p:spPr>
+        <p:style>
+          <a:lnRef idx="1">
+            <a:schemeClr val="accent1"/>
+          </a:lnRef>
+          <a:fillRef idx="3">
+            <a:schemeClr val="accent1"/>
+          </a:fillRef>
+          <a:effectRef idx="2">
+            <a:schemeClr val="accent1"/>
+          </a:effectRef>
+          <a:fontRef idx="minor">
+            <a:schemeClr val="lt1"/>
+          </a:fontRef>
+        </p:style>
+        <p:txBody>
+          <a:bodyPr rtlCol="0" anchor="ctr"/>
+          <a:lstStyle/>
+          <a:p>
+            <a:pPr algn="ctr"/>
+          </a:p>
+        </p:txBody>
+      </p:sp>
+      <p:sp>
+        <p:nvSpPr>
+          <p:cNvPr id="22" name="TextBox 21"/>
+          <p:cNvSpPr txBox="1"/>
+          <p:nvPr/>
+        </p:nvSpPr>
+        <p:spPr>
+          <a:xfrm>
+            <a:off x="640080" y="3767328"/>
+            <a:ext cx="2926080" cy="365760"/>
+          </a:xfrm>
+          <a:prstGeom prst="rect">
+            <a:avLst/>
+          </a:prstGeom>
+          <a:noFill/>
+        </p:spPr>
+        <p:txBody>
+          <a:bodyPr wrap="square" anchor="t" lIns="50800" rIns="50800" tIns="25400" bIns="25400">
+            <a:spAutoFit/>
+          </a:bodyPr>
+          <a:lstStyle/>
+          <a:p>
+            <a:pPr algn="l"/>
+            <a:r>
+              <a:rPr sz="1200" b="0" i="0">
+                <a:solidFill>
+                  <a:srgbClr val="2B2B2B"/>
+                </a:solidFill>
+                <a:latin typeface="Calibri"/>
+              </a:rPr>
+              <a:t>CVE-2022-0778</a:t>
+            </a:r>
+          </a:p>
+        </p:txBody>
+      </p:sp>
+      <p:sp>
+        <p:nvSpPr>
+          <p:cNvPr id="23" name="TextBox 22"/>
+          <p:cNvSpPr txBox="1"/>
+          <p:nvPr/>
+        </p:nvSpPr>
+        <p:spPr>
+          <a:xfrm>
+            <a:off x="3566160" y="3767328"/>
+            <a:ext cx="1371600" cy="365760"/>
+          </a:xfrm>
+          <a:prstGeom prst="rect">
+            <a:avLst/>
+          </a:prstGeom>
+          <a:noFill/>
+        </p:spPr>
+        <p:txBody>
+          <a:bodyPr wrap="square" anchor="t" lIns="50800" rIns="50800" tIns="25400" bIns="25400">
+            <a:spAutoFit/>
+          </a:bodyPr>
+          <a:lstStyle/>
+          <a:p>
+            <a:pPr algn="l"/>
+            <a:r>
+              <a:rPr sz="1200" b="0" i="0">
+                <a:solidFill>
+                  <a:srgbClr val="2B2B2B"/>
+                </a:solidFill>
+                <a:latin typeface="Calibri"/>
+              </a:rPr>
+              <a:t>7.5 HIGH</a:t>
+            </a:r>
+          </a:p>
+        </p:txBody>
+      </p:sp>
+      <p:sp>
+        <p:nvSpPr>
+          <p:cNvPr id="24" name="TextBox 23"/>
+          <p:cNvSpPr txBox="1"/>
+          <p:nvPr/>
+        </p:nvSpPr>
+        <p:spPr>
+          <a:xfrm>
+            <a:off x="4937760" y="3767328"/>
+            <a:ext cx="1371600" cy="365760"/>
+          </a:xfrm>
+          <a:prstGeom prst="rect">
+            <a:avLst/>
+          </a:prstGeom>
+          <a:noFill/>
+        </p:spPr>
+        <p:txBody>
+          <a:bodyPr wrap="square" anchor="t" lIns="50800" rIns="50800" tIns="25400" bIns="25400">
+            <a:spAutoFit/>
+          </a:bodyPr>
+          <a:lstStyle/>
+          <a:p>
+            <a:pPr algn="l"/>
+            <a:r>
               <a:rPr sz="1200" b="1" i="0">
                 <a:solidFill>
+                  <a:srgbClr val="2E7D32"/>
+                </a:solidFill>
+                <a:latin typeface="Calibri"/>
+              </a:rPr>
+              <a:t>YES</a:t>
+            </a:r>
+          </a:p>
+        </p:txBody>
+      </p:sp>
+      <p:sp>
+        <p:nvSpPr>
+          <p:cNvPr id="25" name="TextBox 24"/>
+          <p:cNvSpPr txBox="1"/>
+          <p:nvPr/>
+        </p:nvSpPr>
+        <p:spPr>
+          <a:xfrm>
+            <a:off x="6583680" y="3767328"/>
+            <a:ext cx="1645920" cy="365760"/>
+          </a:xfrm>
+          <a:prstGeom prst="rect">
+            <a:avLst/>
+          </a:prstGeom>
+          <a:noFill/>
+        </p:spPr>
+        <p:txBody>
+          <a:bodyPr wrap="square" anchor="t" lIns="50800" rIns="50800" tIns="25400" bIns="25400">
+            <a:spAutoFit/>
+          </a:bodyPr>
+          <a:lstStyle/>
+          <a:p>
+            <a:pPr algn="l"/>
+            <a:r>
+              <a:rPr sz="1200" b="0" i="0">
+                <a:solidFill>
                   <a:srgbClr val="2B2B2B"/>
                 </a:solidFill>
                 <a:latin typeface="Calibri"/>
               </a:rPr>
-              <a:t>Google</a:t>
-            </a:r>
-          </a:p>
-        </p:txBody>
-      </p:sp>
-      <p:sp>
-        <p:nvSpPr>
-          <p:cNvPr id="10" name="Rectangle 9"/>
+              <a:t>0.31</a:t>
+            </a:r>
+          </a:p>
+        </p:txBody>
+      </p:sp>
+      <p:sp>
+        <p:nvSpPr>
+          <p:cNvPr id="26" name="TextBox 25"/>
+          <p:cNvSpPr txBox="1"/>
+          <p:nvPr/>
+        </p:nvSpPr>
+        <p:spPr>
+          <a:xfrm>
+            <a:off x="8412480" y="3767328"/>
+            <a:ext cx="1371600" cy="365760"/>
+          </a:xfrm>
+          <a:prstGeom prst="rect">
+            <a:avLst/>
+          </a:prstGeom>
+          <a:noFill/>
+        </p:spPr>
+        <p:txBody>
+          <a:bodyPr wrap="square" anchor="t" lIns="50800" rIns="50800" tIns="25400" bIns="25400">
+            <a:spAutoFit/>
+          </a:bodyPr>
+          <a:lstStyle/>
+          <a:p>
+            <a:pPr algn="l"/>
+            <a:r>
+              <a:rPr sz="1300" b="1" i="0">
+                <a:solidFill>
+                  <a:srgbClr val="A83A5B"/>
+                </a:solidFill>
+                <a:latin typeface="Calibri"/>
+              </a:rPr>
+              <a:t>0.57</a:t>
+            </a:r>
+          </a:p>
+        </p:txBody>
+      </p:sp>
+      <p:sp>
+        <p:nvSpPr>
+          <p:cNvPr id="27" name="Rectangle 26"/>
           <p:cNvSpPr/>
           <p:nvPr/>
         </p:nvSpPr>
         <p:spPr>
           <a:xfrm>
-            <a:off x="2377440" y="2706624"/>
-            <a:ext cx="6858000" cy="292608"/>
+            <a:off x="502920" y="4754880"/>
+            <a:ext cx="10149840" cy="1005840"/>
           </a:xfrm>
           <a:prstGeom prst="rect">
             <a:avLst/>
@@ -6924,14 +8110,14 @@
       </p:sp>
       <p:sp>
         <p:nvSpPr>
-          <p:cNvPr id="11" name="TextBox 10"/>
-          <p:cNvSpPr txBox="1"/>
-          <p:nvPr/>
-        </p:nvSpPr>
-        <p:spPr>
-          <a:xfrm>
-            <a:off x="9372600" y="2651760"/>
-            <a:ext cx="1463040" cy="365760"/>
+          <p:cNvPr id="28" name="TextBox 27"/>
+          <p:cNvSpPr txBox="1"/>
+          <p:nvPr/>
+        </p:nvSpPr>
+        <p:spPr>
+          <a:xfrm>
+            <a:off x="731520" y="4892040"/>
+            <a:ext cx="9692640" cy="731520"/>
           </a:xfrm>
           <a:prstGeom prst="rect">
             <a:avLst/>
@@ -6946,1038 +8132,20 @@
           <a:p>
             <a:pPr algn="l"/>
             <a:r>
-              <a:rPr sz="1100" b="0" i="0">
-                <a:solidFill>
-                  <a:srgbClr val="2B2B2B"/>
-                </a:solidFill>
-                <a:latin typeface="Calibri"/>
-              </a:rPr>
-              <a:t>100% → 100%</a:t>
-            </a:r>
-          </a:p>
-        </p:txBody>
-      </p:sp>
-      <p:sp>
-        <p:nvSpPr>
-          <p:cNvPr id="12" name="TextBox 11"/>
-          <p:cNvSpPr txBox="1"/>
-          <p:nvPr/>
-        </p:nvSpPr>
-        <p:spPr>
-          <a:xfrm>
-            <a:off x="640080" y="3090672"/>
-            <a:ext cx="1645920" cy="365760"/>
-          </a:xfrm>
-          <a:prstGeom prst="rect">
-            <a:avLst/>
-          </a:prstGeom>
-          <a:noFill/>
-        </p:spPr>
-        <p:txBody>
-          <a:bodyPr wrap="square" anchor="ctr" lIns="50800" rIns="50800" tIns="25400" bIns="25400">
-            <a:spAutoFit/>
-          </a:bodyPr>
-          <a:lstStyle/>
-          <a:p>
-            <a:pPr algn="l"/>
-            <a:r>
-              <a:rPr sz="1200" b="1" i="0">
-                <a:solidFill>
-                  <a:srgbClr val="2B2B2B"/>
-                </a:solidFill>
-                <a:latin typeface="Calibri"/>
-              </a:rPr>
-              <a:t>Microsoft</a:t>
-            </a:r>
-          </a:p>
-        </p:txBody>
-      </p:sp>
-      <p:sp>
-        <p:nvSpPr>
-          <p:cNvPr id="13" name="Rectangle 12"/>
-          <p:cNvSpPr/>
-          <p:nvPr/>
-        </p:nvSpPr>
-        <p:spPr>
-          <a:xfrm>
-            <a:off x="2377440" y="3145536"/>
-            <a:ext cx="6858000" cy="292608"/>
-          </a:xfrm>
-          <a:prstGeom prst="rect">
-            <a:avLst/>
-          </a:prstGeom>
-          <a:solidFill>
-            <a:srgbClr val="5C1A33"/>
-          </a:solidFill>
-          <a:ln>
-            <a:noFill/>
-          </a:ln>
-          <a:effectLst/>
-        </p:spPr>
-        <p:style>
-          <a:lnRef idx="1">
-            <a:schemeClr val="accent1"/>
-          </a:lnRef>
-          <a:fillRef idx="3">
-            <a:schemeClr val="accent1"/>
-          </a:fillRef>
-          <a:effectRef idx="2">
-            <a:schemeClr val="accent1"/>
-          </a:effectRef>
-          <a:fontRef idx="minor">
-            <a:schemeClr val="lt1"/>
-          </a:fontRef>
-        </p:style>
-        <p:txBody>
-          <a:bodyPr rtlCol="0" anchor="ctr"/>
-          <a:lstStyle/>
-          <a:p>
-            <a:pPr algn="ctr"/>
-          </a:p>
-        </p:txBody>
-      </p:sp>
-      <p:sp>
-        <p:nvSpPr>
-          <p:cNvPr id="14" name="TextBox 13"/>
-          <p:cNvSpPr txBox="1"/>
-          <p:nvPr/>
-        </p:nvSpPr>
-        <p:spPr>
-          <a:xfrm>
-            <a:off x="9372600" y="3090672"/>
-            <a:ext cx="1463040" cy="365760"/>
-          </a:xfrm>
-          <a:prstGeom prst="rect">
-            <a:avLst/>
-          </a:prstGeom>
-          <a:noFill/>
-        </p:spPr>
-        <p:txBody>
-          <a:bodyPr wrap="square" anchor="ctr" lIns="50800" rIns="50800" tIns="25400" bIns="25400">
-            <a:spAutoFit/>
-          </a:bodyPr>
-          <a:lstStyle/>
-          <a:p>
-            <a:pPr algn="l"/>
-            <a:r>
-              <a:rPr sz="1100" b="0" i="0">
-                <a:solidFill>
-                  <a:srgbClr val="2B2B2B"/>
-                </a:solidFill>
-                <a:latin typeface="Calibri"/>
-              </a:rPr>
-              <a:t>100% → 100%</a:t>
-            </a:r>
-          </a:p>
-        </p:txBody>
-      </p:sp>
-      <p:sp>
-        <p:nvSpPr>
-          <p:cNvPr id="15" name="TextBox 14"/>
-          <p:cNvSpPr txBox="1"/>
-          <p:nvPr/>
-        </p:nvSpPr>
-        <p:spPr>
-          <a:xfrm>
-            <a:off x="640080" y="3529584"/>
-            <a:ext cx="1645920" cy="365760"/>
-          </a:xfrm>
-          <a:prstGeom prst="rect">
-            <a:avLst/>
-          </a:prstGeom>
-          <a:noFill/>
-        </p:spPr>
-        <p:txBody>
-          <a:bodyPr wrap="square" anchor="ctr" lIns="50800" rIns="50800" tIns="25400" bIns="25400">
-            <a:spAutoFit/>
-          </a:bodyPr>
-          <a:lstStyle/>
-          <a:p>
-            <a:pPr algn="l"/>
-            <a:r>
-              <a:rPr sz="1200" b="1" i="0">
-                <a:solidFill>
-                  <a:srgbClr val="2B2B2B"/>
-                </a:solidFill>
-                <a:latin typeface="Calibri"/>
-              </a:rPr>
-              <a:t>Adobe</a:t>
-            </a:r>
-          </a:p>
-        </p:txBody>
-      </p:sp>
-      <p:sp>
-        <p:nvSpPr>
-          <p:cNvPr id="16" name="Rectangle 15"/>
-          <p:cNvSpPr/>
-          <p:nvPr/>
-        </p:nvSpPr>
-        <p:spPr>
-          <a:xfrm>
-            <a:off x="2377440" y="3584448"/>
-            <a:ext cx="6789420" cy="292608"/>
-          </a:xfrm>
-          <a:prstGeom prst="rect">
-            <a:avLst/>
-          </a:prstGeom>
-          <a:solidFill>
-            <a:srgbClr val="5C1A33"/>
-          </a:solidFill>
-          <a:ln>
-            <a:noFill/>
-          </a:ln>
-          <a:effectLst/>
-        </p:spPr>
-        <p:style>
-          <a:lnRef idx="1">
-            <a:schemeClr val="accent1"/>
-          </a:lnRef>
-          <a:fillRef idx="3">
-            <a:schemeClr val="accent1"/>
-          </a:fillRef>
-          <a:effectRef idx="2">
-            <a:schemeClr val="accent1"/>
-          </a:effectRef>
-          <a:fontRef idx="minor">
-            <a:schemeClr val="lt1"/>
-          </a:fontRef>
-        </p:style>
-        <p:txBody>
-          <a:bodyPr rtlCol="0" anchor="ctr"/>
-          <a:lstStyle/>
-          <a:p>
-            <a:pPr algn="ctr"/>
-          </a:p>
-        </p:txBody>
-      </p:sp>
-      <p:sp>
-        <p:nvSpPr>
-          <p:cNvPr id="17" name="Rectangle 16"/>
-          <p:cNvSpPr/>
-          <p:nvPr/>
-        </p:nvSpPr>
-        <p:spPr>
-          <a:xfrm>
-            <a:off x="9166860" y="3584448"/>
-            <a:ext cx="68580" cy="292608"/>
-          </a:xfrm>
-          <a:prstGeom prst="rect">
-            <a:avLst/>
-          </a:prstGeom>
-          <a:solidFill>
-            <a:srgbClr val="B5657F"/>
-          </a:solidFill>
-          <a:ln>
-            <a:noFill/>
-          </a:ln>
-          <a:effectLst/>
-        </p:spPr>
-        <p:style>
-          <a:lnRef idx="1">
-            <a:schemeClr val="accent1"/>
-          </a:lnRef>
-          <a:fillRef idx="3">
-            <a:schemeClr val="accent1"/>
-          </a:fillRef>
-          <a:effectRef idx="2">
-            <a:schemeClr val="accent1"/>
-          </a:effectRef>
-          <a:fontRef idx="minor">
-            <a:schemeClr val="lt1"/>
-          </a:fontRef>
-        </p:style>
-        <p:txBody>
-          <a:bodyPr rtlCol="0" anchor="ctr"/>
-          <a:lstStyle/>
-          <a:p>
-            <a:pPr algn="ctr"/>
-          </a:p>
-        </p:txBody>
-      </p:sp>
-      <p:sp>
-        <p:nvSpPr>
-          <p:cNvPr id="18" name="TextBox 17"/>
-          <p:cNvSpPr txBox="1"/>
-          <p:nvPr/>
-        </p:nvSpPr>
-        <p:spPr>
-          <a:xfrm>
-            <a:off x="9372600" y="3529584"/>
-            <a:ext cx="1463040" cy="365760"/>
-          </a:xfrm>
-          <a:prstGeom prst="rect">
-            <a:avLst/>
-          </a:prstGeom>
-          <a:noFill/>
-        </p:spPr>
-        <p:txBody>
-          <a:bodyPr wrap="square" anchor="ctr" lIns="50800" rIns="50800" tIns="25400" bIns="25400">
-            <a:spAutoFit/>
-          </a:bodyPr>
-          <a:lstStyle/>
-          <a:p>
-            <a:pPr algn="l"/>
-            <a:r>
-              <a:rPr sz="1100" b="0" i="0">
-                <a:solidFill>
-                  <a:srgbClr val="2B2B2B"/>
-                </a:solidFill>
-                <a:latin typeface="Calibri"/>
-              </a:rPr>
-              <a:t>99% → 100%</a:t>
-            </a:r>
-          </a:p>
-        </p:txBody>
-      </p:sp>
-      <p:sp>
-        <p:nvSpPr>
-          <p:cNvPr id="19" name="TextBox 18"/>
-          <p:cNvSpPr txBox="1"/>
-          <p:nvPr/>
-        </p:nvSpPr>
-        <p:spPr>
-          <a:xfrm>
-            <a:off x="640080" y="3968496"/>
-            <a:ext cx="1645920" cy="365760"/>
-          </a:xfrm>
-          <a:prstGeom prst="rect">
-            <a:avLst/>
-          </a:prstGeom>
-          <a:noFill/>
-        </p:spPr>
-        <p:txBody>
-          <a:bodyPr wrap="square" anchor="ctr" lIns="50800" rIns="50800" tIns="25400" bIns="25400">
-            <a:spAutoFit/>
-          </a:bodyPr>
-          <a:lstStyle/>
-          <a:p>
-            <a:pPr algn="l"/>
-            <a:r>
-              <a:rPr sz="1200" b="1" i="0">
-                <a:solidFill>
-                  <a:srgbClr val="2B2B2B"/>
-                </a:solidFill>
-                <a:latin typeface="Calibri"/>
-              </a:rPr>
-              <a:t>VMware</a:t>
-            </a:r>
-          </a:p>
-        </p:txBody>
-      </p:sp>
-      <p:sp>
-        <p:nvSpPr>
-          <p:cNvPr id="20" name="Rectangle 19"/>
-          <p:cNvSpPr/>
-          <p:nvPr/>
-        </p:nvSpPr>
-        <p:spPr>
-          <a:xfrm>
-            <a:off x="2377440" y="4023360"/>
-            <a:ext cx="6858000" cy="292608"/>
-          </a:xfrm>
-          <a:prstGeom prst="rect">
-            <a:avLst/>
-          </a:prstGeom>
-          <a:solidFill>
-            <a:srgbClr val="5C1A33"/>
-          </a:solidFill>
-          <a:ln>
-            <a:noFill/>
-          </a:ln>
-          <a:effectLst/>
-        </p:spPr>
-        <p:style>
-          <a:lnRef idx="1">
-            <a:schemeClr val="accent1"/>
-          </a:lnRef>
-          <a:fillRef idx="3">
-            <a:schemeClr val="accent1"/>
-          </a:fillRef>
-          <a:effectRef idx="2">
-            <a:schemeClr val="accent1"/>
-          </a:effectRef>
-          <a:fontRef idx="minor">
-            <a:schemeClr val="lt1"/>
-          </a:fontRef>
-        </p:style>
-        <p:txBody>
-          <a:bodyPr rtlCol="0" anchor="ctr"/>
-          <a:lstStyle/>
-          <a:p>
-            <a:pPr algn="ctr"/>
-          </a:p>
-        </p:txBody>
-      </p:sp>
-      <p:sp>
-        <p:nvSpPr>
-          <p:cNvPr id="21" name="TextBox 20"/>
-          <p:cNvSpPr txBox="1"/>
-          <p:nvPr/>
-        </p:nvSpPr>
-        <p:spPr>
-          <a:xfrm>
-            <a:off x="9372600" y="3968496"/>
-            <a:ext cx="1463040" cy="365760"/>
-          </a:xfrm>
-          <a:prstGeom prst="rect">
-            <a:avLst/>
-          </a:prstGeom>
-          <a:noFill/>
-        </p:spPr>
-        <p:txBody>
-          <a:bodyPr wrap="square" anchor="ctr" lIns="50800" rIns="50800" tIns="25400" bIns="25400">
-            <a:spAutoFit/>
-          </a:bodyPr>
-          <a:lstStyle/>
-          <a:p>
-            <a:pPr algn="l"/>
-            <a:r>
-              <a:rPr sz="1100" b="0" i="0">
-                <a:solidFill>
-                  <a:srgbClr val="2B2B2B"/>
-                </a:solidFill>
-                <a:latin typeface="Calibri"/>
-              </a:rPr>
-              <a:t>100% → 100%</a:t>
-            </a:r>
-          </a:p>
-        </p:txBody>
-      </p:sp>
-      <p:sp>
-        <p:nvSpPr>
-          <p:cNvPr id="22" name="TextBox 21"/>
-          <p:cNvSpPr txBox="1"/>
-          <p:nvPr/>
-        </p:nvSpPr>
-        <p:spPr>
-          <a:xfrm>
-            <a:off x="640080" y="4407408"/>
-            <a:ext cx="1645920" cy="365760"/>
-          </a:xfrm>
-          <a:prstGeom prst="rect">
-            <a:avLst/>
-          </a:prstGeom>
-          <a:noFill/>
-        </p:spPr>
-        <p:txBody>
-          <a:bodyPr wrap="square" anchor="ctr" lIns="50800" rIns="50800" tIns="25400" bIns="25400">
-            <a:spAutoFit/>
-          </a:bodyPr>
-          <a:lstStyle/>
-          <a:p>
-            <a:pPr algn="l"/>
-            <a:r>
-              <a:rPr sz="1200" b="1" i="0">
-                <a:solidFill>
-                  <a:srgbClr val="2B2B2B"/>
-                </a:solidFill>
-                <a:latin typeface="Calibri"/>
-              </a:rPr>
-              <a:t>Spring</a:t>
-            </a:r>
-          </a:p>
-        </p:txBody>
-      </p:sp>
-      <p:sp>
-        <p:nvSpPr>
-          <p:cNvPr id="23" name="Rectangle 22"/>
-          <p:cNvSpPr/>
-          <p:nvPr/>
-        </p:nvSpPr>
-        <p:spPr>
-          <a:xfrm>
-            <a:off x="2377440" y="4462272"/>
-            <a:ext cx="5280660" cy="292608"/>
-          </a:xfrm>
-          <a:prstGeom prst="rect">
-            <a:avLst/>
-          </a:prstGeom>
-          <a:solidFill>
-            <a:srgbClr val="5C1A33"/>
-          </a:solidFill>
-          <a:ln>
-            <a:noFill/>
-          </a:ln>
-          <a:effectLst/>
-        </p:spPr>
-        <p:style>
-          <a:lnRef idx="1">
-            <a:schemeClr val="accent1"/>
-          </a:lnRef>
-          <a:fillRef idx="3">
-            <a:schemeClr val="accent1"/>
-          </a:fillRef>
-          <a:effectRef idx="2">
-            <a:schemeClr val="accent1"/>
-          </a:effectRef>
-          <a:fontRef idx="minor">
-            <a:schemeClr val="lt1"/>
-          </a:fontRef>
-        </p:style>
-        <p:txBody>
-          <a:bodyPr rtlCol="0" anchor="ctr"/>
-          <a:lstStyle/>
-          <a:p>
-            <a:pPr algn="ctr"/>
-          </a:p>
-        </p:txBody>
-      </p:sp>
-      <p:sp>
-        <p:nvSpPr>
-          <p:cNvPr id="24" name="Rectangle 23"/>
-          <p:cNvSpPr/>
-          <p:nvPr/>
-        </p:nvSpPr>
-        <p:spPr>
-          <a:xfrm>
-            <a:off x="7658100" y="4462272"/>
-            <a:ext cx="1577340" cy="292608"/>
-          </a:xfrm>
-          <a:prstGeom prst="rect">
-            <a:avLst/>
-          </a:prstGeom>
-          <a:solidFill>
-            <a:srgbClr val="B5657F"/>
-          </a:solidFill>
-          <a:ln>
-            <a:noFill/>
-          </a:ln>
-          <a:effectLst/>
-        </p:spPr>
-        <p:style>
-          <a:lnRef idx="1">
-            <a:schemeClr val="accent1"/>
-          </a:lnRef>
-          <a:fillRef idx="3">
-            <a:schemeClr val="accent1"/>
-          </a:fillRef>
-          <a:effectRef idx="2">
-            <a:schemeClr val="accent1"/>
-          </a:effectRef>
-          <a:fontRef idx="minor">
-            <a:schemeClr val="lt1"/>
-          </a:fontRef>
-        </p:style>
-        <p:txBody>
-          <a:bodyPr rtlCol="0" anchor="ctr"/>
-          <a:lstStyle/>
-          <a:p>
-            <a:pPr algn="ctr"/>
-          </a:p>
-        </p:txBody>
-      </p:sp>
-      <p:sp>
-        <p:nvSpPr>
-          <p:cNvPr id="25" name="TextBox 24"/>
-          <p:cNvSpPr txBox="1"/>
-          <p:nvPr/>
-        </p:nvSpPr>
-        <p:spPr>
-          <a:xfrm>
-            <a:off x="9372600" y="4407408"/>
-            <a:ext cx="1463040" cy="365760"/>
-          </a:xfrm>
-          <a:prstGeom prst="rect">
-            <a:avLst/>
-          </a:prstGeom>
-          <a:noFill/>
-        </p:spPr>
-        <p:txBody>
-          <a:bodyPr wrap="square" anchor="ctr" lIns="50800" rIns="50800" tIns="25400" bIns="25400">
-            <a:spAutoFit/>
-          </a:bodyPr>
-          <a:lstStyle/>
-          <a:p>
-            <a:pPr algn="l"/>
-            <a:r>
-              <a:rPr sz="1100" b="0" i="0">
-                <a:solidFill>
-                  <a:srgbClr val="2B2B2B"/>
-                </a:solidFill>
-                <a:latin typeface="Calibri"/>
-              </a:rPr>
-              <a:t>77% → 100%</a:t>
-            </a:r>
-          </a:p>
-        </p:txBody>
-      </p:sp>
-      <p:sp>
-        <p:nvSpPr>
-          <p:cNvPr id="26" name="TextBox 25"/>
-          <p:cNvSpPr txBox="1"/>
-          <p:nvPr/>
-        </p:nvSpPr>
-        <p:spPr>
-          <a:xfrm>
-            <a:off x="640080" y="4846320"/>
-            <a:ext cx="1645920" cy="365760"/>
-          </a:xfrm>
-          <a:prstGeom prst="rect">
-            <a:avLst/>
-          </a:prstGeom>
-          <a:noFill/>
-        </p:spPr>
-        <p:txBody>
-          <a:bodyPr wrap="square" anchor="ctr" lIns="50800" rIns="50800" tIns="25400" bIns="25400">
-            <a:spAutoFit/>
-          </a:bodyPr>
-          <a:lstStyle/>
-          <a:p>
-            <a:pPr algn="l"/>
-            <a:r>
-              <a:rPr sz="1200" b="1" i="0">
-                <a:solidFill>
-                  <a:srgbClr val="2B2B2B"/>
-                </a:solidFill>
-                <a:latin typeface="Calibri"/>
-              </a:rPr>
-              <a:t>Red Hat</a:t>
-            </a:r>
-          </a:p>
-        </p:txBody>
-      </p:sp>
-      <p:sp>
-        <p:nvSpPr>
-          <p:cNvPr id="27" name="Rectangle 26"/>
-          <p:cNvSpPr/>
-          <p:nvPr/>
-        </p:nvSpPr>
-        <p:spPr>
-          <a:xfrm>
-            <a:off x="2377440" y="4901184"/>
-            <a:ext cx="4183380" cy="292608"/>
-          </a:xfrm>
-          <a:prstGeom prst="rect">
-            <a:avLst/>
-          </a:prstGeom>
-          <a:solidFill>
-            <a:srgbClr val="5C1A33"/>
-          </a:solidFill>
-          <a:ln>
-            <a:noFill/>
-          </a:ln>
-          <a:effectLst/>
-        </p:spPr>
-        <p:style>
-          <a:lnRef idx="1">
-            <a:schemeClr val="accent1"/>
-          </a:lnRef>
-          <a:fillRef idx="3">
-            <a:schemeClr val="accent1"/>
-          </a:fillRef>
-          <a:effectRef idx="2">
-            <a:schemeClr val="accent1"/>
-          </a:effectRef>
-          <a:fontRef idx="minor">
-            <a:schemeClr val="lt1"/>
-          </a:fontRef>
-        </p:style>
-        <p:txBody>
-          <a:bodyPr rtlCol="0" anchor="ctr"/>
-          <a:lstStyle/>
-          <a:p>
-            <a:pPr algn="ctr"/>
-          </a:p>
-        </p:txBody>
-      </p:sp>
-      <p:sp>
-        <p:nvSpPr>
-          <p:cNvPr id="28" name="Rectangle 27"/>
-          <p:cNvSpPr/>
-          <p:nvPr/>
-        </p:nvSpPr>
-        <p:spPr>
-          <a:xfrm>
-            <a:off x="6560820" y="4901184"/>
-            <a:ext cx="2674620" cy="292608"/>
-          </a:xfrm>
-          <a:prstGeom prst="rect">
-            <a:avLst/>
-          </a:prstGeom>
-          <a:solidFill>
-            <a:srgbClr val="B5657F"/>
-          </a:solidFill>
-          <a:ln>
-            <a:noFill/>
-          </a:ln>
-          <a:effectLst/>
-        </p:spPr>
-        <p:style>
-          <a:lnRef idx="1">
-            <a:schemeClr val="accent1"/>
-          </a:lnRef>
-          <a:fillRef idx="3">
-            <a:schemeClr val="accent1"/>
-          </a:fillRef>
-          <a:effectRef idx="2">
-            <a:schemeClr val="accent1"/>
-          </a:effectRef>
-          <a:fontRef idx="minor">
-            <a:schemeClr val="lt1"/>
-          </a:fontRef>
-        </p:style>
-        <p:txBody>
-          <a:bodyPr rtlCol="0" anchor="ctr"/>
-          <a:lstStyle/>
-          <a:p>
-            <a:pPr algn="ctr"/>
+              <a:rPr sz="1400" b="0" i="0">
+                <a:solidFill>
+                  <a:srgbClr val="FFFFFF"/>
+                </a:solidFill>
+                <a:latin typeface="Calibri"/>
+              </a:rPr>
+              <a:t>Both are severe on CVSS — but the KEV-listed, EPSS-94th flaw is the one you patch tonight. A severity-only agent treats them as equal and burns responder time (alert fatigue → missed real threats).</a:t>
+            </a:r>
           </a:p>
         </p:txBody>
       </p:sp>
       <p:sp>
         <p:nvSpPr>
           <p:cNvPr id="29" name="TextBox 28"/>
-          <p:cNvSpPr txBox="1"/>
-          <p:nvPr/>
-        </p:nvSpPr>
-        <p:spPr>
-          <a:xfrm>
-            <a:off x="9372600" y="4846320"/>
-            <a:ext cx="1463040" cy="365760"/>
-          </a:xfrm>
-          <a:prstGeom prst="rect">
-            <a:avLst/>
-          </a:prstGeom>
-          <a:noFill/>
-        </p:spPr>
-        <p:txBody>
-          <a:bodyPr wrap="square" anchor="ctr" lIns="50800" rIns="50800" tIns="25400" bIns="25400">
-            <a:spAutoFit/>
-          </a:bodyPr>
-          <a:lstStyle/>
-          <a:p>
-            <a:pPr algn="l"/>
-            <a:r>
-              <a:rPr sz="1100" b="0" i="0">
-                <a:solidFill>
-                  <a:srgbClr val="2B2B2B"/>
-                </a:solidFill>
-                <a:latin typeface="Calibri"/>
-              </a:rPr>
-              <a:t>61% → 100%</a:t>
-            </a:r>
-          </a:p>
-        </p:txBody>
-      </p:sp>
-      <p:sp>
-        <p:nvSpPr>
-          <p:cNvPr id="30" name="TextBox 29"/>
-          <p:cNvSpPr txBox="1"/>
-          <p:nvPr/>
-        </p:nvSpPr>
-        <p:spPr>
-          <a:xfrm>
-            <a:off x="640080" y="5285232"/>
-            <a:ext cx="1645920" cy="365760"/>
-          </a:xfrm>
-          <a:prstGeom prst="rect">
-            <a:avLst/>
-          </a:prstGeom>
-          <a:noFill/>
-        </p:spPr>
-        <p:txBody>
-          <a:bodyPr wrap="square" anchor="ctr" lIns="50800" rIns="50800" tIns="25400" bIns="25400">
-            <a:spAutoFit/>
-          </a:bodyPr>
-          <a:lstStyle/>
-          <a:p>
-            <a:pPr algn="l"/>
-            <a:r>
-              <a:rPr sz="1200" b="1" i="0">
-                <a:solidFill>
-                  <a:srgbClr val="2B2B2B"/>
-                </a:solidFill>
-                <a:latin typeface="Calibri"/>
-              </a:rPr>
-              <a:t>Linux</a:t>
-            </a:r>
-          </a:p>
-        </p:txBody>
-      </p:sp>
-      <p:sp>
-        <p:nvSpPr>
-          <p:cNvPr id="31" name="Rectangle 30"/>
-          <p:cNvSpPr/>
-          <p:nvPr/>
-        </p:nvSpPr>
-        <p:spPr>
-          <a:xfrm>
-            <a:off x="2377440" y="5340096"/>
-            <a:ext cx="2331720" cy="292608"/>
-          </a:xfrm>
-          <a:prstGeom prst="rect">
-            <a:avLst/>
-          </a:prstGeom>
-          <a:solidFill>
-            <a:srgbClr val="5C1A33"/>
-          </a:solidFill>
-          <a:ln>
-            <a:noFill/>
-          </a:ln>
-          <a:effectLst/>
-        </p:spPr>
-        <p:style>
-          <a:lnRef idx="1">
-            <a:schemeClr val="accent1"/>
-          </a:lnRef>
-          <a:fillRef idx="3">
-            <a:schemeClr val="accent1"/>
-          </a:fillRef>
-          <a:effectRef idx="2">
-            <a:schemeClr val="accent1"/>
-          </a:effectRef>
-          <a:fontRef idx="minor">
-            <a:schemeClr val="lt1"/>
-          </a:fontRef>
-        </p:style>
-        <p:txBody>
-          <a:bodyPr rtlCol="0" anchor="ctr"/>
-          <a:lstStyle/>
-          <a:p>
-            <a:pPr algn="ctr"/>
-          </a:p>
-        </p:txBody>
-      </p:sp>
-      <p:sp>
-        <p:nvSpPr>
-          <p:cNvPr id="32" name="Rectangle 31"/>
-          <p:cNvSpPr/>
-          <p:nvPr/>
-        </p:nvSpPr>
-        <p:spPr>
-          <a:xfrm>
-            <a:off x="4709160" y="5340096"/>
-            <a:ext cx="4526280" cy="292608"/>
-          </a:xfrm>
-          <a:prstGeom prst="rect">
-            <a:avLst/>
-          </a:prstGeom>
-          <a:solidFill>
-            <a:srgbClr val="B5657F"/>
-          </a:solidFill>
-          <a:ln>
-            <a:noFill/>
-          </a:ln>
-          <a:effectLst/>
-        </p:spPr>
-        <p:style>
-          <a:lnRef idx="1">
-            <a:schemeClr val="accent1"/>
-          </a:lnRef>
-          <a:fillRef idx="3">
-            <a:schemeClr val="accent1"/>
-          </a:fillRef>
-          <a:effectRef idx="2">
-            <a:schemeClr val="accent1"/>
-          </a:effectRef>
-          <a:fontRef idx="minor">
-            <a:schemeClr val="lt1"/>
-          </a:fontRef>
-        </p:style>
-        <p:txBody>
-          <a:bodyPr rtlCol="0" anchor="ctr"/>
-          <a:lstStyle/>
-          <a:p>
-            <a:pPr algn="ctr"/>
-          </a:p>
-        </p:txBody>
-      </p:sp>
-      <p:sp>
-        <p:nvSpPr>
-          <p:cNvPr id="33" name="TextBox 32"/>
-          <p:cNvSpPr txBox="1"/>
-          <p:nvPr/>
-        </p:nvSpPr>
-        <p:spPr>
-          <a:xfrm>
-            <a:off x="9372600" y="5285232"/>
-            <a:ext cx="1463040" cy="365760"/>
-          </a:xfrm>
-          <a:prstGeom prst="rect">
-            <a:avLst/>
-          </a:prstGeom>
-          <a:noFill/>
-        </p:spPr>
-        <p:txBody>
-          <a:bodyPr wrap="square" anchor="ctr" lIns="50800" rIns="50800" tIns="25400" bIns="25400">
-            <a:spAutoFit/>
-          </a:bodyPr>
-          <a:lstStyle/>
-          <a:p>
-            <a:pPr algn="l"/>
-            <a:r>
-              <a:rPr sz="1100" b="0" i="0">
-                <a:solidFill>
-                  <a:srgbClr val="2B2B2B"/>
-                </a:solidFill>
-                <a:latin typeface="Calibri"/>
-              </a:rPr>
-              <a:t>34% → 100%</a:t>
-            </a:r>
-          </a:p>
-        </p:txBody>
-      </p:sp>
-      <p:sp>
-        <p:nvSpPr>
-          <p:cNvPr id="34" name="Rectangle 33"/>
-          <p:cNvSpPr/>
-          <p:nvPr/>
-        </p:nvSpPr>
-        <p:spPr>
-          <a:xfrm>
-            <a:off x="2377440" y="5806440"/>
-            <a:ext cx="274320" cy="182880"/>
-          </a:xfrm>
-          <a:prstGeom prst="rect">
-            <a:avLst/>
-          </a:prstGeom>
-          <a:solidFill>
-            <a:srgbClr val="5C1A33"/>
-          </a:solidFill>
-          <a:ln>
-            <a:noFill/>
-          </a:ln>
-          <a:effectLst/>
-        </p:spPr>
-        <p:style>
-          <a:lnRef idx="1">
-            <a:schemeClr val="accent1"/>
-          </a:lnRef>
-          <a:fillRef idx="3">
-            <a:schemeClr val="accent1"/>
-          </a:fillRef>
-          <a:effectRef idx="2">
-            <a:schemeClr val="accent1"/>
-          </a:effectRef>
-          <a:fontRef idx="minor">
-            <a:schemeClr val="lt1"/>
-          </a:fontRef>
-        </p:style>
-        <p:txBody>
-          <a:bodyPr rtlCol="0" anchor="ctr"/>
-          <a:lstStyle/>
-          <a:p>
-            <a:pPr algn="ctr"/>
-          </a:p>
-        </p:txBody>
-      </p:sp>
-      <p:sp>
-        <p:nvSpPr>
-          <p:cNvPr id="35" name="TextBox 34"/>
-          <p:cNvSpPr txBox="1"/>
-          <p:nvPr/>
-        </p:nvSpPr>
-        <p:spPr>
-          <a:xfrm>
-            <a:off x="2697480" y="5742432"/>
-            <a:ext cx="2743200" cy="274320"/>
-          </a:xfrm>
-          <a:prstGeom prst="rect">
-            <a:avLst/>
-          </a:prstGeom>
-          <a:noFill/>
-        </p:spPr>
-        <p:txBody>
-          <a:bodyPr wrap="square" anchor="t" lIns="50800" rIns="50800" tIns="25400" bIns="25400">
-            <a:spAutoFit/>
-          </a:bodyPr>
-          <a:lstStyle/>
-          <a:p>
-            <a:pPr algn="l"/>
-            <a:r>
-              <a:rPr sz="1100" b="0" i="0">
-                <a:solidFill>
-                  <a:srgbClr val="2B2B2B"/>
-                </a:solidFill>
-                <a:latin typeface="Calibri"/>
-              </a:rPr>
-              <a:t>CPE-only recall</a:t>
-            </a:r>
-          </a:p>
-        </p:txBody>
-      </p:sp>
-      <p:sp>
-        <p:nvSpPr>
-          <p:cNvPr id="36" name="Rectangle 35"/>
-          <p:cNvSpPr/>
-          <p:nvPr/>
-        </p:nvSpPr>
-        <p:spPr>
-          <a:xfrm>
-            <a:off x="4937760" y="5806440"/>
-            <a:ext cx="274320" cy="182880"/>
-          </a:xfrm>
-          <a:prstGeom prst="rect">
-            <a:avLst/>
-          </a:prstGeom>
-          <a:solidFill>
-            <a:srgbClr val="B5657F"/>
-          </a:solidFill>
-          <a:ln>
-            <a:noFill/>
-          </a:ln>
-          <a:effectLst/>
-        </p:spPr>
-        <p:style>
-          <a:lnRef idx="1">
-            <a:schemeClr val="accent1"/>
-          </a:lnRef>
-          <a:fillRef idx="3">
-            <a:schemeClr val="accent1"/>
-          </a:fillRef>
-          <a:effectRef idx="2">
-            <a:schemeClr val="accent1"/>
-          </a:effectRef>
-          <a:fontRef idx="minor">
-            <a:schemeClr val="lt1"/>
-          </a:fontRef>
-        </p:style>
-        <p:txBody>
-          <a:bodyPr rtlCol="0" anchor="ctr"/>
-          <a:lstStyle/>
-          <a:p>
-            <a:pPr algn="ctr"/>
-          </a:p>
-        </p:txBody>
-      </p:sp>
-      <p:sp>
-        <p:nvSpPr>
-          <p:cNvPr id="37" name="TextBox 36"/>
-          <p:cNvSpPr txBox="1"/>
-          <p:nvPr/>
-        </p:nvSpPr>
-        <p:spPr>
-          <a:xfrm>
-            <a:off x="5257800" y="5742432"/>
-            <a:ext cx="3657600" cy="274320"/>
-          </a:xfrm>
-          <a:prstGeom prst="rect">
-            <a:avLst/>
-          </a:prstGeom>
-          <a:noFill/>
-        </p:spPr>
-        <p:txBody>
-          <a:bodyPr wrap="square" anchor="t" lIns="50800" rIns="50800" tIns="25400" bIns="25400">
-            <a:spAutoFit/>
-          </a:bodyPr>
-          <a:lstStyle/>
-          <a:p>
-            <a:pPr algn="l"/>
-            <a:r>
-              <a:rPr sz="1100" b="0" i="0">
-                <a:solidFill>
-                  <a:srgbClr val="2B2B2B"/>
-                </a:solidFill>
-                <a:latin typeface="Calibri"/>
-              </a:rPr>
-              <a:t>recovered by affected[] fallback</a:t>
-            </a:r>
-          </a:p>
-        </p:txBody>
-      </p:sp>
-      <p:sp>
-        <p:nvSpPr>
-          <p:cNvPr id="38" name="TextBox 37"/>
           <p:cNvSpPr txBox="1"/>
           <p:nvPr/>
         </p:nvSpPr>
@@ -8012,7 +8180,7 @@
       </p:sp>
       <p:sp>
         <p:nvSpPr>
-          <p:cNvPr id="39" name="TextBox 38"/>
+          <p:cNvPr id="30" name="TextBox 29"/>
           <p:cNvSpPr txBox="1"/>
           <p:nvPr/>
         </p:nvSpPr>
@@ -8040,7 +8208,7 @@
                 </a:solidFill>
                 <a:latin typeface="Calibri"/>
               </a:rPr>
-              <a:t>5</a:t>
+              <a:t>4</a:t>
             </a:r>
           </a:p>
         </p:txBody>
@@ -8304,65 +8472,91 @@
                 </a:solidFill>
                 <a:latin typeface="Calibri"/>
               </a:rPr>
-              <a:t>Fairness Result: The Fallback Is an Equity Fix</a:t>
-            </a:r>
-          </a:p>
-        </p:txBody>
-      </p:sp>
-      <p:sp>
-        <p:nvSpPr>
-          <p:cNvPr id="8" name="Rectangle 7"/>
+              <a:t>Fairness Audit: Does Detection Depend on the Vendor?</a:t>
+            </a:r>
+          </a:p>
+        </p:txBody>
+      </p:sp>
+      <p:sp>
+        <p:nvSpPr>
+          <p:cNvPr id="8" name="TextBox 7"/>
+          <p:cNvSpPr txBox="1"/>
+          <p:nvPr/>
+        </p:nvSpPr>
+        <p:spPr>
+          <a:xfrm>
+            <a:off x="502920" y="1691640"/>
+            <a:ext cx="10149840" cy="777240"/>
+          </a:xfrm>
+          <a:prstGeom prst="rect">
+            <a:avLst/>
+          </a:prstGeom>
+          <a:noFill/>
+        </p:spPr>
+        <p:txBody>
+          <a:bodyPr wrap="square" anchor="t" lIns="50800" rIns="50800" tIns="25400" bIns="25400">
+            <a:spAutoFit/>
+          </a:bodyPr>
+          <a:lstStyle/>
+          <a:p>
+            <a:pPr algn="l"/>
+            <a:r>
+              <a:rPr sz="1400" b="0" i="0">
+                <a:solidFill>
+                  <a:srgbClr val="2B2B2B"/>
+                </a:solidFill>
+                <a:latin typeface="Calibri"/>
+              </a:rPr>
+              <a:t>Fairness metric = per-vendor recall (share of a vendor's CVEs the matcher can resolve). For a security tool, unfairness = a systematic false-negative blind spot for under-served vendors.</a:t>
+            </a:r>
+          </a:p>
+        </p:txBody>
+      </p:sp>
+      <p:sp>
+        <p:nvSpPr>
+          <p:cNvPr id="9" name="TextBox 8"/>
+          <p:cNvSpPr txBox="1"/>
+          <p:nvPr/>
+        </p:nvSpPr>
+        <p:spPr>
+          <a:xfrm>
+            <a:off x="640080" y="2651760"/>
+            <a:ext cx="1645920" cy="365760"/>
+          </a:xfrm>
+          <a:prstGeom prst="rect">
+            <a:avLst/>
+          </a:prstGeom>
+          <a:noFill/>
+        </p:spPr>
+        <p:txBody>
+          <a:bodyPr wrap="square" anchor="ctr" lIns="50800" rIns="50800" tIns="25400" bIns="25400">
+            <a:spAutoFit/>
+          </a:bodyPr>
+          <a:lstStyle/>
+          <a:p>
+            <a:pPr algn="l"/>
+            <a:r>
+              <a:rPr sz="1200" b="1" i="0">
+                <a:solidFill>
+                  <a:srgbClr val="2B2B2B"/>
+                </a:solidFill>
+                <a:latin typeface="Calibri"/>
+              </a:rPr>
+              <a:t>Google</a:t>
+            </a:r>
+          </a:p>
+        </p:txBody>
+      </p:sp>
+      <p:sp>
+        <p:nvSpPr>
+          <p:cNvPr id="10" name="Rectangle 9"/>
           <p:cNvSpPr/>
           <p:nvPr/>
         </p:nvSpPr>
         <p:spPr>
           <a:xfrm>
-            <a:off x="502920" y="1920240"/>
-            <a:ext cx="3291840" cy="2103120"/>
-          </a:xfrm>
-          <a:prstGeom prst="rect">
-            <a:avLst/>
-          </a:prstGeom>
-          <a:solidFill>
-            <a:srgbClr val="F2F2F2"/>
-          </a:solidFill>
-          <a:ln>
-            <a:noFill/>
-          </a:ln>
-          <a:effectLst/>
-        </p:spPr>
-        <p:style>
-          <a:lnRef idx="1">
-            <a:schemeClr val="accent1"/>
-          </a:lnRef>
-          <a:fillRef idx="3">
-            <a:schemeClr val="accent1"/>
-          </a:fillRef>
-          <a:effectRef idx="2">
-            <a:schemeClr val="accent1"/>
-          </a:effectRef>
-          <a:fontRef idx="minor">
-            <a:schemeClr val="lt1"/>
-          </a:fontRef>
-        </p:style>
-        <p:txBody>
-          <a:bodyPr rtlCol="0" anchor="ctr"/>
-          <a:lstStyle/>
-          <a:p>
-            <a:pPr algn="ctr"/>
-          </a:p>
-        </p:txBody>
-      </p:sp>
-      <p:sp>
-        <p:nvSpPr>
-          <p:cNvPr id="9" name="Rectangle 8"/>
-          <p:cNvSpPr/>
-          <p:nvPr/>
-        </p:nvSpPr>
-        <p:spPr>
-          <a:xfrm>
-            <a:off x="502920" y="1920240"/>
-            <a:ext cx="3291840" cy="109728"/>
+            <a:off x="2377440" y="2706624"/>
+            <a:ext cx="6858000" cy="292608"/>
           </a:xfrm>
           <a:prstGeom prst="rect">
             <a:avLst/>
@@ -8399,71 +8593,35 @@
       </p:sp>
       <p:sp>
         <p:nvSpPr>
-          <p:cNvPr id="10" name="TextBox 9"/>
-          <p:cNvSpPr txBox="1"/>
-          <p:nvPr/>
-        </p:nvSpPr>
-        <p:spPr>
-          <a:xfrm>
-            <a:off x="502920" y="2240280"/>
-            <a:ext cx="3291840" cy="822960"/>
-          </a:xfrm>
-          <a:prstGeom prst="rect">
-            <a:avLst/>
-          </a:prstGeom>
-          <a:noFill/>
-        </p:spPr>
-        <p:txBody>
-          <a:bodyPr wrap="square" anchor="t" lIns="50800" rIns="50800" tIns="25400" bIns="25400">
-            <a:spAutoFit/>
-          </a:bodyPr>
-          <a:lstStyle/>
-          <a:p>
-            <a:pPr algn="ctr"/>
-            <a:r>
-              <a:rPr sz="4000" b="1" i="0">
-                <a:solidFill>
-                  <a:srgbClr val="5C1A33"/>
-                </a:solidFill>
-                <a:latin typeface="Calibri"/>
-              </a:rPr>
-              <a:t>66.0 pp</a:t>
-            </a:r>
-          </a:p>
-        </p:txBody>
-      </p:sp>
-      <p:sp>
-        <p:nvSpPr>
           <p:cNvPr id="11" name="TextBox 10"/>
           <p:cNvSpPr txBox="1"/>
           <p:nvPr/>
         </p:nvSpPr>
         <p:spPr>
           <a:xfrm>
-            <a:off x="502920" y="3108960"/>
-            <a:ext cx="3291840" cy="640080"/>
-          </a:xfrm>
-          <a:prstGeom prst="rect">
-            <a:avLst/>
-          </a:prstGeom>
-          <a:noFill/>
-        </p:spPr>
-        <p:txBody>
-          <a:bodyPr wrap="square" anchor="t" lIns="50800" rIns="50800" tIns="25400" bIns="25400">
-            <a:spAutoFit/>
-          </a:bodyPr>
-          <a:lstStyle/>
-          <a:p>
-            <a:pPr algn="ctr"/>
-            <a:r>
-              <a:rPr sz="1300" b="0" i="0">
+            <a:off x="9372600" y="2651760"/>
+            <a:ext cx="1463040" cy="365760"/>
+          </a:xfrm>
+          <a:prstGeom prst="rect">
+            <a:avLst/>
+          </a:prstGeom>
+          <a:noFill/>
+        </p:spPr>
+        <p:txBody>
+          <a:bodyPr wrap="square" anchor="ctr" lIns="50800" rIns="50800" tIns="25400" bIns="25400">
+            <a:spAutoFit/>
+          </a:bodyPr>
+          <a:lstStyle/>
+          <a:p>
+            <a:pPr algn="l"/>
+            <a:r>
+              <a:rPr sz="1100" b="0" i="0">
                 <a:solidFill>
                   <a:srgbClr val="2B2B2B"/>
                 </a:solidFill>
                 <a:latin typeface="Calibri"/>
               </a:rPr>
-              <a:t>CPE-only recall spread
-across named vendors</a:t>
+              <a:t>100% → 100%</a:t>
             </a:r>
           </a:p>
         </p:txBody>
@@ -8476,29 +8634,29 @@
         </p:nvSpPr>
         <p:spPr>
           <a:xfrm>
-            <a:off x="502920" y="3703320"/>
-            <a:ext cx="3291840" cy="274320"/>
-          </a:xfrm>
-          <a:prstGeom prst="rect">
-            <a:avLst/>
-          </a:prstGeom>
-          <a:noFill/>
-        </p:spPr>
-        <p:txBody>
-          <a:bodyPr wrap="square" anchor="t" lIns="50800" rIns="50800" tIns="25400" bIns="25400">
-            <a:spAutoFit/>
-          </a:bodyPr>
-          <a:lstStyle/>
-          <a:p>
-            <a:pPr algn="ctr"/>
+            <a:off x="640080" y="3090672"/>
+            <a:ext cx="1645920" cy="365760"/>
+          </a:xfrm>
+          <a:prstGeom prst="rect">
+            <a:avLst/>
+          </a:prstGeom>
+          <a:noFill/>
+        </p:spPr>
+        <p:txBody>
+          <a:bodyPr wrap="square" anchor="ctr" lIns="50800" rIns="50800" tIns="25400" bIns="25400">
+            <a:spAutoFit/>
+          </a:bodyPr>
+          <a:lstStyle/>
+          <a:p>
+            <a:pPr algn="l"/>
             <a:r>
               <a:rPr sz="1200" b="1" i="0">
                 <a:solidFill>
-                  <a:srgbClr val="5C1A33"/>
-                </a:solidFill>
-                <a:latin typeface="Calibri"/>
-              </a:rPr>
-              <a:t>the bias</a:t>
+                  <a:srgbClr val="2B2B2B"/>
+                </a:solidFill>
+                <a:latin typeface="Calibri"/>
+              </a:rPr>
+              <a:t>Microsoft</a:t>
             </a:r>
           </a:p>
         </p:txBody>
@@ -8511,396 +8669,8 @@
         </p:nvSpPr>
         <p:spPr>
           <a:xfrm>
-            <a:off x="3931920" y="1920240"/>
-            <a:ext cx="3291840" cy="2103120"/>
-          </a:xfrm>
-          <a:prstGeom prst="rect">
-            <a:avLst/>
-          </a:prstGeom>
-          <a:solidFill>
-            <a:srgbClr val="F2F2F2"/>
-          </a:solidFill>
-          <a:ln>
-            <a:noFill/>
-          </a:ln>
-          <a:effectLst/>
-        </p:spPr>
-        <p:style>
-          <a:lnRef idx="1">
-            <a:schemeClr val="accent1"/>
-          </a:lnRef>
-          <a:fillRef idx="3">
-            <a:schemeClr val="accent1"/>
-          </a:fillRef>
-          <a:effectRef idx="2">
-            <a:schemeClr val="accent1"/>
-          </a:effectRef>
-          <a:fontRef idx="minor">
-            <a:schemeClr val="lt1"/>
-          </a:fontRef>
-        </p:style>
-        <p:txBody>
-          <a:bodyPr rtlCol="0" anchor="ctr"/>
-          <a:lstStyle/>
-          <a:p>
-            <a:pPr algn="ctr"/>
-          </a:p>
-        </p:txBody>
-      </p:sp>
-      <p:sp>
-        <p:nvSpPr>
-          <p:cNvPr id="14" name="Rectangle 13"/>
-          <p:cNvSpPr/>
-          <p:nvPr/>
-        </p:nvSpPr>
-        <p:spPr>
-          <a:xfrm>
-            <a:off x="3931920" y="1920240"/>
-            <a:ext cx="3291840" cy="109728"/>
-          </a:xfrm>
-          <a:prstGeom prst="rect">
-            <a:avLst/>
-          </a:prstGeom>
-          <a:solidFill>
-            <a:srgbClr val="2E7D32"/>
-          </a:solidFill>
-          <a:ln>
-            <a:noFill/>
-          </a:ln>
-          <a:effectLst/>
-        </p:spPr>
-        <p:style>
-          <a:lnRef idx="1">
-            <a:schemeClr val="accent1"/>
-          </a:lnRef>
-          <a:fillRef idx="3">
-            <a:schemeClr val="accent1"/>
-          </a:fillRef>
-          <a:effectRef idx="2">
-            <a:schemeClr val="accent1"/>
-          </a:effectRef>
-          <a:fontRef idx="minor">
-            <a:schemeClr val="lt1"/>
-          </a:fontRef>
-        </p:style>
-        <p:txBody>
-          <a:bodyPr rtlCol="0" anchor="ctr"/>
-          <a:lstStyle/>
-          <a:p>
-            <a:pPr algn="ctr"/>
-          </a:p>
-        </p:txBody>
-      </p:sp>
-      <p:sp>
-        <p:nvSpPr>
-          <p:cNvPr id="15" name="TextBox 14"/>
-          <p:cNvSpPr txBox="1"/>
-          <p:nvPr/>
-        </p:nvSpPr>
-        <p:spPr>
-          <a:xfrm>
-            <a:off x="3931920" y="2240280"/>
-            <a:ext cx="3291840" cy="822960"/>
-          </a:xfrm>
-          <a:prstGeom prst="rect">
-            <a:avLst/>
-          </a:prstGeom>
-          <a:noFill/>
-        </p:spPr>
-        <p:txBody>
-          <a:bodyPr wrap="square" anchor="t" lIns="50800" rIns="50800" tIns="25400" bIns="25400">
-            <a:spAutoFit/>
-          </a:bodyPr>
-          <a:lstStyle/>
-          <a:p>
-            <a:pPr algn="ctr"/>
-            <a:r>
-              <a:rPr sz="4000" b="1" i="0">
-                <a:solidFill>
-                  <a:srgbClr val="2E7D32"/>
-                </a:solidFill>
-                <a:latin typeface="Calibri"/>
-              </a:rPr>
-              <a:t>0.0 pp</a:t>
-            </a:r>
-          </a:p>
-        </p:txBody>
-      </p:sp>
-      <p:sp>
-        <p:nvSpPr>
-          <p:cNvPr id="16" name="TextBox 15"/>
-          <p:cNvSpPr txBox="1"/>
-          <p:nvPr/>
-        </p:nvSpPr>
-        <p:spPr>
-          <a:xfrm>
-            <a:off x="3931920" y="3108960"/>
-            <a:ext cx="3291840" cy="640080"/>
-          </a:xfrm>
-          <a:prstGeom prst="rect">
-            <a:avLst/>
-          </a:prstGeom>
-          <a:noFill/>
-        </p:spPr>
-        <p:txBody>
-          <a:bodyPr wrap="square" anchor="t" lIns="50800" rIns="50800" tIns="25400" bIns="25400">
-            <a:spAutoFit/>
-          </a:bodyPr>
-          <a:lstStyle/>
-          <a:p>
-            <a:pPr algn="ctr"/>
-            <a:r>
-              <a:rPr sz="1300" b="0" i="0">
-                <a:solidFill>
-                  <a:srgbClr val="2B2B2B"/>
-                </a:solidFill>
-                <a:latin typeface="Calibri"/>
-              </a:rPr>
-              <a:t>spread after adding the
-affected[] fallback</a:t>
-            </a:r>
-          </a:p>
-        </p:txBody>
-      </p:sp>
-      <p:sp>
-        <p:nvSpPr>
-          <p:cNvPr id="17" name="TextBox 16"/>
-          <p:cNvSpPr txBox="1"/>
-          <p:nvPr/>
-        </p:nvSpPr>
-        <p:spPr>
-          <a:xfrm>
-            <a:off x="3931920" y="3703320"/>
-            <a:ext cx="3291840" cy="274320"/>
-          </a:xfrm>
-          <a:prstGeom prst="rect">
-            <a:avLst/>
-          </a:prstGeom>
-          <a:noFill/>
-        </p:spPr>
-        <p:txBody>
-          <a:bodyPr wrap="square" anchor="t" lIns="50800" rIns="50800" tIns="25400" bIns="25400">
-            <a:spAutoFit/>
-          </a:bodyPr>
-          <a:lstStyle/>
-          <a:p>
-            <a:pPr algn="ctr"/>
-            <a:r>
-              <a:rPr sz="1200" b="1" i="0">
-                <a:solidFill>
-                  <a:srgbClr val="2E7D32"/>
-                </a:solidFill>
-                <a:latin typeface="Calibri"/>
-              </a:rPr>
-              <a:t>the fix</a:t>
-            </a:r>
-          </a:p>
-        </p:txBody>
-      </p:sp>
-      <p:sp>
-        <p:nvSpPr>
-          <p:cNvPr id="18" name="Rectangle 17"/>
-          <p:cNvSpPr/>
-          <p:nvPr/>
-        </p:nvSpPr>
-        <p:spPr>
-          <a:xfrm>
-            <a:off x="7360920" y="1920240"/>
-            <a:ext cx="3291840" cy="2103120"/>
-          </a:xfrm>
-          <a:prstGeom prst="rect">
-            <a:avLst/>
-          </a:prstGeom>
-          <a:solidFill>
-            <a:srgbClr val="F2F2F2"/>
-          </a:solidFill>
-          <a:ln>
-            <a:noFill/>
-          </a:ln>
-          <a:effectLst/>
-        </p:spPr>
-        <p:style>
-          <a:lnRef idx="1">
-            <a:schemeClr val="accent1"/>
-          </a:lnRef>
-          <a:fillRef idx="3">
-            <a:schemeClr val="accent1"/>
-          </a:fillRef>
-          <a:effectRef idx="2">
-            <a:schemeClr val="accent1"/>
-          </a:effectRef>
-          <a:fontRef idx="minor">
-            <a:schemeClr val="lt1"/>
-          </a:fontRef>
-        </p:style>
-        <p:txBody>
-          <a:bodyPr rtlCol="0" anchor="ctr"/>
-          <a:lstStyle/>
-          <a:p>
-            <a:pPr algn="ctr"/>
-          </a:p>
-        </p:txBody>
-      </p:sp>
-      <p:sp>
-        <p:nvSpPr>
-          <p:cNvPr id="19" name="Rectangle 18"/>
-          <p:cNvSpPr/>
-          <p:nvPr/>
-        </p:nvSpPr>
-        <p:spPr>
-          <a:xfrm>
-            <a:off x="7360920" y="1920240"/>
-            <a:ext cx="3291840" cy="109728"/>
-          </a:xfrm>
-          <a:prstGeom prst="rect">
-            <a:avLst/>
-          </a:prstGeom>
-          <a:solidFill>
-            <a:srgbClr val="9EADB5"/>
-          </a:solidFill>
-          <a:ln>
-            <a:noFill/>
-          </a:ln>
-          <a:effectLst/>
-        </p:spPr>
-        <p:style>
-          <a:lnRef idx="1">
-            <a:schemeClr val="accent1"/>
-          </a:lnRef>
-          <a:fillRef idx="3">
-            <a:schemeClr val="accent1"/>
-          </a:fillRef>
-          <a:effectRef idx="2">
-            <a:schemeClr val="accent1"/>
-          </a:effectRef>
-          <a:fontRef idx="minor">
-            <a:schemeClr val="lt1"/>
-          </a:fontRef>
-        </p:style>
-        <p:txBody>
-          <a:bodyPr rtlCol="0" anchor="ctr"/>
-          <a:lstStyle/>
-          <a:p>
-            <a:pPr algn="ctr"/>
-          </a:p>
-        </p:txBody>
-      </p:sp>
-      <p:sp>
-        <p:nvSpPr>
-          <p:cNvPr id="20" name="TextBox 19"/>
-          <p:cNvSpPr txBox="1"/>
-          <p:nvPr/>
-        </p:nvSpPr>
-        <p:spPr>
-          <a:xfrm>
-            <a:off x="7360920" y="2240280"/>
-            <a:ext cx="3291840" cy="822960"/>
-          </a:xfrm>
-          <a:prstGeom prst="rect">
-            <a:avLst/>
-          </a:prstGeom>
-          <a:noFill/>
-        </p:spPr>
-        <p:txBody>
-          <a:bodyPr wrap="square" anchor="t" lIns="50800" rIns="50800" tIns="25400" bIns="25400">
-            <a:spAutoFit/>
-          </a:bodyPr>
-          <a:lstStyle/>
-          <a:p>
-            <a:pPr algn="ctr"/>
-            <a:r>
-              <a:rPr sz="4000" b="1" i="0">
-                <a:solidFill>
-                  <a:srgbClr val="9EADB5"/>
-                </a:solidFill>
-                <a:latin typeface="Calibri"/>
-              </a:rPr>
-              <a:t>0.753</a:t>
-            </a:r>
-          </a:p>
-        </p:txBody>
-      </p:sp>
-      <p:sp>
-        <p:nvSpPr>
-          <p:cNvPr id="21" name="TextBox 20"/>
-          <p:cNvSpPr txBox="1"/>
-          <p:nvPr/>
-        </p:nvSpPr>
-        <p:spPr>
-          <a:xfrm>
-            <a:off x="7360920" y="3108960"/>
-            <a:ext cx="3291840" cy="640080"/>
-          </a:xfrm>
-          <a:prstGeom prst="rect">
-            <a:avLst/>
-          </a:prstGeom>
-          <a:noFill/>
-        </p:spPr>
-        <p:txBody>
-          <a:bodyPr wrap="square" anchor="t" lIns="50800" rIns="50800" tIns="25400" bIns="25400">
-            <a:spAutoFit/>
-          </a:bodyPr>
-          <a:lstStyle/>
-          <a:p>
-            <a:pPr algn="ctr"/>
-            <a:r>
-              <a:rPr sz="1300" b="0" i="0">
-                <a:solidFill>
-                  <a:srgbClr val="2B2B2B"/>
-                </a:solidFill>
-                <a:latin typeface="Calibri"/>
-              </a:rPr>
-              <a:t>vendor CVE-count Gini
-(391 vendors)</a:t>
-            </a:r>
-          </a:p>
-        </p:txBody>
-      </p:sp>
-      <p:sp>
-        <p:nvSpPr>
-          <p:cNvPr id="22" name="TextBox 21"/>
-          <p:cNvSpPr txBox="1"/>
-          <p:nvPr/>
-        </p:nvSpPr>
-        <p:spPr>
-          <a:xfrm>
-            <a:off x="7360920" y="3703320"/>
-            <a:ext cx="3291840" cy="274320"/>
-          </a:xfrm>
-          <a:prstGeom prst="rect">
-            <a:avLst/>
-          </a:prstGeom>
-          <a:noFill/>
-        </p:spPr>
-        <p:txBody>
-          <a:bodyPr wrap="square" anchor="t" lIns="50800" rIns="50800" tIns="25400" bIns="25400">
-            <a:spAutoFit/>
-          </a:bodyPr>
-          <a:lstStyle/>
-          <a:p>
-            <a:pPr algn="ctr"/>
-            <a:r>
-              <a:rPr sz="1200" b="1" i="0">
-                <a:solidFill>
-                  <a:srgbClr val="9EADB5"/>
-                </a:solidFill>
-                <a:latin typeface="Calibri"/>
-              </a:rPr>
-              <a:t>residual: data skew</a:t>
-            </a:r>
-          </a:p>
-        </p:txBody>
-      </p:sp>
-      <p:sp>
-        <p:nvSpPr>
-          <p:cNvPr id="23" name="Rectangle 22"/>
-          <p:cNvSpPr/>
-          <p:nvPr/>
-        </p:nvSpPr>
-        <p:spPr>
-          <a:xfrm>
-            <a:off x="502920" y="4297680"/>
-            <a:ext cx="10149840" cy="1554480"/>
+            <a:off x="2377440" y="3145536"/>
+            <a:ext cx="6858000" cy="292608"/>
           </a:xfrm>
           <a:prstGeom prst="rect">
             <a:avLst/>
@@ -8937,14 +8707,14 @@
       </p:sp>
       <p:sp>
         <p:nvSpPr>
-          <p:cNvPr id="24" name="TextBox 23"/>
-          <p:cNvSpPr txBox="1"/>
-          <p:nvPr/>
-        </p:nvSpPr>
-        <p:spPr>
-          <a:xfrm>
-            <a:off x="731520" y="4434840"/>
-            <a:ext cx="9692640" cy="1371600"/>
+          <p:cNvPr id="14" name="TextBox 13"/>
+          <p:cNvSpPr txBox="1"/>
+          <p:nvPr/>
+        </p:nvSpPr>
+        <p:spPr>
+          <a:xfrm>
+            <a:off x="9372600" y="3090672"/>
+            <a:ext cx="1463040" cy="365760"/>
           </a:xfrm>
           <a:prstGeom prst="rect">
             <a:avLst/>
@@ -8957,38 +8727,926 @@
           </a:bodyPr>
           <a:lstStyle/>
           <a:p>
-            <a:pPr algn="l">
-              <a:spcAft>
-                <a:spcPts val="800"/>
-              </a:spcAft>
-            </a:pPr>
-            <a:r>
-              <a:rPr sz="1500" b="1" i="0">
-                <a:solidFill>
-                  <a:srgbClr val="FFFFFF"/>
-                </a:solidFill>
-                <a:latin typeface="Calibri"/>
-              </a:rPr>
-              <a:t>Key insight: the Week 1 fallback was framed as a coverage patch. Measured as fairness, it collapses the per-vendor recall gap from 66 pp to ~0 — an equity fix.</a:t>
-            </a:r>
-          </a:p>
-          <a:p>
             <a:pPr algn="l"/>
             <a:r>
-              <a:rPr sz="1300" b="0" i="0">
-                <a:solidFill>
-                  <a:srgbClr val="9EADB5"/>
-                </a:solidFill>
-                <a:latin typeface="Calibri"/>
-              </a:rPr>
-              <a:t>Honest caveat: coverage is now fair, but data representation is not (Gini stays high, NVD content we can't change). And the fallback's per-vendor false-positive rate is not yet measured — the mitigation may not be free.</a:t>
-            </a:r>
+              <a:rPr sz="1100" b="0" i="0">
+                <a:solidFill>
+                  <a:srgbClr val="2B2B2B"/>
+                </a:solidFill>
+                <a:latin typeface="Calibri"/>
+              </a:rPr>
+              <a:t>100% → 100%</a:t>
+            </a:r>
+          </a:p>
+        </p:txBody>
+      </p:sp>
+      <p:sp>
+        <p:nvSpPr>
+          <p:cNvPr id="15" name="TextBox 14"/>
+          <p:cNvSpPr txBox="1"/>
+          <p:nvPr/>
+        </p:nvSpPr>
+        <p:spPr>
+          <a:xfrm>
+            <a:off x="640080" y="3529584"/>
+            <a:ext cx="1645920" cy="365760"/>
+          </a:xfrm>
+          <a:prstGeom prst="rect">
+            <a:avLst/>
+          </a:prstGeom>
+          <a:noFill/>
+        </p:spPr>
+        <p:txBody>
+          <a:bodyPr wrap="square" anchor="ctr" lIns="50800" rIns="50800" tIns="25400" bIns="25400">
+            <a:spAutoFit/>
+          </a:bodyPr>
+          <a:lstStyle/>
+          <a:p>
+            <a:pPr algn="l"/>
+            <a:r>
+              <a:rPr sz="1200" b="1" i="0">
+                <a:solidFill>
+                  <a:srgbClr val="2B2B2B"/>
+                </a:solidFill>
+                <a:latin typeface="Calibri"/>
+              </a:rPr>
+              <a:t>Adobe</a:t>
+            </a:r>
+          </a:p>
+        </p:txBody>
+      </p:sp>
+      <p:sp>
+        <p:nvSpPr>
+          <p:cNvPr id="16" name="Rectangle 15"/>
+          <p:cNvSpPr/>
+          <p:nvPr/>
+        </p:nvSpPr>
+        <p:spPr>
+          <a:xfrm>
+            <a:off x="2377440" y="3584448"/>
+            <a:ext cx="6789420" cy="292608"/>
+          </a:xfrm>
+          <a:prstGeom prst="rect">
+            <a:avLst/>
+          </a:prstGeom>
+          <a:solidFill>
+            <a:srgbClr val="5C1A33"/>
+          </a:solidFill>
+          <a:ln>
+            <a:noFill/>
+          </a:ln>
+          <a:effectLst/>
+        </p:spPr>
+        <p:style>
+          <a:lnRef idx="1">
+            <a:schemeClr val="accent1"/>
+          </a:lnRef>
+          <a:fillRef idx="3">
+            <a:schemeClr val="accent1"/>
+          </a:fillRef>
+          <a:effectRef idx="2">
+            <a:schemeClr val="accent1"/>
+          </a:effectRef>
+          <a:fontRef idx="minor">
+            <a:schemeClr val="lt1"/>
+          </a:fontRef>
+        </p:style>
+        <p:txBody>
+          <a:bodyPr rtlCol="0" anchor="ctr"/>
+          <a:lstStyle/>
+          <a:p>
+            <a:pPr algn="ctr"/>
+          </a:p>
+        </p:txBody>
+      </p:sp>
+      <p:sp>
+        <p:nvSpPr>
+          <p:cNvPr id="17" name="Rectangle 16"/>
+          <p:cNvSpPr/>
+          <p:nvPr/>
+        </p:nvSpPr>
+        <p:spPr>
+          <a:xfrm>
+            <a:off x="9166860" y="3584448"/>
+            <a:ext cx="68580" cy="292608"/>
+          </a:xfrm>
+          <a:prstGeom prst="rect">
+            <a:avLst/>
+          </a:prstGeom>
+          <a:solidFill>
+            <a:srgbClr val="B5657F"/>
+          </a:solidFill>
+          <a:ln>
+            <a:noFill/>
+          </a:ln>
+          <a:effectLst/>
+        </p:spPr>
+        <p:style>
+          <a:lnRef idx="1">
+            <a:schemeClr val="accent1"/>
+          </a:lnRef>
+          <a:fillRef idx="3">
+            <a:schemeClr val="accent1"/>
+          </a:fillRef>
+          <a:effectRef idx="2">
+            <a:schemeClr val="accent1"/>
+          </a:effectRef>
+          <a:fontRef idx="minor">
+            <a:schemeClr val="lt1"/>
+          </a:fontRef>
+        </p:style>
+        <p:txBody>
+          <a:bodyPr rtlCol="0" anchor="ctr"/>
+          <a:lstStyle/>
+          <a:p>
+            <a:pPr algn="ctr"/>
+          </a:p>
+        </p:txBody>
+      </p:sp>
+      <p:sp>
+        <p:nvSpPr>
+          <p:cNvPr id="18" name="TextBox 17"/>
+          <p:cNvSpPr txBox="1"/>
+          <p:nvPr/>
+        </p:nvSpPr>
+        <p:spPr>
+          <a:xfrm>
+            <a:off x="9372600" y="3529584"/>
+            <a:ext cx="1463040" cy="365760"/>
+          </a:xfrm>
+          <a:prstGeom prst="rect">
+            <a:avLst/>
+          </a:prstGeom>
+          <a:noFill/>
+        </p:spPr>
+        <p:txBody>
+          <a:bodyPr wrap="square" anchor="ctr" lIns="50800" rIns="50800" tIns="25400" bIns="25400">
+            <a:spAutoFit/>
+          </a:bodyPr>
+          <a:lstStyle/>
+          <a:p>
+            <a:pPr algn="l"/>
+            <a:r>
+              <a:rPr sz="1100" b="0" i="0">
+                <a:solidFill>
+                  <a:srgbClr val="2B2B2B"/>
+                </a:solidFill>
+                <a:latin typeface="Calibri"/>
+              </a:rPr>
+              <a:t>99% → 100%</a:t>
+            </a:r>
+          </a:p>
+        </p:txBody>
+      </p:sp>
+      <p:sp>
+        <p:nvSpPr>
+          <p:cNvPr id="19" name="TextBox 18"/>
+          <p:cNvSpPr txBox="1"/>
+          <p:nvPr/>
+        </p:nvSpPr>
+        <p:spPr>
+          <a:xfrm>
+            <a:off x="640080" y="3968496"/>
+            <a:ext cx="1645920" cy="365760"/>
+          </a:xfrm>
+          <a:prstGeom prst="rect">
+            <a:avLst/>
+          </a:prstGeom>
+          <a:noFill/>
+        </p:spPr>
+        <p:txBody>
+          <a:bodyPr wrap="square" anchor="ctr" lIns="50800" rIns="50800" tIns="25400" bIns="25400">
+            <a:spAutoFit/>
+          </a:bodyPr>
+          <a:lstStyle/>
+          <a:p>
+            <a:pPr algn="l"/>
+            <a:r>
+              <a:rPr sz="1200" b="1" i="0">
+                <a:solidFill>
+                  <a:srgbClr val="2B2B2B"/>
+                </a:solidFill>
+                <a:latin typeface="Calibri"/>
+              </a:rPr>
+              <a:t>VMware</a:t>
+            </a:r>
+          </a:p>
+        </p:txBody>
+      </p:sp>
+      <p:sp>
+        <p:nvSpPr>
+          <p:cNvPr id="20" name="Rectangle 19"/>
+          <p:cNvSpPr/>
+          <p:nvPr/>
+        </p:nvSpPr>
+        <p:spPr>
+          <a:xfrm>
+            <a:off x="2377440" y="4023360"/>
+            <a:ext cx="6858000" cy="292608"/>
+          </a:xfrm>
+          <a:prstGeom prst="rect">
+            <a:avLst/>
+          </a:prstGeom>
+          <a:solidFill>
+            <a:srgbClr val="5C1A33"/>
+          </a:solidFill>
+          <a:ln>
+            <a:noFill/>
+          </a:ln>
+          <a:effectLst/>
+        </p:spPr>
+        <p:style>
+          <a:lnRef idx="1">
+            <a:schemeClr val="accent1"/>
+          </a:lnRef>
+          <a:fillRef idx="3">
+            <a:schemeClr val="accent1"/>
+          </a:fillRef>
+          <a:effectRef idx="2">
+            <a:schemeClr val="accent1"/>
+          </a:effectRef>
+          <a:fontRef idx="minor">
+            <a:schemeClr val="lt1"/>
+          </a:fontRef>
+        </p:style>
+        <p:txBody>
+          <a:bodyPr rtlCol="0" anchor="ctr"/>
+          <a:lstStyle/>
+          <a:p>
+            <a:pPr algn="ctr"/>
+          </a:p>
+        </p:txBody>
+      </p:sp>
+      <p:sp>
+        <p:nvSpPr>
+          <p:cNvPr id="21" name="TextBox 20"/>
+          <p:cNvSpPr txBox="1"/>
+          <p:nvPr/>
+        </p:nvSpPr>
+        <p:spPr>
+          <a:xfrm>
+            <a:off x="9372600" y="3968496"/>
+            <a:ext cx="1463040" cy="365760"/>
+          </a:xfrm>
+          <a:prstGeom prst="rect">
+            <a:avLst/>
+          </a:prstGeom>
+          <a:noFill/>
+        </p:spPr>
+        <p:txBody>
+          <a:bodyPr wrap="square" anchor="ctr" lIns="50800" rIns="50800" tIns="25400" bIns="25400">
+            <a:spAutoFit/>
+          </a:bodyPr>
+          <a:lstStyle/>
+          <a:p>
+            <a:pPr algn="l"/>
+            <a:r>
+              <a:rPr sz="1100" b="0" i="0">
+                <a:solidFill>
+                  <a:srgbClr val="2B2B2B"/>
+                </a:solidFill>
+                <a:latin typeface="Calibri"/>
+              </a:rPr>
+              <a:t>100% → 100%</a:t>
+            </a:r>
+          </a:p>
+        </p:txBody>
+      </p:sp>
+      <p:sp>
+        <p:nvSpPr>
+          <p:cNvPr id="22" name="TextBox 21"/>
+          <p:cNvSpPr txBox="1"/>
+          <p:nvPr/>
+        </p:nvSpPr>
+        <p:spPr>
+          <a:xfrm>
+            <a:off x="640080" y="4407408"/>
+            <a:ext cx="1645920" cy="365760"/>
+          </a:xfrm>
+          <a:prstGeom prst="rect">
+            <a:avLst/>
+          </a:prstGeom>
+          <a:noFill/>
+        </p:spPr>
+        <p:txBody>
+          <a:bodyPr wrap="square" anchor="ctr" lIns="50800" rIns="50800" tIns="25400" bIns="25400">
+            <a:spAutoFit/>
+          </a:bodyPr>
+          <a:lstStyle/>
+          <a:p>
+            <a:pPr algn="l"/>
+            <a:r>
+              <a:rPr sz="1200" b="1" i="0">
+                <a:solidFill>
+                  <a:srgbClr val="2B2B2B"/>
+                </a:solidFill>
+                <a:latin typeface="Calibri"/>
+              </a:rPr>
+              <a:t>Spring</a:t>
+            </a:r>
+          </a:p>
+        </p:txBody>
+      </p:sp>
+      <p:sp>
+        <p:nvSpPr>
+          <p:cNvPr id="23" name="Rectangle 22"/>
+          <p:cNvSpPr/>
+          <p:nvPr/>
+        </p:nvSpPr>
+        <p:spPr>
+          <a:xfrm>
+            <a:off x="2377440" y="4462272"/>
+            <a:ext cx="5280660" cy="292608"/>
+          </a:xfrm>
+          <a:prstGeom prst="rect">
+            <a:avLst/>
+          </a:prstGeom>
+          <a:solidFill>
+            <a:srgbClr val="5C1A33"/>
+          </a:solidFill>
+          <a:ln>
+            <a:noFill/>
+          </a:ln>
+          <a:effectLst/>
+        </p:spPr>
+        <p:style>
+          <a:lnRef idx="1">
+            <a:schemeClr val="accent1"/>
+          </a:lnRef>
+          <a:fillRef idx="3">
+            <a:schemeClr val="accent1"/>
+          </a:fillRef>
+          <a:effectRef idx="2">
+            <a:schemeClr val="accent1"/>
+          </a:effectRef>
+          <a:fontRef idx="minor">
+            <a:schemeClr val="lt1"/>
+          </a:fontRef>
+        </p:style>
+        <p:txBody>
+          <a:bodyPr rtlCol="0" anchor="ctr"/>
+          <a:lstStyle/>
+          <a:p>
+            <a:pPr algn="ctr"/>
+          </a:p>
+        </p:txBody>
+      </p:sp>
+      <p:sp>
+        <p:nvSpPr>
+          <p:cNvPr id="24" name="Rectangle 23"/>
+          <p:cNvSpPr/>
+          <p:nvPr/>
+        </p:nvSpPr>
+        <p:spPr>
+          <a:xfrm>
+            <a:off x="7658100" y="4462272"/>
+            <a:ext cx="1577340" cy="292608"/>
+          </a:xfrm>
+          <a:prstGeom prst="rect">
+            <a:avLst/>
+          </a:prstGeom>
+          <a:solidFill>
+            <a:srgbClr val="B5657F"/>
+          </a:solidFill>
+          <a:ln>
+            <a:noFill/>
+          </a:ln>
+          <a:effectLst/>
+        </p:spPr>
+        <p:style>
+          <a:lnRef idx="1">
+            <a:schemeClr val="accent1"/>
+          </a:lnRef>
+          <a:fillRef idx="3">
+            <a:schemeClr val="accent1"/>
+          </a:fillRef>
+          <a:effectRef idx="2">
+            <a:schemeClr val="accent1"/>
+          </a:effectRef>
+          <a:fontRef idx="minor">
+            <a:schemeClr val="lt1"/>
+          </a:fontRef>
+        </p:style>
+        <p:txBody>
+          <a:bodyPr rtlCol="0" anchor="ctr"/>
+          <a:lstStyle/>
+          <a:p>
+            <a:pPr algn="ctr"/>
           </a:p>
         </p:txBody>
       </p:sp>
       <p:sp>
         <p:nvSpPr>
           <p:cNvPr id="25" name="TextBox 24"/>
+          <p:cNvSpPr txBox="1"/>
+          <p:nvPr/>
+        </p:nvSpPr>
+        <p:spPr>
+          <a:xfrm>
+            <a:off x="9372600" y="4407408"/>
+            <a:ext cx="1463040" cy="365760"/>
+          </a:xfrm>
+          <a:prstGeom prst="rect">
+            <a:avLst/>
+          </a:prstGeom>
+          <a:noFill/>
+        </p:spPr>
+        <p:txBody>
+          <a:bodyPr wrap="square" anchor="ctr" lIns="50800" rIns="50800" tIns="25400" bIns="25400">
+            <a:spAutoFit/>
+          </a:bodyPr>
+          <a:lstStyle/>
+          <a:p>
+            <a:pPr algn="l"/>
+            <a:r>
+              <a:rPr sz="1100" b="0" i="0">
+                <a:solidFill>
+                  <a:srgbClr val="2B2B2B"/>
+                </a:solidFill>
+                <a:latin typeface="Calibri"/>
+              </a:rPr>
+              <a:t>77% → 100%</a:t>
+            </a:r>
+          </a:p>
+        </p:txBody>
+      </p:sp>
+      <p:sp>
+        <p:nvSpPr>
+          <p:cNvPr id="26" name="TextBox 25"/>
+          <p:cNvSpPr txBox="1"/>
+          <p:nvPr/>
+        </p:nvSpPr>
+        <p:spPr>
+          <a:xfrm>
+            <a:off x="640080" y="4846320"/>
+            <a:ext cx="1645920" cy="365760"/>
+          </a:xfrm>
+          <a:prstGeom prst="rect">
+            <a:avLst/>
+          </a:prstGeom>
+          <a:noFill/>
+        </p:spPr>
+        <p:txBody>
+          <a:bodyPr wrap="square" anchor="ctr" lIns="50800" rIns="50800" tIns="25400" bIns="25400">
+            <a:spAutoFit/>
+          </a:bodyPr>
+          <a:lstStyle/>
+          <a:p>
+            <a:pPr algn="l"/>
+            <a:r>
+              <a:rPr sz="1200" b="1" i="0">
+                <a:solidFill>
+                  <a:srgbClr val="2B2B2B"/>
+                </a:solidFill>
+                <a:latin typeface="Calibri"/>
+              </a:rPr>
+              <a:t>Red Hat</a:t>
+            </a:r>
+          </a:p>
+        </p:txBody>
+      </p:sp>
+      <p:sp>
+        <p:nvSpPr>
+          <p:cNvPr id="27" name="Rectangle 26"/>
+          <p:cNvSpPr/>
+          <p:nvPr/>
+        </p:nvSpPr>
+        <p:spPr>
+          <a:xfrm>
+            <a:off x="2377440" y="4901184"/>
+            <a:ext cx="4183380" cy="292608"/>
+          </a:xfrm>
+          <a:prstGeom prst="rect">
+            <a:avLst/>
+          </a:prstGeom>
+          <a:solidFill>
+            <a:srgbClr val="5C1A33"/>
+          </a:solidFill>
+          <a:ln>
+            <a:noFill/>
+          </a:ln>
+          <a:effectLst/>
+        </p:spPr>
+        <p:style>
+          <a:lnRef idx="1">
+            <a:schemeClr val="accent1"/>
+          </a:lnRef>
+          <a:fillRef idx="3">
+            <a:schemeClr val="accent1"/>
+          </a:fillRef>
+          <a:effectRef idx="2">
+            <a:schemeClr val="accent1"/>
+          </a:effectRef>
+          <a:fontRef idx="minor">
+            <a:schemeClr val="lt1"/>
+          </a:fontRef>
+        </p:style>
+        <p:txBody>
+          <a:bodyPr rtlCol="0" anchor="ctr"/>
+          <a:lstStyle/>
+          <a:p>
+            <a:pPr algn="ctr"/>
+          </a:p>
+        </p:txBody>
+      </p:sp>
+      <p:sp>
+        <p:nvSpPr>
+          <p:cNvPr id="28" name="Rectangle 27"/>
+          <p:cNvSpPr/>
+          <p:nvPr/>
+        </p:nvSpPr>
+        <p:spPr>
+          <a:xfrm>
+            <a:off x="6560820" y="4901184"/>
+            <a:ext cx="2674620" cy="292608"/>
+          </a:xfrm>
+          <a:prstGeom prst="rect">
+            <a:avLst/>
+          </a:prstGeom>
+          <a:solidFill>
+            <a:srgbClr val="B5657F"/>
+          </a:solidFill>
+          <a:ln>
+            <a:noFill/>
+          </a:ln>
+          <a:effectLst/>
+        </p:spPr>
+        <p:style>
+          <a:lnRef idx="1">
+            <a:schemeClr val="accent1"/>
+          </a:lnRef>
+          <a:fillRef idx="3">
+            <a:schemeClr val="accent1"/>
+          </a:fillRef>
+          <a:effectRef idx="2">
+            <a:schemeClr val="accent1"/>
+          </a:effectRef>
+          <a:fontRef idx="minor">
+            <a:schemeClr val="lt1"/>
+          </a:fontRef>
+        </p:style>
+        <p:txBody>
+          <a:bodyPr rtlCol="0" anchor="ctr"/>
+          <a:lstStyle/>
+          <a:p>
+            <a:pPr algn="ctr"/>
+          </a:p>
+        </p:txBody>
+      </p:sp>
+      <p:sp>
+        <p:nvSpPr>
+          <p:cNvPr id="29" name="TextBox 28"/>
+          <p:cNvSpPr txBox="1"/>
+          <p:nvPr/>
+        </p:nvSpPr>
+        <p:spPr>
+          <a:xfrm>
+            <a:off x="9372600" y="4846320"/>
+            <a:ext cx="1463040" cy="365760"/>
+          </a:xfrm>
+          <a:prstGeom prst="rect">
+            <a:avLst/>
+          </a:prstGeom>
+          <a:noFill/>
+        </p:spPr>
+        <p:txBody>
+          <a:bodyPr wrap="square" anchor="ctr" lIns="50800" rIns="50800" tIns="25400" bIns="25400">
+            <a:spAutoFit/>
+          </a:bodyPr>
+          <a:lstStyle/>
+          <a:p>
+            <a:pPr algn="l"/>
+            <a:r>
+              <a:rPr sz="1100" b="0" i="0">
+                <a:solidFill>
+                  <a:srgbClr val="2B2B2B"/>
+                </a:solidFill>
+                <a:latin typeface="Calibri"/>
+              </a:rPr>
+              <a:t>61% → 100%</a:t>
+            </a:r>
+          </a:p>
+        </p:txBody>
+      </p:sp>
+      <p:sp>
+        <p:nvSpPr>
+          <p:cNvPr id="30" name="TextBox 29"/>
+          <p:cNvSpPr txBox="1"/>
+          <p:nvPr/>
+        </p:nvSpPr>
+        <p:spPr>
+          <a:xfrm>
+            <a:off x="640080" y="5285232"/>
+            <a:ext cx="1645920" cy="365760"/>
+          </a:xfrm>
+          <a:prstGeom prst="rect">
+            <a:avLst/>
+          </a:prstGeom>
+          <a:noFill/>
+        </p:spPr>
+        <p:txBody>
+          <a:bodyPr wrap="square" anchor="ctr" lIns="50800" rIns="50800" tIns="25400" bIns="25400">
+            <a:spAutoFit/>
+          </a:bodyPr>
+          <a:lstStyle/>
+          <a:p>
+            <a:pPr algn="l"/>
+            <a:r>
+              <a:rPr sz="1200" b="1" i="0">
+                <a:solidFill>
+                  <a:srgbClr val="2B2B2B"/>
+                </a:solidFill>
+                <a:latin typeface="Calibri"/>
+              </a:rPr>
+              <a:t>Linux</a:t>
+            </a:r>
+          </a:p>
+        </p:txBody>
+      </p:sp>
+      <p:sp>
+        <p:nvSpPr>
+          <p:cNvPr id="31" name="Rectangle 30"/>
+          <p:cNvSpPr/>
+          <p:nvPr/>
+        </p:nvSpPr>
+        <p:spPr>
+          <a:xfrm>
+            <a:off x="2377440" y="5340096"/>
+            <a:ext cx="2331720" cy="292608"/>
+          </a:xfrm>
+          <a:prstGeom prst="rect">
+            <a:avLst/>
+          </a:prstGeom>
+          <a:solidFill>
+            <a:srgbClr val="5C1A33"/>
+          </a:solidFill>
+          <a:ln>
+            <a:noFill/>
+          </a:ln>
+          <a:effectLst/>
+        </p:spPr>
+        <p:style>
+          <a:lnRef idx="1">
+            <a:schemeClr val="accent1"/>
+          </a:lnRef>
+          <a:fillRef idx="3">
+            <a:schemeClr val="accent1"/>
+          </a:fillRef>
+          <a:effectRef idx="2">
+            <a:schemeClr val="accent1"/>
+          </a:effectRef>
+          <a:fontRef idx="minor">
+            <a:schemeClr val="lt1"/>
+          </a:fontRef>
+        </p:style>
+        <p:txBody>
+          <a:bodyPr rtlCol="0" anchor="ctr"/>
+          <a:lstStyle/>
+          <a:p>
+            <a:pPr algn="ctr"/>
+          </a:p>
+        </p:txBody>
+      </p:sp>
+      <p:sp>
+        <p:nvSpPr>
+          <p:cNvPr id="32" name="Rectangle 31"/>
+          <p:cNvSpPr/>
+          <p:nvPr/>
+        </p:nvSpPr>
+        <p:spPr>
+          <a:xfrm>
+            <a:off x="4709160" y="5340096"/>
+            <a:ext cx="4526280" cy="292608"/>
+          </a:xfrm>
+          <a:prstGeom prst="rect">
+            <a:avLst/>
+          </a:prstGeom>
+          <a:solidFill>
+            <a:srgbClr val="B5657F"/>
+          </a:solidFill>
+          <a:ln>
+            <a:noFill/>
+          </a:ln>
+          <a:effectLst/>
+        </p:spPr>
+        <p:style>
+          <a:lnRef idx="1">
+            <a:schemeClr val="accent1"/>
+          </a:lnRef>
+          <a:fillRef idx="3">
+            <a:schemeClr val="accent1"/>
+          </a:fillRef>
+          <a:effectRef idx="2">
+            <a:schemeClr val="accent1"/>
+          </a:effectRef>
+          <a:fontRef idx="minor">
+            <a:schemeClr val="lt1"/>
+          </a:fontRef>
+        </p:style>
+        <p:txBody>
+          <a:bodyPr rtlCol="0" anchor="ctr"/>
+          <a:lstStyle/>
+          <a:p>
+            <a:pPr algn="ctr"/>
+          </a:p>
+        </p:txBody>
+      </p:sp>
+      <p:sp>
+        <p:nvSpPr>
+          <p:cNvPr id="33" name="TextBox 32"/>
+          <p:cNvSpPr txBox="1"/>
+          <p:nvPr/>
+        </p:nvSpPr>
+        <p:spPr>
+          <a:xfrm>
+            <a:off x="9372600" y="5285232"/>
+            <a:ext cx="1463040" cy="365760"/>
+          </a:xfrm>
+          <a:prstGeom prst="rect">
+            <a:avLst/>
+          </a:prstGeom>
+          <a:noFill/>
+        </p:spPr>
+        <p:txBody>
+          <a:bodyPr wrap="square" anchor="ctr" lIns="50800" rIns="50800" tIns="25400" bIns="25400">
+            <a:spAutoFit/>
+          </a:bodyPr>
+          <a:lstStyle/>
+          <a:p>
+            <a:pPr algn="l"/>
+            <a:r>
+              <a:rPr sz="1100" b="0" i="0">
+                <a:solidFill>
+                  <a:srgbClr val="2B2B2B"/>
+                </a:solidFill>
+                <a:latin typeface="Calibri"/>
+              </a:rPr>
+              <a:t>34% → 100%</a:t>
+            </a:r>
+          </a:p>
+        </p:txBody>
+      </p:sp>
+      <p:sp>
+        <p:nvSpPr>
+          <p:cNvPr id="34" name="Rectangle 33"/>
+          <p:cNvSpPr/>
+          <p:nvPr/>
+        </p:nvSpPr>
+        <p:spPr>
+          <a:xfrm>
+            <a:off x="2377440" y="5806440"/>
+            <a:ext cx="274320" cy="182880"/>
+          </a:xfrm>
+          <a:prstGeom prst="rect">
+            <a:avLst/>
+          </a:prstGeom>
+          <a:solidFill>
+            <a:srgbClr val="5C1A33"/>
+          </a:solidFill>
+          <a:ln>
+            <a:noFill/>
+          </a:ln>
+          <a:effectLst/>
+        </p:spPr>
+        <p:style>
+          <a:lnRef idx="1">
+            <a:schemeClr val="accent1"/>
+          </a:lnRef>
+          <a:fillRef idx="3">
+            <a:schemeClr val="accent1"/>
+          </a:fillRef>
+          <a:effectRef idx="2">
+            <a:schemeClr val="accent1"/>
+          </a:effectRef>
+          <a:fontRef idx="minor">
+            <a:schemeClr val="lt1"/>
+          </a:fontRef>
+        </p:style>
+        <p:txBody>
+          <a:bodyPr rtlCol="0" anchor="ctr"/>
+          <a:lstStyle/>
+          <a:p>
+            <a:pPr algn="ctr"/>
+          </a:p>
+        </p:txBody>
+      </p:sp>
+      <p:sp>
+        <p:nvSpPr>
+          <p:cNvPr id="35" name="TextBox 34"/>
+          <p:cNvSpPr txBox="1"/>
+          <p:nvPr/>
+        </p:nvSpPr>
+        <p:spPr>
+          <a:xfrm>
+            <a:off x="2697480" y="5742432"/>
+            <a:ext cx="2743200" cy="274320"/>
+          </a:xfrm>
+          <a:prstGeom prst="rect">
+            <a:avLst/>
+          </a:prstGeom>
+          <a:noFill/>
+        </p:spPr>
+        <p:txBody>
+          <a:bodyPr wrap="square" anchor="t" lIns="50800" rIns="50800" tIns="25400" bIns="25400">
+            <a:spAutoFit/>
+          </a:bodyPr>
+          <a:lstStyle/>
+          <a:p>
+            <a:pPr algn="l"/>
+            <a:r>
+              <a:rPr sz="1100" b="0" i="0">
+                <a:solidFill>
+                  <a:srgbClr val="2B2B2B"/>
+                </a:solidFill>
+                <a:latin typeface="Calibri"/>
+              </a:rPr>
+              <a:t>CPE-only recall</a:t>
+            </a:r>
+          </a:p>
+        </p:txBody>
+      </p:sp>
+      <p:sp>
+        <p:nvSpPr>
+          <p:cNvPr id="36" name="Rectangle 35"/>
+          <p:cNvSpPr/>
+          <p:nvPr/>
+        </p:nvSpPr>
+        <p:spPr>
+          <a:xfrm>
+            <a:off x="4937760" y="5806440"/>
+            <a:ext cx="274320" cy="182880"/>
+          </a:xfrm>
+          <a:prstGeom prst="rect">
+            <a:avLst/>
+          </a:prstGeom>
+          <a:solidFill>
+            <a:srgbClr val="B5657F"/>
+          </a:solidFill>
+          <a:ln>
+            <a:noFill/>
+          </a:ln>
+          <a:effectLst/>
+        </p:spPr>
+        <p:style>
+          <a:lnRef idx="1">
+            <a:schemeClr val="accent1"/>
+          </a:lnRef>
+          <a:fillRef idx="3">
+            <a:schemeClr val="accent1"/>
+          </a:fillRef>
+          <a:effectRef idx="2">
+            <a:schemeClr val="accent1"/>
+          </a:effectRef>
+          <a:fontRef idx="minor">
+            <a:schemeClr val="lt1"/>
+          </a:fontRef>
+        </p:style>
+        <p:txBody>
+          <a:bodyPr rtlCol="0" anchor="ctr"/>
+          <a:lstStyle/>
+          <a:p>
+            <a:pPr algn="ctr"/>
+          </a:p>
+        </p:txBody>
+      </p:sp>
+      <p:sp>
+        <p:nvSpPr>
+          <p:cNvPr id="37" name="TextBox 36"/>
+          <p:cNvSpPr txBox="1"/>
+          <p:nvPr/>
+        </p:nvSpPr>
+        <p:spPr>
+          <a:xfrm>
+            <a:off x="5257800" y="5742432"/>
+            <a:ext cx="3657600" cy="274320"/>
+          </a:xfrm>
+          <a:prstGeom prst="rect">
+            <a:avLst/>
+          </a:prstGeom>
+          <a:noFill/>
+        </p:spPr>
+        <p:txBody>
+          <a:bodyPr wrap="square" anchor="t" lIns="50800" rIns="50800" tIns="25400" bIns="25400">
+            <a:spAutoFit/>
+          </a:bodyPr>
+          <a:lstStyle/>
+          <a:p>
+            <a:pPr algn="l"/>
+            <a:r>
+              <a:rPr sz="1100" b="0" i="0">
+                <a:solidFill>
+                  <a:srgbClr val="2B2B2B"/>
+                </a:solidFill>
+                <a:latin typeface="Calibri"/>
+              </a:rPr>
+              <a:t>recovered by affected[] fallback</a:t>
+            </a:r>
+          </a:p>
+        </p:txBody>
+      </p:sp>
+      <p:sp>
+        <p:nvSpPr>
+          <p:cNvPr id="38" name="TextBox 37"/>
           <p:cNvSpPr txBox="1"/>
           <p:nvPr/>
         </p:nvSpPr>
@@ -9023,7 +9681,7 @@
       </p:sp>
       <p:sp>
         <p:nvSpPr>
-          <p:cNvPr id="26" name="TextBox 25"/>
+          <p:cNvPr id="39" name="TextBox 38"/>
           <p:cNvSpPr txBox="1"/>
           <p:nvPr/>
         </p:nvSpPr>
@@ -9051,7 +9709,7 @@
                 </a:solidFill>
                 <a:latin typeface="Calibri"/>
               </a:rPr>
-              <a:t>6</a:t>
+              <a:t>5</a:t>
             </a:r>
           </a:p>
         </p:txBody>
@@ -9280,7 +9938,7 @@
                 </a:solidFill>
                 <a:latin typeface="Calibri"/>
               </a:rPr>
-              <a:t>WEEK 2 · GOAL 3</a:t>
+              <a:t>WEEK 2 · GOAL 2</a:t>
             </a:r>
           </a:p>
         </p:txBody>
@@ -9315,7 +9973,7 @@
                 </a:solidFill>
                 <a:latin typeface="Calibri"/>
               </a:rPr>
-              <a:t>Risk Analysis</a:t>
+              <a:t>Fairness Result: The Fallback Is an Equity Fix</a:t>
             </a:r>
           </a:p>
         </p:txBody>
@@ -9328,8 +9986,8 @@
         </p:nvSpPr>
         <p:spPr>
           <a:xfrm>
-            <a:off x="502920" y="1828800"/>
-            <a:ext cx="10149840" cy="640080"/>
+            <a:off x="502920" y="1920240"/>
+            <a:ext cx="3291840" cy="2103120"/>
           </a:xfrm>
           <a:prstGeom prst="rect">
             <a:avLst/>
@@ -9366,49 +10024,208 @@
       </p:sp>
       <p:sp>
         <p:nvSpPr>
-          <p:cNvPr id="9" name="TextBox 8"/>
-          <p:cNvSpPr txBox="1"/>
-          <p:nvPr/>
-        </p:nvSpPr>
-        <p:spPr>
-          <a:xfrm>
-            <a:off x="640080" y="1874520"/>
-            <a:ext cx="4754880" cy="548640"/>
-          </a:xfrm>
-          <a:prstGeom prst="rect">
-            <a:avLst/>
-          </a:prstGeom>
-          <a:noFill/>
-        </p:spPr>
-        <p:txBody>
-          <a:bodyPr wrap="square" anchor="ctr" lIns="50800" rIns="50800" tIns="25400" bIns="25400">
-            <a:spAutoFit/>
-          </a:bodyPr>
-          <a:lstStyle/>
-          <a:p>
-            <a:pPr algn="l"/>
-            <a:r>
-              <a:rPr sz="1300" b="1" i="0">
+          <p:cNvPr id="9" name="Rectangle 8"/>
+          <p:cNvSpPr/>
+          <p:nvPr/>
+        </p:nvSpPr>
+        <p:spPr>
+          <a:xfrm>
+            <a:off x="502920" y="1920240"/>
+            <a:ext cx="3291840" cy="109728"/>
+          </a:xfrm>
+          <a:prstGeom prst="rect">
+            <a:avLst/>
+          </a:prstGeom>
+          <a:solidFill>
+            <a:srgbClr val="5C1A33"/>
+          </a:solidFill>
+          <a:ln>
+            <a:noFill/>
+          </a:ln>
+          <a:effectLst/>
+        </p:spPr>
+        <p:style>
+          <a:lnRef idx="1">
+            <a:schemeClr val="accent1"/>
+          </a:lnRef>
+          <a:fillRef idx="3">
+            <a:schemeClr val="accent1"/>
+          </a:fillRef>
+          <a:effectRef idx="2">
+            <a:schemeClr val="accent1"/>
+          </a:effectRef>
+          <a:fontRef idx="minor">
+            <a:schemeClr val="lt1"/>
+          </a:fontRef>
+        </p:style>
+        <p:txBody>
+          <a:bodyPr rtlCol="0" anchor="ctr"/>
+          <a:lstStyle/>
+          <a:p>
+            <a:pPr algn="ctr"/>
+          </a:p>
+        </p:txBody>
+      </p:sp>
+      <p:sp>
+        <p:nvSpPr>
+          <p:cNvPr id="10" name="TextBox 9"/>
+          <p:cNvSpPr txBox="1"/>
+          <p:nvPr/>
+        </p:nvSpPr>
+        <p:spPr>
+          <a:xfrm>
+            <a:off x="502920" y="2240280"/>
+            <a:ext cx="3291840" cy="822960"/>
+          </a:xfrm>
+          <a:prstGeom prst="rect">
+            <a:avLst/>
+          </a:prstGeom>
+          <a:noFill/>
+        </p:spPr>
+        <p:txBody>
+          <a:bodyPr wrap="square" anchor="t" lIns="50800" rIns="50800" tIns="25400" bIns="25400">
+            <a:spAutoFit/>
+          </a:bodyPr>
+          <a:lstStyle/>
+          <a:p>
+            <a:pPr algn="ctr"/>
+            <a:r>
+              <a:rPr sz="4000" b="1" i="0">
+                <a:solidFill>
+                  <a:srgbClr val="5C1A33"/>
+                </a:solidFill>
+                <a:latin typeface="Calibri"/>
+              </a:rPr>
+              <a:t>66.0 pp</a:t>
+            </a:r>
+          </a:p>
+        </p:txBody>
+      </p:sp>
+      <p:sp>
+        <p:nvSpPr>
+          <p:cNvPr id="11" name="TextBox 10"/>
+          <p:cNvSpPr txBox="1"/>
+          <p:nvPr/>
+        </p:nvSpPr>
+        <p:spPr>
+          <a:xfrm>
+            <a:off x="502920" y="3108960"/>
+            <a:ext cx="3291840" cy="640080"/>
+          </a:xfrm>
+          <a:prstGeom prst="rect">
+            <a:avLst/>
+          </a:prstGeom>
+          <a:noFill/>
+        </p:spPr>
+        <p:txBody>
+          <a:bodyPr wrap="square" anchor="t" lIns="50800" rIns="50800" tIns="25400" bIns="25400">
+            <a:spAutoFit/>
+          </a:bodyPr>
+          <a:lstStyle/>
+          <a:p>
+            <a:pPr algn="ctr"/>
+            <a:r>
+              <a:rPr sz="1300" b="0" i="0">
                 <a:solidFill>
                   <a:srgbClr val="2B2B2B"/>
                 </a:solidFill>
                 <a:latin typeface="Calibri"/>
               </a:rPr>
-              <a:t>R1  False negative — vendor blind spot</a:t>
-            </a:r>
-          </a:p>
-        </p:txBody>
-      </p:sp>
-      <p:sp>
-        <p:nvSpPr>
-          <p:cNvPr id="10" name="Rectangle 9"/>
+              <a:t>CPE-only recall spread
+across named vendors</a:t>
+            </a:r>
+          </a:p>
+        </p:txBody>
+      </p:sp>
+      <p:sp>
+        <p:nvSpPr>
+          <p:cNvPr id="12" name="TextBox 11"/>
+          <p:cNvSpPr txBox="1"/>
+          <p:nvPr/>
+        </p:nvSpPr>
+        <p:spPr>
+          <a:xfrm>
+            <a:off x="502920" y="3703320"/>
+            <a:ext cx="3291840" cy="274320"/>
+          </a:xfrm>
+          <a:prstGeom prst="rect">
+            <a:avLst/>
+          </a:prstGeom>
+          <a:noFill/>
+        </p:spPr>
+        <p:txBody>
+          <a:bodyPr wrap="square" anchor="t" lIns="50800" rIns="50800" tIns="25400" bIns="25400">
+            <a:spAutoFit/>
+          </a:bodyPr>
+          <a:lstStyle/>
+          <a:p>
+            <a:pPr algn="ctr"/>
+            <a:r>
+              <a:rPr sz="1200" b="1" i="0">
+                <a:solidFill>
+                  <a:srgbClr val="5C1A33"/>
+                </a:solidFill>
+                <a:latin typeface="Calibri"/>
+              </a:rPr>
+              <a:t>the bias</a:t>
+            </a:r>
+          </a:p>
+        </p:txBody>
+      </p:sp>
+      <p:sp>
+        <p:nvSpPr>
+          <p:cNvPr id="13" name="Rectangle 12"/>
           <p:cNvSpPr/>
           <p:nvPr/>
         </p:nvSpPr>
         <p:spPr>
           <a:xfrm>
-            <a:off x="5349240" y="1984248"/>
-            <a:ext cx="1097280" cy="329184"/>
+            <a:off x="3931920" y="1920240"/>
+            <a:ext cx="3291840" cy="2103120"/>
+          </a:xfrm>
+          <a:prstGeom prst="rect">
+            <a:avLst/>
+          </a:prstGeom>
+          <a:solidFill>
+            <a:srgbClr val="F2F2F2"/>
+          </a:solidFill>
+          <a:ln>
+            <a:noFill/>
+          </a:ln>
+          <a:effectLst/>
+        </p:spPr>
+        <p:style>
+          <a:lnRef idx="1">
+            <a:schemeClr val="accent1"/>
+          </a:lnRef>
+          <a:fillRef idx="3">
+            <a:schemeClr val="accent1"/>
+          </a:fillRef>
+          <a:effectRef idx="2">
+            <a:schemeClr val="accent1"/>
+          </a:effectRef>
+          <a:fontRef idx="minor">
+            <a:schemeClr val="lt1"/>
+          </a:fontRef>
+        </p:style>
+        <p:txBody>
+          <a:bodyPr rtlCol="0" anchor="ctr"/>
+          <a:lstStyle/>
+          <a:p>
+            <a:pPr algn="ctr"/>
+          </a:p>
+        </p:txBody>
+      </p:sp>
+      <p:sp>
+        <p:nvSpPr>
+          <p:cNvPr id="14" name="Rectangle 13"/>
+          <p:cNvSpPr/>
+          <p:nvPr/>
+        </p:nvSpPr>
+        <p:spPr>
+          <a:xfrm>
+            <a:off x="3931920" y="1920240"/>
+            <a:ext cx="3291840" cy="109728"/>
           </a:xfrm>
           <a:prstGeom prst="rect">
             <a:avLst/>
@@ -9445,263 +10262,106 @@
       </p:sp>
       <p:sp>
         <p:nvSpPr>
-          <p:cNvPr id="11" name="TextBox 10"/>
-          <p:cNvSpPr txBox="1"/>
-          <p:nvPr/>
-        </p:nvSpPr>
-        <p:spPr>
-          <a:xfrm>
-            <a:off x="5349240" y="1984248"/>
-            <a:ext cx="1097280" cy="329184"/>
-          </a:xfrm>
-          <a:prstGeom prst="rect">
-            <a:avLst/>
-          </a:prstGeom>
-          <a:noFill/>
-        </p:spPr>
-        <p:txBody>
-          <a:bodyPr wrap="square" anchor="ctr" lIns="50800" rIns="50800" tIns="25400" bIns="25400">
+          <p:cNvPr id="15" name="TextBox 14"/>
+          <p:cNvSpPr txBox="1"/>
+          <p:nvPr/>
+        </p:nvSpPr>
+        <p:spPr>
+          <a:xfrm>
+            <a:off x="3931920" y="2240280"/>
+            <a:ext cx="3291840" cy="822960"/>
+          </a:xfrm>
+          <a:prstGeom prst="rect">
+            <a:avLst/>
+          </a:prstGeom>
+          <a:noFill/>
+        </p:spPr>
+        <p:txBody>
+          <a:bodyPr wrap="square" anchor="t" lIns="50800" rIns="50800" tIns="25400" bIns="25400">
             <a:spAutoFit/>
           </a:bodyPr>
           <a:lstStyle/>
           <a:p>
             <a:pPr algn="ctr"/>
             <a:r>
-              <a:rPr sz="1100" b="1" i="0">
-                <a:solidFill>
-                  <a:srgbClr val="FFFFFF"/>
-                </a:solidFill>
-                <a:latin typeface="Calibri"/>
-              </a:rPr>
-              <a:t>Mitigated</a:t>
-            </a:r>
-          </a:p>
-        </p:txBody>
-      </p:sp>
-      <p:sp>
-        <p:nvSpPr>
-          <p:cNvPr id="12" name="TextBox 11"/>
-          <p:cNvSpPr txBox="1"/>
-          <p:nvPr/>
-        </p:nvSpPr>
-        <p:spPr>
-          <a:xfrm>
-            <a:off x="6583680" y="1874520"/>
-            <a:ext cx="4023360" cy="548640"/>
-          </a:xfrm>
-          <a:prstGeom prst="rect">
-            <a:avLst/>
-          </a:prstGeom>
-          <a:noFill/>
-        </p:spPr>
-        <p:txBody>
-          <a:bodyPr wrap="square" anchor="ctr" lIns="50800" rIns="50800" tIns="25400" bIns="25400">
-            <a:spAutoFit/>
-          </a:bodyPr>
-          <a:lstStyle/>
-          <a:p>
-            <a:pPr algn="l"/>
-            <a:r>
-              <a:rPr sz="1100" b="0" i="0">
+              <a:rPr sz="4000" b="1" i="0">
+                <a:solidFill>
+                  <a:srgbClr val="2E7D32"/>
+                </a:solidFill>
+                <a:latin typeface="Calibri"/>
+              </a:rPr>
+              <a:t>0.0 pp</a:t>
+            </a:r>
+          </a:p>
+        </p:txBody>
+      </p:sp>
+      <p:sp>
+        <p:nvSpPr>
+          <p:cNvPr id="16" name="TextBox 15"/>
+          <p:cNvSpPr txBox="1"/>
+          <p:nvPr/>
+        </p:nvSpPr>
+        <p:spPr>
+          <a:xfrm>
+            <a:off x="3931920" y="3108960"/>
+            <a:ext cx="3291840" cy="640080"/>
+          </a:xfrm>
+          <a:prstGeom prst="rect">
+            <a:avLst/>
+          </a:prstGeom>
+          <a:noFill/>
+        </p:spPr>
+        <p:txBody>
+          <a:bodyPr wrap="square" anchor="t" lIns="50800" rIns="50800" tIns="25400" bIns="25400">
+            <a:spAutoFit/>
+          </a:bodyPr>
+          <a:lstStyle/>
+          <a:p>
+            <a:pPr algn="ctr"/>
+            <a:r>
+              <a:rPr sz="1300" b="0" i="0">
                 <a:solidFill>
                   <a:srgbClr val="2B2B2B"/>
                 </a:solidFill>
                 <a:latin typeface="Calibri"/>
               </a:rPr>
-              <a:t>fallback closes recall gap to ~0 pp; residual = NVD data gaps (documented)</a:t>
-            </a:r>
-          </a:p>
-        </p:txBody>
-      </p:sp>
-      <p:sp>
-        <p:nvSpPr>
-          <p:cNvPr id="13" name="Rectangle 12"/>
-          <p:cNvSpPr/>
-          <p:nvPr/>
-        </p:nvSpPr>
-        <p:spPr>
-          <a:xfrm>
-            <a:off x="502920" y="2542032"/>
-            <a:ext cx="10149840" cy="640080"/>
-          </a:xfrm>
-          <a:prstGeom prst="rect">
-            <a:avLst/>
-          </a:prstGeom>
-          <a:solidFill>
-            <a:srgbClr val="FFFFFF"/>
-          </a:solidFill>
-          <a:ln>
-            <a:noFill/>
-          </a:ln>
-          <a:effectLst/>
-        </p:spPr>
-        <p:style>
-          <a:lnRef idx="1">
-            <a:schemeClr val="accent1"/>
-          </a:lnRef>
-          <a:fillRef idx="3">
-            <a:schemeClr val="accent1"/>
-          </a:fillRef>
-          <a:effectRef idx="2">
-            <a:schemeClr val="accent1"/>
-          </a:effectRef>
-          <a:fontRef idx="minor">
-            <a:schemeClr val="lt1"/>
-          </a:fontRef>
-        </p:style>
-        <p:txBody>
-          <a:bodyPr rtlCol="0" anchor="ctr"/>
+              <a:t>spread after adding the
+affected[] fallback</a:t>
+            </a:r>
+          </a:p>
+        </p:txBody>
+      </p:sp>
+      <p:sp>
+        <p:nvSpPr>
+          <p:cNvPr id="17" name="TextBox 16"/>
+          <p:cNvSpPr txBox="1"/>
+          <p:nvPr/>
+        </p:nvSpPr>
+        <p:spPr>
+          <a:xfrm>
+            <a:off x="3931920" y="3703320"/>
+            <a:ext cx="3291840" cy="274320"/>
+          </a:xfrm>
+          <a:prstGeom prst="rect">
+            <a:avLst/>
+          </a:prstGeom>
+          <a:noFill/>
+        </p:spPr>
+        <p:txBody>
+          <a:bodyPr wrap="square" anchor="t" lIns="50800" rIns="50800" tIns="25400" bIns="25400">
+            <a:spAutoFit/>
+          </a:bodyPr>
           <a:lstStyle/>
           <a:p>
             <a:pPr algn="ctr"/>
-          </a:p>
-        </p:txBody>
-      </p:sp>
-      <p:sp>
-        <p:nvSpPr>
-          <p:cNvPr id="14" name="TextBox 13"/>
-          <p:cNvSpPr txBox="1"/>
-          <p:nvPr/>
-        </p:nvSpPr>
-        <p:spPr>
-          <a:xfrm>
-            <a:off x="640080" y="2587752"/>
-            <a:ext cx="4754880" cy="548640"/>
-          </a:xfrm>
-          <a:prstGeom prst="rect">
-            <a:avLst/>
-          </a:prstGeom>
-          <a:noFill/>
-        </p:spPr>
-        <p:txBody>
-          <a:bodyPr wrap="square" anchor="ctr" lIns="50800" rIns="50800" tIns="25400" bIns="25400">
-            <a:spAutoFit/>
-          </a:bodyPr>
-          <a:lstStyle/>
-          <a:p>
-            <a:pPr algn="l"/>
-            <a:r>
-              <a:rPr sz="1300" b="1" i="0">
-                <a:solidFill>
-                  <a:srgbClr val="2B2B2B"/>
-                </a:solidFill>
-                <a:latin typeface="Calibri"/>
-              </a:rPr>
-              <a:t>R2  False positive from loose fallback</a:t>
-            </a:r>
-          </a:p>
-        </p:txBody>
-      </p:sp>
-      <p:sp>
-        <p:nvSpPr>
-          <p:cNvPr id="15" name="Rectangle 14"/>
-          <p:cNvSpPr/>
-          <p:nvPr/>
-        </p:nvSpPr>
-        <p:spPr>
-          <a:xfrm>
-            <a:off x="5349240" y="2697480"/>
-            <a:ext cx="1097280" cy="329184"/>
-          </a:xfrm>
-          <a:prstGeom prst="rect">
-            <a:avLst/>
-          </a:prstGeom>
-          <a:solidFill>
-            <a:srgbClr val="A83A5B"/>
-          </a:solidFill>
-          <a:ln>
-            <a:noFill/>
-          </a:ln>
-          <a:effectLst/>
-        </p:spPr>
-        <p:style>
-          <a:lnRef idx="1">
-            <a:schemeClr val="accent1"/>
-          </a:lnRef>
-          <a:fillRef idx="3">
-            <a:schemeClr val="accent1"/>
-          </a:fillRef>
-          <a:effectRef idx="2">
-            <a:schemeClr val="accent1"/>
-          </a:effectRef>
-          <a:fontRef idx="minor">
-            <a:schemeClr val="lt1"/>
-          </a:fontRef>
-        </p:style>
-        <p:txBody>
-          <a:bodyPr rtlCol="0" anchor="ctr"/>
-          <a:lstStyle/>
-          <a:p>
-            <a:pPr algn="ctr"/>
-          </a:p>
-        </p:txBody>
-      </p:sp>
-      <p:sp>
-        <p:nvSpPr>
-          <p:cNvPr id="16" name="TextBox 15"/>
-          <p:cNvSpPr txBox="1"/>
-          <p:nvPr/>
-        </p:nvSpPr>
-        <p:spPr>
-          <a:xfrm>
-            <a:off x="5349240" y="2697480"/>
-            <a:ext cx="1097280" cy="329184"/>
-          </a:xfrm>
-          <a:prstGeom prst="rect">
-            <a:avLst/>
-          </a:prstGeom>
-          <a:noFill/>
-        </p:spPr>
-        <p:txBody>
-          <a:bodyPr wrap="square" anchor="ctr" lIns="50800" rIns="50800" tIns="25400" bIns="25400">
-            <a:spAutoFit/>
-          </a:bodyPr>
-          <a:lstStyle/>
-          <a:p>
-            <a:pPr algn="ctr"/>
-            <a:r>
-              <a:rPr sz="1100" b="1" i="0">
-                <a:solidFill>
-                  <a:srgbClr val="FFFFFF"/>
-                </a:solidFill>
-                <a:latin typeface="Calibri"/>
-              </a:rPr>
-              <a:t>Partial</a:t>
-            </a:r>
-          </a:p>
-        </p:txBody>
-      </p:sp>
-      <p:sp>
-        <p:nvSpPr>
-          <p:cNvPr id="17" name="TextBox 16"/>
-          <p:cNvSpPr txBox="1"/>
-          <p:nvPr/>
-        </p:nvSpPr>
-        <p:spPr>
-          <a:xfrm>
-            <a:off x="6583680" y="2587752"/>
-            <a:ext cx="4023360" cy="548640"/>
-          </a:xfrm>
-          <a:prstGeom prst="rect">
-            <a:avLst/>
-          </a:prstGeom>
-          <a:noFill/>
-        </p:spPr>
-        <p:txBody>
-          <a:bodyPr wrap="square" anchor="ctr" lIns="50800" rIns="50800" tIns="25400" bIns="25400">
-            <a:spAutoFit/>
-          </a:bodyPr>
-          <a:lstStyle/>
-          <a:p>
-            <a:pPr algn="l"/>
-            <a:r>
-              <a:rPr sz="1100" b="0" i="0">
-                <a:solidFill>
-                  <a:srgbClr val="2B2B2B"/>
-                </a:solidFill>
-                <a:latin typeface="Calibri"/>
-              </a:rPr>
-              <a:t>CPE weighted higher; fallback → SUGGEST/FLAG. Per-vendor FP rate unmeasured</a:t>
+            <a:r>
+              <a:rPr sz="1200" b="1" i="0">
+                <a:solidFill>
+                  <a:srgbClr val="2E7D32"/>
+                </a:solidFill>
+                <a:latin typeface="Calibri"/>
+              </a:rPr>
+              <a:t>the fix</a:t>
             </a:r>
           </a:p>
         </p:txBody>
@@ -9714,8 +10374,8 @@
         </p:nvSpPr>
         <p:spPr>
           <a:xfrm>
-            <a:off x="502920" y="3255264"/>
-            <a:ext cx="10149840" cy="640080"/>
+            <a:off x="7360920" y="1920240"/>
+            <a:ext cx="3291840" cy="2103120"/>
           </a:xfrm>
           <a:prstGeom prst="rect">
             <a:avLst/>
@@ -9752,435 +10412,14 @@
       </p:sp>
       <p:sp>
         <p:nvSpPr>
-          <p:cNvPr id="19" name="TextBox 18"/>
-          <p:cNvSpPr txBox="1"/>
-          <p:nvPr/>
-        </p:nvSpPr>
-        <p:spPr>
-          <a:xfrm>
-            <a:off x="640080" y="3300984"/>
-            <a:ext cx="4754880" cy="548640"/>
-          </a:xfrm>
-          <a:prstGeom prst="rect">
-            <a:avLst/>
-          </a:prstGeom>
-          <a:noFill/>
-        </p:spPr>
-        <p:txBody>
-          <a:bodyPr wrap="square" anchor="ctr" lIns="50800" rIns="50800" tIns="25400" bIns="25400">
-            <a:spAutoFit/>
-          </a:bodyPr>
-          <a:lstStyle/>
-          <a:p>
-            <a:pPr algn="l"/>
-            <a:r>
-              <a:rPr sz="1300" b="1" i="0">
-                <a:solidFill>
-                  <a:srgbClr val="2B2B2B"/>
-                </a:solidFill>
-                <a:latin typeface="Calibri"/>
-              </a:rPr>
-              <a:t>R3  Severity-only prioritization</a:t>
-            </a:r>
-          </a:p>
-        </p:txBody>
-      </p:sp>
-      <p:sp>
-        <p:nvSpPr>
-          <p:cNvPr id="20" name="Rectangle 19"/>
+          <p:cNvPr id="19" name="Rectangle 18"/>
           <p:cNvSpPr/>
           <p:nvPr/>
         </p:nvSpPr>
         <p:spPr>
           <a:xfrm>
-            <a:off x="5349240" y="3410712"/>
-            <a:ext cx="1097280" cy="329184"/>
-          </a:xfrm>
-          <a:prstGeom prst="rect">
-            <a:avLst/>
-          </a:prstGeom>
-          <a:solidFill>
-            <a:srgbClr val="2E7D32"/>
-          </a:solidFill>
-          <a:ln>
-            <a:noFill/>
-          </a:ln>
-          <a:effectLst/>
-        </p:spPr>
-        <p:style>
-          <a:lnRef idx="1">
-            <a:schemeClr val="accent1"/>
-          </a:lnRef>
-          <a:fillRef idx="3">
-            <a:schemeClr val="accent1"/>
-          </a:fillRef>
-          <a:effectRef idx="2">
-            <a:schemeClr val="accent1"/>
-          </a:effectRef>
-          <a:fontRef idx="minor">
-            <a:schemeClr val="lt1"/>
-          </a:fontRef>
-        </p:style>
-        <p:txBody>
-          <a:bodyPr rtlCol="0" anchor="ctr"/>
-          <a:lstStyle/>
-          <a:p>
-            <a:pPr algn="ctr"/>
-          </a:p>
-        </p:txBody>
-      </p:sp>
-      <p:sp>
-        <p:nvSpPr>
-          <p:cNvPr id="21" name="TextBox 20"/>
-          <p:cNvSpPr txBox="1"/>
-          <p:nvPr/>
-        </p:nvSpPr>
-        <p:spPr>
-          <a:xfrm>
-            <a:off x="5349240" y="3410712"/>
-            <a:ext cx="1097280" cy="329184"/>
-          </a:xfrm>
-          <a:prstGeom prst="rect">
-            <a:avLst/>
-          </a:prstGeom>
-          <a:noFill/>
-        </p:spPr>
-        <p:txBody>
-          <a:bodyPr wrap="square" anchor="ctr" lIns="50800" rIns="50800" tIns="25400" bIns="25400">
-            <a:spAutoFit/>
-          </a:bodyPr>
-          <a:lstStyle/>
-          <a:p>
-            <a:pPr algn="ctr"/>
-            <a:r>
-              <a:rPr sz="1100" b="1" i="0">
-                <a:solidFill>
-                  <a:srgbClr val="FFFFFF"/>
-                </a:solidFill>
-                <a:latin typeface="Calibri"/>
-              </a:rPr>
-              <a:t>Mitigated</a:t>
-            </a:r>
-          </a:p>
-        </p:txBody>
-      </p:sp>
-      <p:sp>
-        <p:nvSpPr>
-          <p:cNvPr id="22" name="TextBox 21"/>
-          <p:cNvSpPr txBox="1"/>
-          <p:nvPr/>
-        </p:nvSpPr>
-        <p:spPr>
-          <a:xfrm>
-            <a:off x="6583680" y="3300984"/>
-            <a:ext cx="4023360" cy="548640"/>
-          </a:xfrm>
-          <a:prstGeom prst="rect">
-            <a:avLst/>
-          </a:prstGeom>
-          <a:noFill/>
-        </p:spPr>
-        <p:txBody>
-          <a:bodyPr wrap="square" anchor="ctr" lIns="50800" rIns="50800" tIns="25400" bIns="25400">
-            <a:spAutoFit/>
-          </a:bodyPr>
-          <a:lstStyle/>
-          <a:p>
-            <a:pPr algn="l"/>
-            <a:r>
-              <a:rPr sz="1100" b="0" i="0">
-                <a:solidFill>
-                  <a:srgbClr val="2B2B2B"/>
-                </a:solidFill>
-                <a:latin typeface="Calibri"/>
-              </a:rPr>
-              <a:t>KEV/EPSS priority promotes actively-exploited CVEs above equal-CVSS peers</a:t>
-            </a:r>
-          </a:p>
-        </p:txBody>
-      </p:sp>
-      <p:sp>
-        <p:nvSpPr>
-          <p:cNvPr id="23" name="Rectangle 22"/>
-          <p:cNvSpPr/>
-          <p:nvPr/>
-        </p:nvSpPr>
-        <p:spPr>
-          <a:xfrm>
-            <a:off x="502920" y="3968496"/>
-            <a:ext cx="10149840" cy="640080"/>
-          </a:xfrm>
-          <a:prstGeom prst="rect">
-            <a:avLst/>
-          </a:prstGeom>
-          <a:solidFill>
-            <a:srgbClr val="FFFFFF"/>
-          </a:solidFill>
-          <a:ln>
-            <a:noFill/>
-          </a:ln>
-          <a:effectLst/>
-        </p:spPr>
-        <p:style>
-          <a:lnRef idx="1">
-            <a:schemeClr val="accent1"/>
-          </a:lnRef>
-          <a:fillRef idx="3">
-            <a:schemeClr val="accent1"/>
-          </a:fillRef>
-          <a:effectRef idx="2">
-            <a:schemeClr val="accent1"/>
-          </a:effectRef>
-          <a:fontRef idx="minor">
-            <a:schemeClr val="lt1"/>
-          </a:fontRef>
-        </p:style>
-        <p:txBody>
-          <a:bodyPr rtlCol="0" anchor="ctr"/>
-          <a:lstStyle/>
-          <a:p>
-            <a:pPr algn="ctr"/>
-          </a:p>
-        </p:txBody>
-      </p:sp>
-      <p:sp>
-        <p:nvSpPr>
-          <p:cNvPr id="24" name="TextBox 23"/>
-          <p:cNvSpPr txBox="1"/>
-          <p:nvPr/>
-        </p:nvSpPr>
-        <p:spPr>
-          <a:xfrm>
-            <a:off x="640080" y="4014216"/>
-            <a:ext cx="4754880" cy="548640"/>
-          </a:xfrm>
-          <a:prstGeom prst="rect">
-            <a:avLst/>
-          </a:prstGeom>
-          <a:noFill/>
-        </p:spPr>
-        <p:txBody>
-          <a:bodyPr wrap="square" anchor="ctr" lIns="50800" rIns="50800" tIns="25400" bIns="25400">
-            <a:spAutoFit/>
-          </a:bodyPr>
-          <a:lstStyle/>
-          <a:p>
-            <a:pPr algn="l"/>
-            <a:r>
-              <a:rPr sz="1300" b="1" i="0">
-                <a:solidFill>
-                  <a:srgbClr val="2B2B2B"/>
-                </a:solidFill>
-                <a:latin typeface="Calibri"/>
-              </a:rPr>
-              <a:t>R4  Over-trust / automation bias</a:t>
-            </a:r>
-          </a:p>
-        </p:txBody>
-      </p:sp>
-      <p:sp>
-        <p:nvSpPr>
-          <p:cNvPr id="25" name="Rectangle 24"/>
-          <p:cNvSpPr/>
-          <p:nvPr/>
-        </p:nvSpPr>
-        <p:spPr>
-          <a:xfrm>
-            <a:off x="5349240" y="4123944"/>
-            <a:ext cx="1097280" cy="329184"/>
-          </a:xfrm>
-          <a:prstGeom prst="rect">
-            <a:avLst/>
-          </a:prstGeom>
-          <a:solidFill>
-            <a:srgbClr val="2E7D32"/>
-          </a:solidFill>
-          <a:ln>
-            <a:noFill/>
-          </a:ln>
-          <a:effectLst/>
-        </p:spPr>
-        <p:style>
-          <a:lnRef idx="1">
-            <a:schemeClr val="accent1"/>
-          </a:lnRef>
-          <a:fillRef idx="3">
-            <a:schemeClr val="accent1"/>
-          </a:fillRef>
-          <a:effectRef idx="2">
-            <a:schemeClr val="accent1"/>
-          </a:effectRef>
-          <a:fontRef idx="minor">
-            <a:schemeClr val="lt1"/>
-          </a:fontRef>
-        </p:style>
-        <p:txBody>
-          <a:bodyPr rtlCol="0" anchor="ctr"/>
-          <a:lstStyle/>
-          <a:p>
-            <a:pPr algn="ctr"/>
-          </a:p>
-        </p:txBody>
-      </p:sp>
-      <p:sp>
-        <p:nvSpPr>
-          <p:cNvPr id="26" name="TextBox 25"/>
-          <p:cNvSpPr txBox="1"/>
-          <p:nvPr/>
-        </p:nvSpPr>
-        <p:spPr>
-          <a:xfrm>
-            <a:off x="5349240" y="4123944"/>
-            <a:ext cx="1097280" cy="329184"/>
-          </a:xfrm>
-          <a:prstGeom prst="rect">
-            <a:avLst/>
-          </a:prstGeom>
-          <a:noFill/>
-        </p:spPr>
-        <p:txBody>
-          <a:bodyPr wrap="square" anchor="ctr" lIns="50800" rIns="50800" tIns="25400" bIns="25400">
-            <a:spAutoFit/>
-          </a:bodyPr>
-          <a:lstStyle/>
-          <a:p>
-            <a:pPr algn="ctr"/>
-            <a:r>
-              <a:rPr sz="1100" b="1" i="0">
-                <a:solidFill>
-                  <a:srgbClr val="FFFFFF"/>
-                </a:solidFill>
-                <a:latin typeface="Calibri"/>
-              </a:rPr>
-              <a:t>By design</a:t>
-            </a:r>
-          </a:p>
-        </p:txBody>
-      </p:sp>
-      <p:sp>
-        <p:nvSpPr>
-          <p:cNvPr id="27" name="TextBox 26"/>
-          <p:cNvSpPr txBox="1"/>
-          <p:nvPr/>
-        </p:nvSpPr>
-        <p:spPr>
-          <a:xfrm>
-            <a:off x="6583680" y="4014216"/>
-            <a:ext cx="4023360" cy="548640"/>
-          </a:xfrm>
-          <a:prstGeom prst="rect">
-            <a:avLst/>
-          </a:prstGeom>
-          <a:noFill/>
-        </p:spPr>
-        <p:txBody>
-          <a:bodyPr wrap="square" anchor="ctr" lIns="50800" rIns="50800" tIns="25400" bIns="25400">
-            <a:spAutoFit/>
-          </a:bodyPr>
-          <a:lstStyle/>
-          <a:p>
-            <a:pPr algn="l"/>
-            <a:r>
-              <a:rPr sz="1100" b="0" i="0">
-                <a:solidFill>
-                  <a:srgbClr val="2B2B2B"/>
-                </a:solidFill>
-                <a:latin typeface="Calibri"/>
-              </a:rPr>
-              <a:t>'no match ≠ safe' stated; low confidence routed to human FLAG</a:t>
-            </a:r>
-          </a:p>
-        </p:txBody>
-      </p:sp>
-      <p:sp>
-        <p:nvSpPr>
-          <p:cNvPr id="28" name="Rectangle 27"/>
-          <p:cNvSpPr/>
-          <p:nvPr/>
-        </p:nvSpPr>
-        <p:spPr>
-          <a:xfrm>
-            <a:off x="502920" y="4681728"/>
-            <a:ext cx="10149840" cy="640080"/>
-          </a:xfrm>
-          <a:prstGeom prst="rect">
-            <a:avLst/>
-          </a:prstGeom>
-          <a:solidFill>
-            <a:srgbClr val="F2F2F2"/>
-          </a:solidFill>
-          <a:ln>
-            <a:noFill/>
-          </a:ln>
-          <a:effectLst/>
-        </p:spPr>
-        <p:style>
-          <a:lnRef idx="1">
-            <a:schemeClr val="accent1"/>
-          </a:lnRef>
-          <a:fillRef idx="3">
-            <a:schemeClr val="accent1"/>
-          </a:fillRef>
-          <a:effectRef idx="2">
-            <a:schemeClr val="accent1"/>
-          </a:effectRef>
-          <a:fontRef idx="minor">
-            <a:schemeClr val="lt1"/>
-          </a:fontRef>
-        </p:style>
-        <p:txBody>
-          <a:bodyPr rtlCol="0" anchor="ctr"/>
-          <a:lstStyle/>
-          <a:p>
-            <a:pPr algn="ctr"/>
-          </a:p>
-        </p:txBody>
-      </p:sp>
-      <p:sp>
-        <p:nvSpPr>
-          <p:cNvPr id="29" name="TextBox 28"/>
-          <p:cNvSpPr txBox="1"/>
-          <p:nvPr/>
-        </p:nvSpPr>
-        <p:spPr>
-          <a:xfrm>
-            <a:off x="640080" y="4727448"/>
-            <a:ext cx="4754880" cy="548640"/>
-          </a:xfrm>
-          <a:prstGeom prst="rect">
-            <a:avLst/>
-          </a:prstGeom>
-          <a:noFill/>
-        </p:spPr>
-        <p:txBody>
-          <a:bodyPr wrap="square" anchor="ctr" lIns="50800" rIns="50800" tIns="25400" bIns="25400">
-            <a:spAutoFit/>
-          </a:bodyPr>
-          <a:lstStyle/>
-          <a:p>
-            <a:pPr algn="l"/>
-            <a:r>
-              <a:rPr sz="1300" b="1" i="0">
-                <a:solidFill>
-                  <a:srgbClr val="2B2B2B"/>
-                </a:solidFill>
-                <a:latin typeface="Calibri"/>
-              </a:rPr>
-              <a:t>R5  OCR / screenshot input errors</a:t>
-            </a:r>
-          </a:p>
-        </p:txBody>
-      </p:sp>
-      <p:sp>
-        <p:nvSpPr>
-          <p:cNvPr id="30" name="Rectangle 29"/>
-          <p:cNvSpPr/>
-          <p:nvPr/>
-        </p:nvSpPr>
-        <p:spPr>
-          <a:xfrm>
-            <a:off x="5349240" y="4837176"/>
-            <a:ext cx="1097280" cy="329184"/>
+            <a:off x="7360920" y="1920240"/>
+            <a:ext cx="3291840" cy="109728"/>
           </a:xfrm>
           <a:prstGeom prst="rect">
             <a:avLst/>
@@ -10217,90 +10456,126 @@
       </p:sp>
       <p:sp>
         <p:nvSpPr>
-          <p:cNvPr id="31" name="TextBox 30"/>
-          <p:cNvSpPr txBox="1"/>
-          <p:nvPr/>
-        </p:nvSpPr>
-        <p:spPr>
-          <a:xfrm>
-            <a:off x="5349240" y="4837176"/>
-            <a:ext cx="1097280" cy="329184"/>
-          </a:xfrm>
-          <a:prstGeom prst="rect">
-            <a:avLst/>
-          </a:prstGeom>
-          <a:noFill/>
-        </p:spPr>
-        <p:txBody>
-          <a:bodyPr wrap="square" anchor="ctr" lIns="50800" rIns="50800" tIns="25400" bIns="25400">
+          <p:cNvPr id="20" name="TextBox 19"/>
+          <p:cNvSpPr txBox="1"/>
+          <p:nvPr/>
+        </p:nvSpPr>
+        <p:spPr>
+          <a:xfrm>
+            <a:off x="7360920" y="2240280"/>
+            <a:ext cx="3291840" cy="822960"/>
+          </a:xfrm>
+          <a:prstGeom prst="rect">
+            <a:avLst/>
+          </a:prstGeom>
+          <a:noFill/>
+        </p:spPr>
+        <p:txBody>
+          <a:bodyPr wrap="square" anchor="t" lIns="50800" rIns="50800" tIns="25400" bIns="25400">
             <a:spAutoFit/>
           </a:bodyPr>
           <a:lstStyle/>
           <a:p>
             <a:pPr algn="ctr"/>
             <a:r>
-              <a:rPr sz="1100" b="1" i="0">
-                <a:solidFill>
-                  <a:srgbClr val="FFFFFF"/>
-                </a:solidFill>
-                <a:latin typeface="Calibri"/>
-              </a:rPr>
-              <a:t>Open</a:t>
-            </a:r>
-          </a:p>
-        </p:txBody>
-      </p:sp>
-      <p:sp>
-        <p:nvSpPr>
-          <p:cNvPr id="32" name="TextBox 31"/>
-          <p:cNvSpPr txBox="1"/>
-          <p:nvPr/>
-        </p:nvSpPr>
-        <p:spPr>
-          <a:xfrm>
-            <a:off x="6583680" y="4727448"/>
-            <a:ext cx="4023360" cy="548640"/>
-          </a:xfrm>
-          <a:prstGeom prst="rect">
-            <a:avLst/>
-          </a:prstGeom>
-          <a:noFill/>
-        </p:spPr>
-        <p:txBody>
-          <a:bodyPr wrap="square" anchor="ctr" lIns="50800" rIns="50800" tIns="25400" bIns="25400">
-            <a:spAutoFit/>
-          </a:bodyPr>
-          <a:lstStyle/>
-          <a:p>
-            <a:pPr algn="l"/>
-            <a:r>
-              <a:rPr sz="1100" b="0" i="0">
+              <a:rPr sz="4000" b="1" i="0">
+                <a:solidFill>
+                  <a:srgbClr val="9EADB5"/>
+                </a:solidFill>
+                <a:latin typeface="Calibri"/>
+              </a:rPr>
+              <a:t>0.753</a:t>
+            </a:r>
+          </a:p>
+        </p:txBody>
+      </p:sp>
+      <p:sp>
+        <p:nvSpPr>
+          <p:cNvPr id="21" name="TextBox 20"/>
+          <p:cNvSpPr txBox="1"/>
+          <p:nvPr/>
+        </p:nvSpPr>
+        <p:spPr>
+          <a:xfrm>
+            <a:off x="7360920" y="3108960"/>
+            <a:ext cx="3291840" cy="640080"/>
+          </a:xfrm>
+          <a:prstGeom prst="rect">
+            <a:avLst/>
+          </a:prstGeom>
+          <a:noFill/>
+        </p:spPr>
+        <p:txBody>
+          <a:bodyPr wrap="square" anchor="t" lIns="50800" rIns="50800" tIns="25400" bIns="25400">
+            <a:spAutoFit/>
+          </a:bodyPr>
+          <a:lstStyle/>
+          <a:p>
+            <a:pPr algn="ctr"/>
+            <a:r>
+              <a:rPr sz="1300" b="0" i="0">
                 <a:solidFill>
                   <a:srgbClr val="2B2B2B"/>
                 </a:solidFill>
                 <a:latin typeface="Calibri"/>
               </a:rPr>
-              <a:t>image path still TODO; confidence model already down-weights OCR source</a:t>
-            </a:r>
-          </a:p>
-        </p:txBody>
-      </p:sp>
-      <p:sp>
-        <p:nvSpPr>
-          <p:cNvPr id="33" name="Rectangle 32"/>
+              <a:t>vendor CVE-count Gini
+(391 vendors)</a:t>
+            </a:r>
+          </a:p>
+        </p:txBody>
+      </p:sp>
+      <p:sp>
+        <p:nvSpPr>
+          <p:cNvPr id="22" name="TextBox 21"/>
+          <p:cNvSpPr txBox="1"/>
+          <p:nvPr/>
+        </p:nvSpPr>
+        <p:spPr>
+          <a:xfrm>
+            <a:off x="7360920" y="3703320"/>
+            <a:ext cx="3291840" cy="274320"/>
+          </a:xfrm>
+          <a:prstGeom prst="rect">
+            <a:avLst/>
+          </a:prstGeom>
+          <a:noFill/>
+        </p:spPr>
+        <p:txBody>
+          <a:bodyPr wrap="square" anchor="t" lIns="50800" rIns="50800" tIns="25400" bIns="25400">
+            <a:spAutoFit/>
+          </a:bodyPr>
+          <a:lstStyle/>
+          <a:p>
+            <a:pPr algn="ctr"/>
+            <a:r>
+              <a:rPr sz="1200" b="1" i="0">
+                <a:solidFill>
+                  <a:srgbClr val="9EADB5"/>
+                </a:solidFill>
+                <a:latin typeface="Calibri"/>
+              </a:rPr>
+              <a:t>residual: data skew</a:t>
+            </a:r>
+          </a:p>
+        </p:txBody>
+      </p:sp>
+      <p:sp>
+        <p:nvSpPr>
+          <p:cNvPr id="23" name="Rectangle 22"/>
           <p:cNvSpPr/>
           <p:nvPr/>
         </p:nvSpPr>
         <p:spPr>
           <a:xfrm>
-            <a:off x="502920" y="5394960"/>
-            <a:ext cx="10149840" cy="640080"/>
+            <a:off x="502920" y="4297680"/>
+            <a:ext cx="10149840" cy="1554480"/>
           </a:xfrm>
           <a:prstGeom prst="rect">
             <a:avLst/>
           </a:prstGeom>
           <a:solidFill>
-            <a:srgbClr val="FFFFFF"/>
+            <a:srgbClr val="5C1A33"/>
           </a:solidFill>
           <a:ln>
             <a:noFill/>
@@ -10331,14 +10606,14 @@
       </p:sp>
       <p:sp>
         <p:nvSpPr>
-          <p:cNvPr id="34" name="TextBox 33"/>
-          <p:cNvSpPr txBox="1"/>
-          <p:nvPr/>
-        </p:nvSpPr>
-        <p:spPr>
-          <a:xfrm>
-            <a:off x="640080" y="5440680"/>
-            <a:ext cx="4754880" cy="548640"/>
+          <p:cNvPr id="24" name="TextBox 23"/>
+          <p:cNvSpPr txBox="1"/>
+          <p:nvPr/>
+        </p:nvSpPr>
+        <p:spPr>
+          <a:xfrm>
+            <a:off x="731520" y="4434840"/>
+            <a:ext cx="9692640" cy="1371600"/>
           </a:xfrm>
           <a:prstGeom prst="rect">
             <a:avLst/>
@@ -10351,136 +10626,38 @@
           </a:bodyPr>
           <a:lstStyle/>
           <a:p>
+            <a:pPr algn="l">
+              <a:spcAft>
+                <a:spcPts val="800"/>
+              </a:spcAft>
+            </a:pPr>
+            <a:r>
+              <a:rPr sz="1500" b="1" i="0">
+                <a:solidFill>
+                  <a:srgbClr val="FFFFFF"/>
+                </a:solidFill>
+                <a:latin typeface="Calibri"/>
+              </a:rPr>
+              <a:t>Key insight: the Week 1 fallback was framed as a coverage patch. Measured as fairness, it collapses the per-vendor recall gap from 66 pp to ~0 — an equity fix.</a:t>
+            </a:r>
+          </a:p>
+          <a:p>
             <a:pPr algn="l"/>
             <a:r>
-              <a:rPr sz="1300" b="1" i="0">
-                <a:solidFill>
-                  <a:srgbClr val="2B2B2B"/>
-                </a:solidFill>
-                <a:latin typeface="Calibri"/>
-              </a:rPr>
-              <a:t>R6  Incidental personal data (GDPR)</a:t>
-            </a:r>
-          </a:p>
-        </p:txBody>
-      </p:sp>
-      <p:sp>
-        <p:nvSpPr>
-          <p:cNvPr id="35" name="Rectangle 34"/>
-          <p:cNvSpPr/>
-          <p:nvPr/>
-        </p:nvSpPr>
-        <p:spPr>
-          <a:xfrm>
-            <a:off x="5349240" y="5550408"/>
-            <a:ext cx="1097280" cy="329184"/>
-          </a:xfrm>
-          <a:prstGeom prst="rect">
-            <a:avLst/>
-          </a:prstGeom>
-          <a:solidFill>
-            <a:srgbClr val="2E7D32"/>
-          </a:solidFill>
-          <a:ln>
-            <a:noFill/>
-          </a:ln>
-          <a:effectLst/>
-        </p:spPr>
-        <p:style>
-          <a:lnRef idx="1">
-            <a:schemeClr val="accent1"/>
-          </a:lnRef>
-          <a:fillRef idx="3">
-            <a:schemeClr val="accent1"/>
-          </a:fillRef>
-          <a:effectRef idx="2">
-            <a:schemeClr val="accent1"/>
-          </a:effectRef>
-          <a:fontRef idx="minor">
-            <a:schemeClr val="lt1"/>
-          </a:fontRef>
-        </p:style>
-        <p:txBody>
-          <a:bodyPr rtlCol="0" anchor="ctr"/>
-          <a:lstStyle/>
-          <a:p>
-            <a:pPr algn="ctr"/>
-          </a:p>
-        </p:txBody>
-      </p:sp>
-      <p:sp>
-        <p:nvSpPr>
-          <p:cNvPr id="36" name="TextBox 35"/>
-          <p:cNvSpPr txBox="1"/>
-          <p:nvPr/>
-        </p:nvSpPr>
-        <p:spPr>
-          <a:xfrm>
-            <a:off x="5349240" y="5550408"/>
-            <a:ext cx="1097280" cy="329184"/>
-          </a:xfrm>
-          <a:prstGeom prst="rect">
-            <a:avLst/>
-          </a:prstGeom>
-          <a:noFill/>
-        </p:spPr>
-        <p:txBody>
-          <a:bodyPr wrap="square" anchor="ctr" lIns="50800" rIns="50800" tIns="25400" bIns="25400">
-            <a:spAutoFit/>
-          </a:bodyPr>
-          <a:lstStyle/>
-          <a:p>
-            <a:pPr algn="ctr"/>
-            <a:r>
-              <a:rPr sz="1100" b="1" i="0">
-                <a:solidFill>
-                  <a:srgbClr val="FFFFFF"/>
-                </a:solidFill>
-                <a:latin typeface="Calibri"/>
-              </a:rPr>
-              <a:t>Mitigated</a:t>
-            </a:r>
-          </a:p>
-        </p:txBody>
-      </p:sp>
-      <p:sp>
-        <p:nvSpPr>
-          <p:cNvPr id="37" name="TextBox 36"/>
-          <p:cNvSpPr txBox="1"/>
-          <p:nvPr/>
-        </p:nvSpPr>
-        <p:spPr>
-          <a:xfrm>
-            <a:off x="6583680" y="5440680"/>
-            <a:ext cx="4023360" cy="548640"/>
-          </a:xfrm>
-          <a:prstGeom prst="rect">
-            <a:avLst/>
-          </a:prstGeom>
-          <a:noFill/>
-        </p:spPr>
-        <p:txBody>
-          <a:bodyPr wrap="square" anchor="ctr" lIns="50800" rIns="50800" tIns="25400" bIns="25400">
-            <a:spAutoFit/>
-          </a:bodyPr>
-          <a:lstStyle/>
-          <a:p>
-            <a:pPr algn="l"/>
-            <a:r>
-              <a:rPr sz="1100" b="0" i="0">
-                <a:solidFill>
-                  <a:srgbClr val="2B2B2B"/>
-                </a:solidFill>
-                <a:latin typeface="Calibri"/>
-              </a:rPr>
-              <a:t>inputs hashed in audit log; screenshot text flagged &amp; minimized</a:t>
-            </a:r>
-          </a:p>
-        </p:txBody>
-      </p:sp>
-      <p:sp>
-        <p:nvSpPr>
-          <p:cNvPr id="38" name="TextBox 37"/>
+              <a:rPr sz="1300" b="0" i="0">
+                <a:solidFill>
+                  <a:srgbClr val="9EADB5"/>
+                </a:solidFill>
+                <a:latin typeface="Calibri"/>
+              </a:rPr>
+              <a:t>Honest caveat: coverage is now fair, but data representation is not (Gini stays high, NVD content we can't change). And the fallback's per-vendor false-positive rate is not yet measured — the mitigation may not be free.</a:t>
+            </a:r>
+          </a:p>
+        </p:txBody>
+      </p:sp>
+      <p:sp>
+        <p:nvSpPr>
+          <p:cNvPr id="25" name="TextBox 24"/>
           <p:cNvSpPr txBox="1"/>
           <p:nvPr/>
         </p:nvSpPr>
@@ -10515,7 +10692,7 @@
       </p:sp>
       <p:sp>
         <p:nvSpPr>
-          <p:cNvPr id="39" name="TextBox 38"/>
+          <p:cNvPr id="26" name="TextBox 25"/>
           <p:cNvSpPr txBox="1"/>
           <p:nvPr/>
         </p:nvSpPr>
@@ -10543,7 +10720,7 @@
                 </a:solidFill>
                 <a:latin typeface="Calibri"/>
               </a:rPr>
-              <a:t>7</a:t>
+              <a:t>6</a:t>
             </a:r>
           </a:p>
         </p:txBody>
@@ -10557,6 +10734,1498 @@
 </file>
 
 <file path=ppt/slides/slide8.xml><?xml version="1.0" encoding="utf-8"?>
+<p:sld xmlns:a="http://schemas.openxmlformats.org/drawingml/2006/main" xmlns:p="http://schemas.openxmlformats.org/presentationml/2006/main" xmlns:r="http://schemas.openxmlformats.org/officeDocument/2006/relationships">
+  <p:cSld>
+    <p:spTree>
+      <p:nvGrpSpPr>
+        <p:cNvPr id="1" name=""/>
+        <p:cNvGrpSpPr/>
+        <p:nvPr/>
+      </p:nvGrpSpPr>
+      <p:grpSpPr/>
+      <p:sp>
+        <p:nvSpPr>
+          <p:cNvPr id="2" name="Rectangle 1"/>
+          <p:cNvSpPr/>
+          <p:nvPr/>
+        </p:nvSpPr>
+        <p:spPr>
+          <a:xfrm>
+            <a:off x="0" y="320040"/>
+            <a:ext cx="12192000" cy="1234440"/>
+          </a:xfrm>
+          <a:prstGeom prst="rect">
+            <a:avLst/>
+          </a:prstGeom>
+          <a:solidFill>
+            <a:srgbClr val="5C1A33"/>
+          </a:solidFill>
+          <a:ln>
+            <a:noFill/>
+          </a:ln>
+          <a:effectLst/>
+        </p:spPr>
+        <p:style>
+          <a:lnRef idx="1">
+            <a:schemeClr val="accent1"/>
+          </a:lnRef>
+          <a:fillRef idx="3">
+            <a:schemeClr val="accent1"/>
+          </a:fillRef>
+          <a:effectRef idx="2">
+            <a:schemeClr val="accent1"/>
+          </a:effectRef>
+          <a:fontRef idx="minor">
+            <a:schemeClr val="lt1"/>
+          </a:fontRef>
+        </p:style>
+        <p:txBody>
+          <a:bodyPr rtlCol="0" anchor="ctr"/>
+          <a:lstStyle/>
+          <a:p>
+            <a:pPr algn="ctr"/>
+          </a:p>
+        </p:txBody>
+      </p:sp>
+      <p:sp>
+        <p:nvSpPr>
+          <p:cNvPr id="3" name="Rectangle 2"/>
+          <p:cNvSpPr/>
+          <p:nvPr/>
+        </p:nvSpPr>
+        <p:spPr>
+          <a:xfrm>
+            <a:off x="457200" y="182880"/>
+            <a:ext cx="3108960" cy="76200"/>
+          </a:xfrm>
+          <a:prstGeom prst="rect">
+            <a:avLst/>
+          </a:prstGeom>
+          <a:solidFill>
+            <a:srgbClr val="7A1F3D"/>
+          </a:solidFill>
+          <a:ln>
+            <a:noFill/>
+          </a:ln>
+          <a:effectLst/>
+        </p:spPr>
+        <p:style>
+          <a:lnRef idx="1">
+            <a:schemeClr val="accent1"/>
+          </a:lnRef>
+          <a:fillRef idx="3">
+            <a:schemeClr val="accent1"/>
+          </a:fillRef>
+          <a:effectRef idx="2">
+            <a:schemeClr val="accent1"/>
+          </a:effectRef>
+          <a:fontRef idx="minor">
+            <a:schemeClr val="lt1"/>
+          </a:fontRef>
+        </p:style>
+        <p:txBody>
+          <a:bodyPr rtlCol="0" anchor="ctr"/>
+          <a:lstStyle/>
+          <a:p>
+            <a:pPr algn="ctr"/>
+          </a:p>
+        </p:txBody>
+      </p:sp>
+      <p:sp>
+        <p:nvSpPr>
+          <p:cNvPr id="4" name="Rectangle 3"/>
+          <p:cNvSpPr/>
+          <p:nvPr/>
+        </p:nvSpPr>
+        <p:spPr>
+          <a:xfrm>
+            <a:off x="3749039" y="182880"/>
+            <a:ext cx="3108960" cy="76200"/>
+          </a:xfrm>
+          <a:prstGeom prst="rect">
+            <a:avLst/>
+          </a:prstGeom>
+          <a:solidFill>
+            <a:srgbClr val="A83A5B"/>
+          </a:solidFill>
+          <a:ln>
+            <a:noFill/>
+          </a:ln>
+          <a:effectLst/>
+        </p:spPr>
+        <p:style>
+          <a:lnRef idx="1">
+            <a:schemeClr val="accent1"/>
+          </a:lnRef>
+          <a:fillRef idx="3">
+            <a:schemeClr val="accent1"/>
+          </a:fillRef>
+          <a:effectRef idx="2">
+            <a:schemeClr val="accent1"/>
+          </a:effectRef>
+          <a:fontRef idx="minor">
+            <a:schemeClr val="lt1"/>
+          </a:fontRef>
+        </p:style>
+        <p:txBody>
+          <a:bodyPr rtlCol="0" anchor="ctr"/>
+          <a:lstStyle/>
+          <a:p>
+            <a:pPr algn="ctr"/>
+          </a:p>
+        </p:txBody>
+      </p:sp>
+      <p:sp>
+        <p:nvSpPr>
+          <p:cNvPr id="5" name="Rectangle 4"/>
+          <p:cNvSpPr/>
+          <p:nvPr/>
+        </p:nvSpPr>
+        <p:spPr>
+          <a:xfrm>
+            <a:off x="7040880" y="182880"/>
+            <a:ext cx="3108960" cy="76200"/>
+          </a:xfrm>
+          <a:prstGeom prst="rect">
+            <a:avLst/>
+          </a:prstGeom>
+          <a:solidFill>
+            <a:srgbClr val="9EADB5"/>
+          </a:solidFill>
+          <a:ln>
+            <a:noFill/>
+          </a:ln>
+          <a:effectLst/>
+        </p:spPr>
+        <p:style>
+          <a:lnRef idx="1">
+            <a:schemeClr val="accent1"/>
+          </a:lnRef>
+          <a:fillRef idx="3">
+            <a:schemeClr val="accent1"/>
+          </a:fillRef>
+          <a:effectRef idx="2">
+            <a:schemeClr val="accent1"/>
+          </a:effectRef>
+          <a:fontRef idx="minor">
+            <a:schemeClr val="lt1"/>
+          </a:fontRef>
+        </p:style>
+        <p:txBody>
+          <a:bodyPr rtlCol="0" anchor="ctr"/>
+          <a:lstStyle/>
+          <a:p>
+            <a:pPr algn="ctr"/>
+          </a:p>
+        </p:txBody>
+      </p:sp>
+      <p:sp>
+        <p:nvSpPr>
+          <p:cNvPr id="6" name="TextBox 5"/>
+          <p:cNvSpPr txBox="1"/>
+          <p:nvPr/>
+        </p:nvSpPr>
+        <p:spPr>
+          <a:xfrm>
+            <a:off x="502920" y="457200"/>
+            <a:ext cx="10058400" cy="320040"/>
+          </a:xfrm>
+          <a:prstGeom prst="rect">
+            <a:avLst/>
+          </a:prstGeom>
+          <a:noFill/>
+        </p:spPr>
+        <p:txBody>
+          <a:bodyPr wrap="square" anchor="t" lIns="50800" rIns="50800" tIns="25400" bIns="25400">
+            <a:spAutoFit/>
+          </a:bodyPr>
+          <a:lstStyle/>
+          <a:p>
+            <a:pPr algn="l"/>
+            <a:r>
+              <a:rPr sz="1300" b="1" i="0">
+                <a:solidFill>
+                  <a:srgbClr val="B5657F"/>
+                </a:solidFill>
+                <a:latin typeface="Calibri"/>
+              </a:rPr>
+              <a:t>WEEK 2 · GOAL 3</a:t>
+            </a:r>
+          </a:p>
+        </p:txBody>
+      </p:sp>
+      <p:sp>
+        <p:nvSpPr>
+          <p:cNvPr id="7" name="TextBox 6"/>
+          <p:cNvSpPr txBox="1"/>
+          <p:nvPr/>
+        </p:nvSpPr>
+        <p:spPr>
+          <a:xfrm>
+            <a:off x="502920" y="749808"/>
+            <a:ext cx="10241280" cy="731520"/>
+          </a:xfrm>
+          <a:prstGeom prst="rect">
+            <a:avLst/>
+          </a:prstGeom>
+          <a:noFill/>
+        </p:spPr>
+        <p:txBody>
+          <a:bodyPr wrap="square" anchor="ctr" lIns="50800" rIns="50800" tIns="25400" bIns="25400">
+            <a:spAutoFit/>
+          </a:bodyPr>
+          <a:lstStyle/>
+          <a:p>
+            <a:pPr algn="l"/>
+            <a:r>
+              <a:rPr sz="3000" b="1" i="0">
+                <a:solidFill>
+                  <a:srgbClr val="FFFFFF"/>
+                </a:solidFill>
+                <a:latin typeface="Calibri"/>
+              </a:rPr>
+              <a:t>Risk Analysis</a:t>
+            </a:r>
+          </a:p>
+        </p:txBody>
+      </p:sp>
+      <p:sp>
+        <p:nvSpPr>
+          <p:cNvPr id="8" name="Rectangle 7"/>
+          <p:cNvSpPr/>
+          <p:nvPr/>
+        </p:nvSpPr>
+        <p:spPr>
+          <a:xfrm>
+            <a:off x="502920" y="1828800"/>
+            <a:ext cx="10149840" cy="640080"/>
+          </a:xfrm>
+          <a:prstGeom prst="rect">
+            <a:avLst/>
+          </a:prstGeom>
+          <a:solidFill>
+            <a:srgbClr val="F2F2F2"/>
+          </a:solidFill>
+          <a:ln>
+            <a:noFill/>
+          </a:ln>
+          <a:effectLst/>
+        </p:spPr>
+        <p:style>
+          <a:lnRef idx="1">
+            <a:schemeClr val="accent1"/>
+          </a:lnRef>
+          <a:fillRef idx="3">
+            <a:schemeClr val="accent1"/>
+          </a:fillRef>
+          <a:effectRef idx="2">
+            <a:schemeClr val="accent1"/>
+          </a:effectRef>
+          <a:fontRef idx="minor">
+            <a:schemeClr val="lt1"/>
+          </a:fontRef>
+        </p:style>
+        <p:txBody>
+          <a:bodyPr rtlCol="0" anchor="ctr"/>
+          <a:lstStyle/>
+          <a:p>
+            <a:pPr algn="ctr"/>
+          </a:p>
+        </p:txBody>
+      </p:sp>
+      <p:sp>
+        <p:nvSpPr>
+          <p:cNvPr id="9" name="TextBox 8"/>
+          <p:cNvSpPr txBox="1"/>
+          <p:nvPr/>
+        </p:nvSpPr>
+        <p:spPr>
+          <a:xfrm>
+            <a:off x="640080" y="1874520"/>
+            <a:ext cx="4754880" cy="548640"/>
+          </a:xfrm>
+          <a:prstGeom prst="rect">
+            <a:avLst/>
+          </a:prstGeom>
+          <a:noFill/>
+        </p:spPr>
+        <p:txBody>
+          <a:bodyPr wrap="square" anchor="ctr" lIns="50800" rIns="50800" tIns="25400" bIns="25400">
+            <a:spAutoFit/>
+          </a:bodyPr>
+          <a:lstStyle/>
+          <a:p>
+            <a:pPr algn="l"/>
+            <a:r>
+              <a:rPr sz="1300" b="1" i="0">
+                <a:solidFill>
+                  <a:srgbClr val="2B2B2B"/>
+                </a:solidFill>
+                <a:latin typeface="Calibri"/>
+              </a:rPr>
+              <a:t>R1  False negative — vendor blind spot</a:t>
+            </a:r>
+          </a:p>
+        </p:txBody>
+      </p:sp>
+      <p:sp>
+        <p:nvSpPr>
+          <p:cNvPr id="10" name="Rectangle 9"/>
+          <p:cNvSpPr/>
+          <p:nvPr/>
+        </p:nvSpPr>
+        <p:spPr>
+          <a:xfrm>
+            <a:off x="5349240" y="1984248"/>
+            <a:ext cx="1097280" cy="329184"/>
+          </a:xfrm>
+          <a:prstGeom prst="rect">
+            <a:avLst/>
+          </a:prstGeom>
+          <a:solidFill>
+            <a:srgbClr val="2E7D32"/>
+          </a:solidFill>
+          <a:ln>
+            <a:noFill/>
+          </a:ln>
+          <a:effectLst/>
+        </p:spPr>
+        <p:style>
+          <a:lnRef idx="1">
+            <a:schemeClr val="accent1"/>
+          </a:lnRef>
+          <a:fillRef idx="3">
+            <a:schemeClr val="accent1"/>
+          </a:fillRef>
+          <a:effectRef idx="2">
+            <a:schemeClr val="accent1"/>
+          </a:effectRef>
+          <a:fontRef idx="minor">
+            <a:schemeClr val="lt1"/>
+          </a:fontRef>
+        </p:style>
+        <p:txBody>
+          <a:bodyPr rtlCol="0" anchor="ctr"/>
+          <a:lstStyle/>
+          <a:p>
+            <a:pPr algn="ctr"/>
+          </a:p>
+        </p:txBody>
+      </p:sp>
+      <p:sp>
+        <p:nvSpPr>
+          <p:cNvPr id="11" name="TextBox 10"/>
+          <p:cNvSpPr txBox="1"/>
+          <p:nvPr/>
+        </p:nvSpPr>
+        <p:spPr>
+          <a:xfrm>
+            <a:off x="5349240" y="1984248"/>
+            <a:ext cx="1097280" cy="329184"/>
+          </a:xfrm>
+          <a:prstGeom prst="rect">
+            <a:avLst/>
+          </a:prstGeom>
+          <a:noFill/>
+        </p:spPr>
+        <p:txBody>
+          <a:bodyPr wrap="square" anchor="ctr" lIns="50800" rIns="50800" tIns="25400" bIns="25400">
+            <a:spAutoFit/>
+          </a:bodyPr>
+          <a:lstStyle/>
+          <a:p>
+            <a:pPr algn="ctr"/>
+            <a:r>
+              <a:rPr sz="1100" b="1" i="0">
+                <a:solidFill>
+                  <a:srgbClr val="FFFFFF"/>
+                </a:solidFill>
+                <a:latin typeface="Calibri"/>
+              </a:rPr>
+              <a:t>Mitigated</a:t>
+            </a:r>
+          </a:p>
+        </p:txBody>
+      </p:sp>
+      <p:sp>
+        <p:nvSpPr>
+          <p:cNvPr id="12" name="TextBox 11"/>
+          <p:cNvSpPr txBox="1"/>
+          <p:nvPr/>
+        </p:nvSpPr>
+        <p:spPr>
+          <a:xfrm>
+            <a:off x="6583680" y="1874520"/>
+            <a:ext cx="4023360" cy="548640"/>
+          </a:xfrm>
+          <a:prstGeom prst="rect">
+            <a:avLst/>
+          </a:prstGeom>
+          <a:noFill/>
+        </p:spPr>
+        <p:txBody>
+          <a:bodyPr wrap="square" anchor="ctr" lIns="50800" rIns="50800" tIns="25400" bIns="25400">
+            <a:spAutoFit/>
+          </a:bodyPr>
+          <a:lstStyle/>
+          <a:p>
+            <a:pPr algn="l"/>
+            <a:r>
+              <a:rPr sz="1100" b="0" i="0">
+                <a:solidFill>
+                  <a:srgbClr val="2B2B2B"/>
+                </a:solidFill>
+                <a:latin typeface="Calibri"/>
+              </a:rPr>
+              <a:t>fallback closes recall gap to ~0 pp; residual = NVD data gaps (documented)</a:t>
+            </a:r>
+          </a:p>
+        </p:txBody>
+      </p:sp>
+      <p:sp>
+        <p:nvSpPr>
+          <p:cNvPr id="13" name="Rectangle 12"/>
+          <p:cNvSpPr/>
+          <p:nvPr/>
+        </p:nvSpPr>
+        <p:spPr>
+          <a:xfrm>
+            <a:off x="502920" y="2542032"/>
+            <a:ext cx="10149840" cy="640080"/>
+          </a:xfrm>
+          <a:prstGeom prst="rect">
+            <a:avLst/>
+          </a:prstGeom>
+          <a:solidFill>
+            <a:srgbClr val="FFFFFF"/>
+          </a:solidFill>
+          <a:ln>
+            <a:noFill/>
+          </a:ln>
+          <a:effectLst/>
+        </p:spPr>
+        <p:style>
+          <a:lnRef idx="1">
+            <a:schemeClr val="accent1"/>
+          </a:lnRef>
+          <a:fillRef idx="3">
+            <a:schemeClr val="accent1"/>
+          </a:fillRef>
+          <a:effectRef idx="2">
+            <a:schemeClr val="accent1"/>
+          </a:effectRef>
+          <a:fontRef idx="minor">
+            <a:schemeClr val="lt1"/>
+          </a:fontRef>
+        </p:style>
+        <p:txBody>
+          <a:bodyPr rtlCol="0" anchor="ctr"/>
+          <a:lstStyle/>
+          <a:p>
+            <a:pPr algn="ctr"/>
+          </a:p>
+        </p:txBody>
+      </p:sp>
+      <p:sp>
+        <p:nvSpPr>
+          <p:cNvPr id="14" name="TextBox 13"/>
+          <p:cNvSpPr txBox="1"/>
+          <p:nvPr/>
+        </p:nvSpPr>
+        <p:spPr>
+          <a:xfrm>
+            <a:off x="640080" y="2587752"/>
+            <a:ext cx="4754880" cy="548640"/>
+          </a:xfrm>
+          <a:prstGeom prst="rect">
+            <a:avLst/>
+          </a:prstGeom>
+          <a:noFill/>
+        </p:spPr>
+        <p:txBody>
+          <a:bodyPr wrap="square" anchor="ctr" lIns="50800" rIns="50800" tIns="25400" bIns="25400">
+            <a:spAutoFit/>
+          </a:bodyPr>
+          <a:lstStyle/>
+          <a:p>
+            <a:pPr algn="l"/>
+            <a:r>
+              <a:rPr sz="1300" b="1" i="0">
+                <a:solidFill>
+                  <a:srgbClr val="2B2B2B"/>
+                </a:solidFill>
+                <a:latin typeface="Calibri"/>
+              </a:rPr>
+              <a:t>R2  False positive from loose fallback</a:t>
+            </a:r>
+          </a:p>
+        </p:txBody>
+      </p:sp>
+      <p:sp>
+        <p:nvSpPr>
+          <p:cNvPr id="15" name="Rectangle 14"/>
+          <p:cNvSpPr/>
+          <p:nvPr/>
+        </p:nvSpPr>
+        <p:spPr>
+          <a:xfrm>
+            <a:off x="5349240" y="2697480"/>
+            <a:ext cx="1097280" cy="329184"/>
+          </a:xfrm>
+          <a:prstGeom prst="rect">
+            <a:avLst/>
+          </a:prstGeom>
+          <a:solidFill>
+            <a:srgbClr val="A83A5B"/>
+          </a:solidFill>
+          <a:ln>
+            <a:noFill/>
+          </a:ln>
+          <a:effectLst/>
+        </p:spPr>
+        <p:style>
+          <a:lnRef idx="1">
+            <a:schemeClr val="accent1"/>
+          </a:lnRef>
+          <a:fillRef idx="3">
+            <a:schemeClr val="accent1"/>
+          </a:fillRef>
+          <a:effectRef idx="2">
+            <a:schemeClr val="accent1"/>
+          </a:effectRef>
+          <a:fontRef idx="minor">
+            <a:schemeClr val="lt1"/>
+          </a:fontRef>
+        </p:style>
+        <p:txBody>
+          <a:bodyPr rtlCol="0" anchor="ctr"/>
+          <a:lstStyle/>
+          <a:p>
+            <a:pPr algn="ctr"/>
+          </a:p>
+        </p:txBody>
+      </p:sp>
+      <p:sp>
+        <p:nvSpPr>
+          <p:cNvPr id="16" name="TextBox 15"/>
+          <p:cNvSpPr txBox="1"/>
+          <p:nvPr/>
+        </p:nvSpPr>
+        <p:spPr>
+          <a:xfrm>
+            <a:off x="5349240" y="2697480"/>
+            <a:ext cx="1097280" cy="329184"/>
+          </a:xfrm>
+          <a:prstGeom prst="rect">
+            <a:avLst/>
+          </a:prstGeom>
+          <a:noFill/>
+        </p:spPr>
+        <p:txBody>
+          <a:bodyPr wrap="square" anchor="ctr" lIns="50800" rIns="50800" tIns="25400" bIns="25400">
+            <a:spAutoFit/>
+          </a:bodyPr>
+          <a:lstStyle/>
+          <a:p>
+            <a:pPr algn="ctr"/>
+            <a:r>
+              <a:rPr sz="1100" b="1" i="0">
+                <a:solidFill>
+                  <a:srgbClr val="FFFFFF"/>
+                </a:solidFill>
+                <a:latin typeface="Calibri"/>
+              </a:rPr>
+              <a:t>Partial</a:t>
+            </a:r>
+          </a:p>
+        </p:txBody>
+      </p:sp>
+      <p:sp>
+        <p:nvSpPr>
+          <p:cNvPr id="17" name="TextBox 16"/>
+          <p:cNvSpPr txBox="1"/>
+          <p:nvPr/>
+        </p:nvSpPr>
+        <p:spPr>
+          <a:xfrm>
+            <a:off x="6583680" y="2587752"/>
+            <a:ext cx="4023360" cy="548640"/>
+          </a:xfrm>
+          <a:prstGeom prst="rect">
+            <a:avLst/>
+          </a:prstGeom>
+          <a:noFill/>
+        </p:spPr>
+        <p:txBody>
+          <a:bodyPr wrap="square" anchor="ctr" lIns="50800" rIns="50800" tIns="25400" bIns="25400">
+            <a:spAutoFit/>
+          </a:bodyPr>
+          <a:lstStyle/>
+          <a:p>
+            <a:pPr algn="l"/>
+            <a:r>
+              <a:rPr sz="1100" b="0" i="0">
+                <a:solidFill>
+                  <a:srgbClr val="2B2B2B"/>
+                </a:solidFill>
+                <a:latin typeface="Calibri"/>
+              </a:rPr>
+              <a:t>CPE weighted higher; fallback → SUGGEST/FLAG. Per-vendor FP rate unmeasured</a:t>
+            </a:r>
+          </a:p>
+        </p:txBody>
+      </p:sp>
+      <p:sp>
+        <p:nvSpPr>
+          <p:cNvPr id="18" name="Rectangle 17"/>
+          <p:cNvSpPr/>
+          <p:nvPr/>
+        </p:nvSpPr>
+        <p:spPr>
+          <a:xfrm>
+            <a:off x="502920" y="3255264"/>
+            <a:ext cx="10149840" cy="640080"/>
+          </a:xfrm>
+          <a:prstGeom prst="rect">
+            <a:avLst/>
+          </a:prstGeom>
+          <a:solidFill>
+            <a:srgbClr val="F2F2F2"/>
+          </a:solidFill>
+          <a:ln>
+            <a:noFill/>
+          </a:ln>
+          <a:effectLst/>
+        </p:spPr>
+        <p:style>
+          <a:lnRef idx="1">
+            <a:schemeClr val="accent1"/>
+          </a:lnRef>
+          <a:fillRef idx="3">
+            <a:schemeClr val="accent1"/>
+          </a:fillRef>
+          <a:effectRef idx="2">
+            <a:schemeClr val="accent1"/>
+          </a:effectRef>
+          <a:fontRef idx="minor">
+            <a:schemeClr val="lt1"/>
+          </a:fontRef>
+        </p:style>
+        <p:txBody>
+          <a:bodyPr rtlCol="0" anchor="ctr"/>
+          <a:lstStyle/>
+          <a:p>
+            <a:pPr algn="ctr"/>
+          </a:p>
+        </p:txBody>
+      </p:sp>
+      <p:sp>
+        <p:nvSpPr>
+          <p:cNvPr id="19" name="TextBox 18"/>
+          <p:cNvSpPr txBox="1"/>
+          <p:nvPr/>
+        </p:nvSpPr>
+        <p:spPr>
+          <a:xfrm>
+            <a:off x="640080" y="3300984"/>
+            <a:ext cx="4754880" cy="548640"/>
+          </a:xfrm>
+          <a:prstGeom prst="rect">
+            <a:avLst/>
+          </a:prstGeom>
+          <a:noFill/>
+        </p:spPr>
+        <p:txBody>
+          <a:bodyPr wrap="square" anchor="ctr" lIns="50800" rIns="50800" tIns="25400" bIns="25400">
+            <a:spAutoFit/>
+          </a:bodyPr>
+          <a:lstStyle/>
+          <a:p>
+            <a:pPr algn="l"/>
+            <a:r>
+              <a:rPr sz="1300" b="1" i="0">
+                <a:solidFill>
+                  <a:srgbClr val="2B2B2B"/>
+                </a:solidFill>
+                <a:latin typeface="Calibri"/>
+              </a:rPr>
+              <a:t>R3  Severity-only prioritization</a:t>
+            </a:r>
+          </a:p>
+        </p:txBody>
+      </p:sp>
+      <p:sp>
+        <p:nvSpPr>
+          <p:cNvPr id="20" name="Rectangle 19"/>
+          <p:cNvSpPr/>
+          <p:nvPr/>
+        </p:nvSpPr>
+        <p:spPr>
+          <a:xfrm>
+            <a:off x="5349240" y="3410712"/>
+            <a:ext cx="1097280" cy="329184"/>
+          </a:xfrm>
+          <a:prstGeom prst="rect">
+            <a:avLst/>
+          </a:prstGeom>
+          <a:solidFill>
+            <a:srgbClr val="2E7D32"/>
+          </a:solidFill>
+          <a:ln>
+            <a:noFill/>
+          </a:ln>
+          <a:effectLst/>
+        </p:spPr>
+        <p:style>
+          <a:lnRef idx="1">
+            <a:schemeClr val="accent1"/>
+          </a:lnRef>
+          <a:fillRef idx="3">
+            <a:schemeClr val="accent1"/>
+          </a:fillRef>
+          <a:effectRef idx="2">
+            <a:schemeClr val="accent1"/>
+          </a:effectRef>
+          <a:fontRef idx="minor">
+            <a:schemeClr val="lt1"/>
+          </a:fontRef>
+        </p:style>
+        <p:txBody>
+          <a:bodyPr rtlCol="0" anchor="ctr"/>
+          <a:lstStyle/>
+          <a:p>
+            <a:pPr algn="ctr"/>
+          </a:p>
+        </p:txBody>
+      </p:sp>
+      <p:sp>
+        <p:nvSpPr>
+          <p:cNvPr id="21" name="TextBox 20"/>
+          <p:cNvSpPr txBox="1"/>
+          <p:nvPr/>
+        </p:nvSpPr>
+        <p:spPr>
+          <a:xfrm>
+            <a:off x="5349240" y="3410712"/>
+            <a:ext cx="1097280" cy="329184"/>
+          </a:xfrm>
+          <a:prstGeom prst="rect">
+            <a:avLst/>
+          </a:prstGeom>
+          <a:noFill/>
+        </p:spPr>
+        <p:txBody>
+          <a:bodyPr wrap="square" anchor="ctr" lIns="50800" rIns="50800" tIns="25400" bIns="25400">
+            <a:spAutoFit/>
+          </a:bodyPr>
+          <a:lstStyle/>
+          <a:p>
+            <a:pPr algn="ctr"/>
+            <a:r>
+              <a:rPr sz="1100" b="1" i="0">
+                <a:solidFill>
+                  <a:srgbClr val="FFFFFF"/>
+                </a:solidFill>
+                <a:latin typeface="Calibri"/>
+              </a:rPr>
+              <a:t>Mitigated</a:t>
+            </a:r>
+          </a:p>
+        </p:txBody>
+      </p:sp>
+      <p:sp>
+        <p:nvSpPr>
+          <p:cNvPr id="22" name="TextBox 21"/>
+          <p:cNvSpPr txBox="1"/>
+          <p:nvPr/>
+        </p:nvSpPr>
+        <p:spPr>
+          <a:xfrm>
+            <a:off x="6583680" y="3300984"/>
+            <a:ext cx="4023360" cy="548640"/>
+          </a:xfrm>
+          <a:prstGeom prst="rect">
+            <a:avLst/>
+          </a:prstGeom>
+          <a:noFill/>
+        </p:spPr>
+        <p:txBody>
+          <a:bodyPr wrap="square" anchor="ctr" lIns="50800" rIns="50800" tIns="25400" bIns="25400">
+            <a:spAutoFit/>
+          </a:bodyPr>
+          <a:lstStyle/>
+          <a:p>
+            <a:pPr algn="l"/>
+            <a:r>
+              <a:rPr sz="1100" b="0" i="0">
+                <a:solidFill>
+                  <a:srgbClr val="2B2B2B"/>
+                </a:solidFill>
+                <a:latin typeface="Calibri"/>
+              </a:rPr>
+              <a:t>KEV/EPSS priority promotes actively-exploited CVEs above equal-CVSS peers</a:t>
+            </a:r>
+          </a:p>
+        </p:txBody>
+      </p:sp>
+      <p:sp>
+        <p:nvSpPr>
+          <p:cNvPr id="23" name="Rectangle 22"/>
+          <p:cNvSpPr/>
+          <p:nvPr/>
+        </p:nvSpPr>
+        <p:spPr>
+          <a:xfrm>
+            <a:off x="502920" y="3968496"/>
+            <a:ext cx="10149840" cy="640080"/>
+          </a:xfrm>
+          <a:prstGeom prst="rect">
+            <a:avLst/>
+          </a:prstGeom>
+          <a:solidFill>
+            <a:srgbClr val="FFFFFF"/>
+          </a:solidFill>
+          <a:ln>
+            <a:noFill/>
+          </a:ln>
+          <a:effectLst/>
+        </p:spPr>
+        <p:style>
+          <a:lnRef idx="1">
+            <a:schemeClr val="accent1"/>
+          </a:lnRef>
+          <a:fillRef idx="3">
+            <a:schemeClr val="accent1"/>
+          </a:fillRef>
+          <a:effectRef idx="2">
+            <a:schemeClr val="accent1"/>
+          </a:effectRef>
+          <a:fontRef idx="minor">
+            <a:schemeClr val="lt1"/>
+          </a:fontRef>
+        </p:style>
+        <p:txBody>
+          <a:bodyPr rtlCol="0" anchor="ctr"/>
+          <a:lstStyle/>
+          <a:p>
+            <a:pPr algn="ctr"/>
+          </a:p>
+        </p:txBody>
+      </p:sp>
+      <p:sp>
+        <p:nvSpPr>
+          <p:cNvPr id="24" name="TextBox 23"/>
+          <p:cNvSpPr txBox="1"/>
+          <p:nvPr/>
+        </p:nvSpPr>
+        <p:spPr>
+          <a:xfrm>
+            <a:off x="640080" y="4014216"/>
+            <a:ext cx="4754880" cy="548640"/>
+          </a:xfrm>
+          <a:prstGeom prst="rect">
+            <a:avLst/>
+          </a:prstGeom>
+          <a:noFill/>
+        </p:spPr>
+        <p:txBody>
+          <a:bodyPr wrap="square" anchor="ctr" lIns="50800" rIns="50800" tIns="25400" bIns="25400">
+            <a:spAutoFit/>
+          </a:bodyPr>
+          <a:lstStyle/>
+          <a:p>
+            <a:pPr algn="l"/>
+            <a:r>
+              <a:rPr sz="1300" b="1" i="0">
+                <a:solidFill>
+                  <a:srgbClr val="2B2B2B"/>
+                </a:solidFill>
+                <a:latin typeface="Calibri"/>
+              </a:rPr>
+              <a:t>R4  Over-trust / automation bias</a:t>
+            </a:r>
+          </a:p>
+        </p:txBody>
+      </p:sp>
+      <p:sp>
+        <p:nvSpPr>
+          <p:cNvPr id="25" name="Rectangle 24"/>
+          <p:cNvSpPr/>
+          <p:nvPr/>
+        </p:nvSpPr>
+        <p:spPr>
+          <a:xfrm>
+            <a:off x="5349240" y="4123944"/>
+            <a:ext cx="1097280" cy="329184"/>
+          </a:xfrm>
+          <a:prstGeom prst="rect">
+            <a:avLst/>
+          </a:prstGeom>
+          <a:solidFill>
+            <a:srgbClr val="2E7D32"/>
+          </a:solidFill>
+          <a:ln>
+            <a:noFill/>
+          </a:ln>
+          <a:effectLst/>
+        </p:spPr>
+        <p:style>
+          <a:lnRef idx="1">
+            <a:schemeClr val="accent1"/>
+          </a:lnRef>
+          <a:fillRef idx="3">
+            <a:schemeClr val="accent1"/>
+          </a:fillRef>
+          <a:effectRef idx="2">
+            <a:schemeClr val="accent1"/>
+          </a:effectRef>
+          <a:fontRef idx="minor">
+            <a:schemeClr val="lt1"/>
+          </a:fontRef>
+        </p:style>
+        <p:txBody>
+          <a:bodyPr rtlCol="0" anchor="ctr"/>
+          <a:lstStyle/>
+          <a:p>
+            <a:pPr algn="ctr"/>
+          </a:p>
+        </p:txBody>
+      </p:sp>
+      <p:sp>
+        <p:nvSpPr>
+          <p:cNvPr id="26" name="TextBox 25"/>
+          <p:cNvSpPr txBox="1"/>
+          <p:nvPr/>
+        </p:nvSpPr>
+        <p:spPr>
+          <a:xfrm>
+            <a:off x="5349240" y="4123944"/>
+            <a:ext cx="1097280" cy="329184"/>
+          </a:xfrm>
+          <a:prstGeom prst="rect">
+            <a:avLst/>
+          </a:prstGeom>
+          <a:noFill/>
+        </p:spPr>
+        <p:txBody>
+          <a:bodyPr wrap="square" anchor="ctr" lIns="50800" rIns="50800" tIns="25400" bIns="25400">
+            <a:spAutoFit/>
+          </a:bodyPr>
+          <a:lstStyle/>
+          <a:p>
+            <a:pPr algn="ctr"/>
+            <a:r>
+              <a:rPr sz="1100" b="1" i="0">
+                <a:solidFill>
+                  <a:srgbClr val="FFFFFF"/>
+                </a:solidFill>
+                <a:latin typeface="Calibri"/>
+              </a:rPr>
+              <a:t>By design</a:t>
+            </a:r>
+          </a:p>
+        </p:txBody>
+      </p:sp>
+      <p:sp>
+        <p:nvSpPr>
+          <p:cNvPr id="27" name="TextBox 26"/>
+          <p:cNvSpPr txBox="1"/>
+          <p:nvPr/>
+        </p:nvSpPr>
+        <p:spPr>
+          <a:xfrm>
+            <a:off x="6583680" y="4014216"/>
+            <a:ext cx="4023360" cy="548640"/>
+          </a:xfrm>
+          <a:prstGeom prst="rect">
+            <a:avLst/>
+          </a:prstGeom>
+          <a:noFill/>
+        </p:spPr>
+        <p:txBody>
+          <a:bodyPr wrap="square" anchor="ctr" lIns="50800" rIns="50800" tIns="25400" bIns="25400">
+            <a:spAutoFit/>
+          </a:bodyPr>
+          <a:lstStyle/>
+          <a:p>
+            <a:pPr algn="l"/>
+            <a:r>
+              <a:rPr sz="1100" b="0" i="0">
+                <a:solidFill>
+                  <a:srgbClr val="2B2B2B"/>
+                </a:solidFill>
+                <a:latin typeface="Calibri"/>
+              </a:rPr>
+              <a:t>'no match ≠ safe' stated; low confidence routed to human FLAG</a:t>
+            </a:r>
+          </a:p>
+        </p:txBody>
+      </p:sp>
+      <p:sp>
+        <p:nvSpPr>
+          <p:cNvPr id="28" name="Rectangle 27"/>
+          <p:cNvSpPr/>
+          <p:nvPr/>
+        </p:nvSpPr>
+        <p:spPr>
+          <a:xfrm>
+            <a:off x="502920" y="4681728"/>
+            <a:ext cx="10149840" cy="640080"/>
+          </a:xfrm>
+          <a:prstGeom prst="rect">
+            <a:avLst/>
+          </a:prstGeom>
+          <a:solidFill>
+            <a:srgbClr val="F2F2F2"/>
+          </a:solidFill>
+          <a:ln>
+            <a:noFill/>
+          </a:ln>
+          <a:effectLst/>
+        </p:spPr>
+        <p:style>
+          <a:lnRef idx="1">
+            <a:schemeClr val="accent1"/>
+          </a:lnRef>
+          <a:fillRef idx="3">
+            <a:schemeClr val="accent1"/>
+          </a:fillRef>
+          <a:effectRef idx="2">
+            <a:schemeClr val="accent1"/>
+          </a:effectRef>
+          <a:fontRef idx="minor">
+            <a:schemeClr val="lt1"/>
+          </a:fontRef>
+        </p:style>
+        <p:txBody>
+          <a:bodyPr rtlCol="0" anchor="ctr"/>
+          <a:lstStyle/>
+          <a:p>
+            <a:pPr algn="ctr"/>
+          </a:p>
+        </p:txBody>
+      </p:sp>
+      <p:sp>
+        <p:nvSpPr>
+          <p:cNvPr id="29" name="TextBox 28"/>
+          <p:cNvSpPr txBox="1"/>
+          <p:nvPr/>
+        </p:nvSpPr>
+        <p:spPr>
+          <a:xfrm>
+            <a:off x="640080" y="4727448"/>
+            <a:ext cx="4754880" cy="548640"/>
+          </a:xfrm>
+          <a:prstGeom prst="rect">
+            <a:avLst/>
+          </a:prstGeom>
+          <a:noFill/>
+        </p:spPr>
+        <p:txBody>
+          <a:bodyPr wrap="square" anchor="ctr" lIns="50800" rIns="50800" tIns="25400" bIns="25400">
+            <a:spAutoFit/>
+          </a:bodyPr>
+          <a:lstStyle/>
+          <a:p>
+            <a:pPr algn="l"/>
+            <a:r>
+              <a:rPr sz="1300" b="1" i="0">
+                <a:solidFill>
+                  <a:srgbClr val="2B2B2B"/>
+                </a:solidFill>
+                <a:latin typeface="Calibri"/>
+              </a:rPr>
+              <a:t>R5  OCR / screenshot input errors</a:t>
+            </a:r>
+          </a:p>
+        </p:txBody>
+      </p:sp>
+      <p:sp>
+        <p:nvSpPr>
+          <p:cNvPr id="30" name="Rectangle 29"/>
+          <p:cNvSpPr/>
+          <p:nvPr/>
+        </p:nvSpPr>
+        <p:spPr>
+          <a:xfrm>
+            <a:off x="5349240" y="4837176"/>
+            <a:ext cx="1097280" cy="329184"/>
+          </a:xfrm>
+          <a:prstGeom prst="rect">
+            <a:avLst/>
+          </a:prstGeom>
+          <a:solidFill>
+            <a:srgbClr val="9EADB5"/>
+          </a:solidFill>
+          <a:ln>
+            <a:noFill/>
+          </a:ln>
+          <a:effectLst/>
+        </p:spPr>
+        <p:style>
+          <a:lnRef idx="1">
+            <a:schemeClr val="accent1"/>
+          </a:lnRef>
+          <a:fillRef idx="3">
+            <a:schemeClr val="accent1"/>
+          </a:fillRef>
+          <a:effectRef idx="2">
+            <a:schemeClr val="accent1"/>
+          </a:effectRef>
+          <a:fontRef idx="minor">
+            <a:schemeClr val="lt1"/>
+          </a:fontRef>
+        </p:style>
+        <p:txBody>
+          <a:bodyPr rtlCol="0" anchor="ctr"/>
+          <a:lstStyle/>
+          <a:p>
+            <a:pPr algn="ctr"/>
+          </a:p>
+        </p:txBody>
+      </p:sp>
+      <p:sp>
+        <p:nvSpPr>
+          <p:cNvPr id="31" name="TextBox 30"/>
+          <p:cNvSpPr txBox="1"/>
+          <p:nvPr/>
+        </p:nvSpPr>
+        <p:spPr>
+          <a:xfrm>
+            <a:off x="5349240" y="4837176"/>
+            <a:ext cx="1097280" cy="329184"/>
+          </a:xfrm>
+          <a:prstGeom prst="rect">
+            <a:avLst/>
+          </a:prstGeom>
+          <a:noFill/>
+        </p:spPr>
+        <p:txBody>
+          <a:bodyPr wrap="square" anchor="ctr" lIns="50800" rIns="50800" tIns="25400" bIns="25400">
+            <a:spAutoFit/>
+          </a:bodyPr>
+          <a:lstStyle/>
+          <a:p>
+            <a:pPr algn="ctr"/>
+            <a:r>
+              <a:rPr sz="1100" b="1" i="0">
+                <a:solidFill>
+                  <a:srgbClr val="FFFFFF"/>
+                </a:solidFill>
+                <a:latin typeface="Calibri"/>
+              </a:rPr>
+              <a:t>Open</a:t>
+            </a:r>
+          </a:p>
+        </p:txBody>
+      </p:sp>
+      <p:sp>
+        <p:nvSpPr>
+          <p:cNvPr id="32" name="TextBox 31"/>
+          <p:cNvSpPr txBox="1"/>
+          <p:nvPr/>
+        </p:nvSpPr>
+        <p:spPr>
+          <a:xfrm>
+            <a:off x="6583680" y="4727448"/>
+            <a:ext cx="4023360" cy="548640"/>
+          </a:xfrm>
+          <a:prstGeom prst="rect">
+            <a:avLst/>
+          </a:prstGeom>
+          <a:noFill/>
+        </p:spPr>
+        <p:txBody>
+          <a:bodyPr wrap="square" anchor="ctr" lIns="50800" rIns="50800" tIns="25400" bIns="25400">
+            <a:spAutoFit/>
+          </a:bodyPr>
+          <a:lstStyle/>
+          <a:p>
+            <a:pPr algn="l"/>
+            <a:r>
+              <a:rPr sz="1100" b="0" i="0">
+                <a:solidFill>
+                  <a:srgbClr val="2B2B2B"/>
+                </a:solidFill>
+                <a:latin typeface="Calibri"/>
+              </a:rPr>
+              <a:t>image path still TODO; confidence model already down-weights OCR source</a:t>
+            </a:r>
+          </a:p>
+        </p:txBody>
+      </p:sp>
+      <p:sp>
+        <p:nvSpPr>
+          <p:cNvPr id="33" name="Rectangle 32"/>
+          <p:cNvSpPr/>
+          <p:nvPr/>
+        </p:nvSpPr>
+        <p:spPr>
+          <a:xfrm>
+            <a:off x="502920" y="5394960"/>
+            <a:ext cx="10149840" cy="640080"/>
+          </a:xfrm>
+          <a:prstGeom prst="rect">
+            <a:avLst/>
+          </a:prstGeom>
+          <a:solidFill>
+            <a:srgbClr val="FFFFFF"/>
+          </a:solidFill>
+          <a:ln>
+            <a:noFill/>
+          </a:ln>
+          <a:effectLst/>
+        </p:spPr>
+        <p:style>
+          <a:lnRef idx="1">
+            <a:schemeClr val="accent1"/>
+          </a:lnRef>
+          <a:fillRef idx="3">
+            <a:schemeClr val="accent1"/>
+          </a:fillRef>
+          <a:effectRef idx="2">
+            <a:schemeClr val="accent1"/>
+          </a:effectRef>
+          <a:fontRef idx="minor">
+            <a:schemeClr val="lt1"/>
+          </a:fontRef>
+        </p:style>
+        <p:txBody>
+          <a:bodyPr rtlCol="0" anchor="ctr"/>
+          <a:lstStyle/>
+          <a:p>
+            <a:pPr algn="ctr"/>
+          </a:p>
+        </p:txBody>
+      </p:sp>
+      <p:sp>
+        <p:nvSpPr>
+          <p:cNvPr id="34" name="TextBox 33"/>
+          <p:cNvSpPr txBox="1"/>
+          <p:nvPr/>
+        </p:nvSpPr>
+        <p:spPr>
+          <a:xfrm>
+            <a:off x="640080" y="5440680"/>
+            <a:ext cx="4754880" cy="548640"/>
+          </a:xfrm>
+          <a:prstGeom prst="rect">
+            <a:avLst/>
+          </a:prstGeom>
+          <a:noFill/>
+        </p:spPr>
+        <p:txBody>
+          <a:bodyPr wrap="square" anchor="ctr" lIns="50800" rIns="50800" tIns="25400" bIns="25400">
+            <a:spAutoFit/>
+          </a:bodyPr>
+          <a:lstStyle/>
+          <a:p>
+            <a:pPr algn="l"/>
+            <a:r>
+              <a:rPr sz="1300" b="1" i="0">
+                <a:solidFill>
+                  <a:srgbClr val="2B2B2B"/>
+                </a:solidFill>
+                <a:latin typeface="Calibri"/>
+              </a:rPr>
+              <a:t>R6  Incidental personal data (GDPR)</a:t>
+            </a:r>
+          </a:p>
+        </p:txBody>
+      </p:sp>
+      <p:sp>
+        <p:nvSpPr>
+          <p:cNvPr id="35" name="Rectangle 34"/>
+          <p:cNvSpPr/>
+          <p:nvPr/>
+        </p:nvSpPr>
+        <p:spPr>
+          <a:xfrm>
+            <a:off x="5349240" y="5550408"/>
+            <a:ext cx="1097280" cy="329184"/>
+          </a:xfrm>
+          <a:prstGeom prst="rect">
+            <a:avLst/>
+          </a:prstGeom>
+          <a:solidFill>
+            <a:srgbClr val="2E7D32"/>
+          </a:solidFill>
+          <a:ln>
+            <a:noFill/>
+          </a:ln>
+          <a:effectLst/>
+        </p:spPr>
+        <p:style>
+          <a:lnRef idx="1">
+            <a:schemeClr val="accent1"/>
+          </a:lnRef>
+          <a:fillRef idx="3">
+            <a:schemeClr val="accent1"/>
+          </a:fillRef>
+          <a:effectRef idx="2">
+            <a:schemeClr val="accent1"/>
+          </a:effectRef>
+          <a:fontRef idx="minor">
+            <a:schemeClr val="lt1"/>
+          </a:fontRef>
+        </p:style>
+        <p:txBody>
+          <a:bodyPr rtlCol="0" anchor="ctr"/>
+          <a:lstStyle/>
+          <a:p>
+            <a:pPr algn="ctr"/>
+          </a:p>
+        </p:txBody>
+      </p:sp>
+      <p:sp>
+        <p:nvSpPr>
+          <p:cNvPr id="36" name="TextBox 35"/>
+          <p:cNvSpPr txBox="1"/>
+          <p:nvPr/>
+        </p:nvSpPr>
+        <p:spPr>
+          <a:xfrm>
+            <a:off x="5349240" y="5550408"/>
+            <a:ext cx="1097280" cy="329184"/>
+          </a:xfrm>
+          <a:prstGeom prst="rect">
+            <a:avLst/>
+          </a:prstGeom>
+          <a:noFill/>
+        </p:spPr>
+        <p:txBody>
+          <a:bodyPr wrap="square" anchor="ctr" lIns="50800" rIns="50800" tIns="25400" bIns="25400">
+            <a:spAutoFit/>
+          </a:bodyPr>
+          <a:lstStyle/>
+          <a:p>
+            <a:pPr algn="ctr"/>
+            <a:r>
+              <a:rPr sz="1100" b="1" i="0">
+                <a:solidFill>
+                  <a:srgbClr val="FFFFFF"/>
+                </a:solidFill>
+                <a:latin typeface="Calibri"/>
+              </a:rPr>
+              <a:t>Mitigated</a:t>
+            </a:r>
+          </a:p>
+        </p:txBody>
+      </p:sp>
+      <p:sp>
+        <p:nvSpPr>
+          <p:cNvPr id="37" name="TextBox 36"/>
+          <p:cNvSpPr txBox="1"/>
+          <p:nvPr/>
+        </p:nvSpPr>
+        <p:spPr>
+          <a:xfrm>
+            <a:off x="6583680" y="5440680"/>
+            <a:ext cx="4023360" cy="548640"/>
+          </a:xfrm>
+          <a:prstGeom prst="rect">
+            <a:avLst/>
+          </a:prstGeom>
+          <a:noFill/>
+        </p:spPr>
+        <p:txBody>
+          <a:bodyPr wrap="square" anchor="ctr" lIns="50800" rIns="50800" tIns="25400" bIns="25400">
+            <a:spAutoFit/>
+          </a:bodyPr>
+          <a:lstStyle/>
+          <a:p>
+            <a:pPr algn="l"/>
+            <a:r>
+              <a:rPr sz="1100" b="0" i="0">
+                <a:solidFill>
+                  <a:srgbClr val="2B2B2B"/>
+                </a:solidFill>
+                <a:latin typeface="Calibri"/>
+              </a:rPr>
+              <a:t>inputs hashed in audit log; screenshot text flagged &amp; minimized</a:t>
+            </a:r>
+          </a:p>
+        </p:txBody>
+      </p:sp>
+      <p:sp>
+        <p:nvSpPr>
+          <p:cNvPr id="38" name="TextBox 37"/>
+          <p:cNvSpPr txBox="1"/>
+          <p:nvPr/>
+        </p:nvSpPr>
+        <p:spPr>
+          <a:xfrm>
+            <a:off x="502920" y="6446520"/>
+            <a:ext cx="8229600" cy="274320"/>
+          </a:xfrm>
+          <a:prstGeom prst="rect">
+            <a:avLst/>
+          </a:prstGeom>
+          <a:noFill/>
+        </p:spPr>
+        <p:txBody>
+          <a:bodyPr wrap="square" anchor="t" lIns="50800" rIns="50800" tIns="25400" bIns="25400">
+            <a:spAutoFit/>
+          </a:bodyPr>
+          <a:lstStyle/>
+          <a:p>
+            <a:pPr algn="l"/>
+            <a:r>
+              <a:rPr sz="900" b="0" i="0">
+                <a:solidFill>
+                  <a:srgbClr val="9EADB5"/>
+                </a:solidFill>
+                <a:latin typeface="Calibri"/>
+              </a:rPr>
+              <a:t>IT Security Agent — Responsible AI &amp; Data Ethics</a:t>
+            </a:r>
+          </a:p>
+        </p:txBody>
+      </p:sp>
+      <p:sp>
+        <p:nvSpPr>
+          <p:cNvPr id="39" name="TextBox 38"/>
+          <p:cNvSpPr txBox="1"/>
+          <p:nvPr/>
+        </p:nvSpPr>
+        <p:spPr>
+          <a:xfrm>
+            <a:off x="10332720" y="6446520"/>
+            <a:ext cx="548640" cy="274320"/>
+          </a:xfrm>
+          <a:prstGeom prst="rect">
+            <a:avLst/>
+          </a:prstGeom>
+          <a:noFill/>
+        </p:spPr>
+        <p:txBody>
+          <a:bodyPr wrap="square" anchor="t" lIns="50800" rIns="50800" tIns="25400" bIns="25400">
+            <a:spAutoFit/>
+          </a:bodyPr>
+          <a:lstStyle/>
+          <a:p>
+            <a:pPr algn="r"/>
+            <a:r>
+              <a:rPr sz="900" b="0" i="0">
+                <a:solidFill>
+                  <a:srgbClr val="9EADB5"/>
+                </a:solidFill>
+                <a:latin typeface="Calibri"/>
+              </a:rPr>
+              <a:t>7</a:t>
+            </a:r>
+          </a:p>
+        </p:txBody>
+      </p:sp>
+    </p:spTree>
+  </p:cSld>
+  <p:clrMapOvr>
+    <a:masterClrMapping/>
+  </p:clrMapOvr>
+</p:sld>
+</file>
+
+<file path=ppt/slides/slide9.xml><?xml version="1.0" encoding="utf-8"?>
 <p:sld xmlns:a="http://schemas.openxmlformats.org/drawingml/2006/main" xmlns:p="http://schemas.openxmlformats.org/presentationml/2006/main" xmlns:r="http://schemas.openxmlformats.org/officeDocument/2006/relationships">
   <p:cSld>
     <p:spTree>
